--- a/presentation/Delft Phd scrap handling - completed.pptx
+++ b/presentation/Delft Phd scrap handling - completed.pptx
@@ -4,20 +4,23 @@
   <p:sldMasterIdLst>
     <p:sldMasterId id="2147483648" r:id="rId1"/>
   </p:sldMasterIdLst>
+  <p:notesMasterIdLst>
+    <p:notesMasterId r:id="rId15"/>
+  </p:notesMasterIdLst>
   <p:sldIdLst>
     <p:sldId id="256" r:id="rId2"/>
     <p:sldId id="258" r:id="rId3"/>
     <p:sldId id="257" r:id="rId4"/>
-    <p:sldId id="259" r:id="rId10"/>
-    <p:sldId id="260" r:id="rId11"/>
-    <p:sldId id="261" r:id="rId12"/>
-    <p:sldId id="262" r:id="rId13"/>
-    <p:sldId id="263" r:id="rId14"/>
-    <p:sldId id="264" r:id="rId15"/>
-    <p:sldId id="265" r:id="rId16"/>
-    <p:sldId id="266" r:id="rId17"/>
-    <p:sldId id="267" r:id="rId18"/>
-    <p:sldId id="268" r:id="rId19"/>
+    <p:sldId id="259" r:id="rId5"/>
+    <p:sldId id="260" r:id="rId6"/>
+    <p:sldId id="261" r:id="rId7"/>
+    <p:sldId id="262" r:id="rId8"/>
+    <p:sldId id="263" r:id="rId9"/>
+    <p:sldId id="264" r:id="rId10"/>
+    <p:sldId id="265" r:id="rId11"/>
+    <p:sldId id="266" r:id="rId12"/>
+    <p:sldId id="267" r:id="rId13"/>
+    <p:sldId id="268" r:id="rId14"/>
   </p:sldIdLst>
   <p:sldSz cx="12192000" cy="6858000"/>
   <p:notesSz cx="6858000" cy="9144000"/>
@@ -116,11 +119,16 @@
       </a:defRPr>
     </a:lvl9pPr>
   </p:defaultTextStyle>
+  <p:extLst>
+    <p:ext uri="{EFAFB233-063F-42B5-8137-9DF3F51BA10A}">
+      <p15:sldGuideLst xmlns:p15="http://schemas.microsoft.com/office/powerpoint/2012/main"/>
+    </p:ext>
+  </p:extLst>
 </p:presentation>
 </file>
 
 <file path=ppt/notesMasters/notesMaster1.xml><?xml version="1.0" encoding="utf-8"?>
-<p:notesMaster xmlns:a="http://schemas.openxmlformats.org/drawingml/2006/main" xmlns:p="http://schemas.openxmlformats.org/presentationml/2006/main" xmlns:r="http://schemas.openxmlformats.org/officeDocument/2006/relationships">
+<p:notesMaster xmlns:a="http://schemas.openxmlformats.org/drawingml/2006/main" xmlns:r="http://schemas.openxmlformats.org/officeDocument/2006/relationships" xmlns:p="http://schemas.openxmlformats.org/presentationml/2006/main">
   <p:cSld>
     <p:bg>
       <p:bgRef idx="1001">
@@ -141,241 +149,16 @@
           <a:chExt cx="0" cy="0"/>
         </a:xfrm>
       </p:grpSpPr>
-      <p:sp>
-        <p:nvSpPr>
-          <p:cNvPr id="2" name="Header Placeholder 1"/>
-          <p:cNvSpPr>
-            <a:spLocks noGrp="1"/>
-          </p:cNvSpPr>
-          <p:nvPr>
-            <p:ph type="hdr" sz="quarter"/>
-          </p:nvPr>
-        </p:nvSpPr>
-        <p:spPr>
-          <a:xfrm>
-            <a:off x="0" y="0"/>
-            <a:ext cx="2971800" cy="457200"/>
-          </a:xfrm>
-          <a:prstGeom prst="rect">
-            <a:avLst/>
-          </a:prstGeom>
-        </p:spPr>
-        <p:txBody>
-          <a:bodyPr vert="horz" lIns="91440" tIns="45720" rIns="91440" bIns="45720" rtlCol="0"/>
-          <a:lstStyle>
-            <a:lvl1pPr algn="l">
-              <a:defRPr sz="1200"/>
-            </a:lvl1pPr>
-          </a:lstStyle>
-          <a:p>
-            <a:endParaRPr lang="en-US"/>
-          </a:p>
-        </p:txBody>
-      </p:sp>
-      <p:sp>
-        <p:nvSpPr>
-          <p:cNvPr id="3" name="Date Placeholder 2"/>
-          <p:cNvSpPr>
-            <a:spLocks noGrp="1"/>
-          </p:cNvSpPr>
-          <p:nvPr>
-            <p:ph type="dt" idx="1"/>
-          </p:nvPr>
-        </p:nvSpPr>
-        <p:spPr>
-          <a:xfrm>
-            <a:off x="3884613" y="0"/>
-            <a:ext cx="2971800" cy="457200"/>
-          </a:xfrm>
-          <a:prstGeom prst="rect">
-            <a:avLst/>
-          </a:prstGeom>
-        </p:spPr>
-        <p:txBody>
-          <a:bodyPr vert="horz" lIns="91440" tIns="45720" rIns="91440" bIns="45720" rtlCol="0"/>
-          <a:lstStyle>
-            <a:lvl1pPr algn="r">
-              <a:defRPr sz="1200"/>
-            </a:lvl1pPr>
-          </a:lstStyle>
-          <a:p>
-            <a:fld id="{0F89C1C7-3DCD-1040-A9CF-14679D8B5DDD}" type="datetimeFigureOut">
-              <a:rPr lang="en-US" smtClean="0"/>
-              <a:t>10/17/16</a:t>
-            </a:fld>
-            <a:endParaRPr lang="en-US"/>
-          </a:p>
-        </p:txBody>
-      </p:sp>
-      <p:sp>
-        <p:nvSpPr>
-          <p:cNvPr id="4" name="Slide Image Placeholder 3"/>
-          <p:cNvSpPr>
-            <a:spLocks noGrp="1" noRot="1" noChangeAspect="1"/>
-          </p:cNvSpPr>
-          <p:nvPr>
-            <p:ph type="sldImg" idx="2"/>
-          </p:nvPr>
-        </p:nvSpPr>
-        <p:spPr>
-          <a:xfrm>
-            <a:off x="1143000" y="685800"/>
-            <a:ext cx="4572000" cy="3429000"/>
-          </a:xfrm>
-          <a:prstGeom prst="rect">
-            <a:avLst/>
-          </a:prstGeom>
-          <a:noFill/>
-          <a:ln w="12700">
-            <a:solidFill>
-              <a:prstClr val="black"/>
-            </a:solidFill>
-          </a:ln>
-        </p:spPr>
-        <p:txBody>
-          <a:bodyPr vert="horz" lIns="91440" tIns="45720" rIns="91440" bIns="45720" rtlCol="0" anchor="ctr"/>
-          <a:lstStyle/>
-          <a:p>
-            <a:endParaRPr lang="en-US"/>
-          </a:p>
-        </p:txBody>
-      </p:sp>
-      <p:sp>
-        <p:nvSpPr>
-          <p:cNvPr id="5" name="Notes Placeholder 4"/>
-          <p:cNvSpPr>
-            <a:spLocks noGrp="1"/>
-          </p:cNvSpPr>
-          <p:nvPr>
-            <p:ph type="body" sz="quarter" idx="3"/>
-          </p:nvPr>
-        </p:nvSpPr>
-        <p:spPr>
-          <a:xfrm>
-            <a:off x="685800" y="4343400"/>
-            <a:ext cx="5486400" cy="4114800"/>
-          </a:xfrm>
-          <a:prstGeom prst="rect">
-            <a:avLst/>
-          </a:prstGeom>
-        </p:spPr>
-        <p:txBody>
-          <a:bodyPr vert="horz" lIns="91440" tIns="45720" rIns="91440" bIns="45720" rtlCol="0"/>
-          <a:lstStyle/>
-          <a:p>
-            <a:pPr lvl="0"/>
-            <a:r>
-              <a:rPr lang="en-US" smtClean="0"/>
-              <a:t>Click to edit Master text styles</a:t>
-            </a:r>
-          </a:p>
-          <a:p>
-            <a:pPr lvl="1"/>
-            <a:r>
-              <a:rPr lang="en-US" smtClean="0"/>
-              <a:t>Second level</a:t>
-            </a:r>
-          </a:p>
-          <a:p>
-            <a:pPr lvl="2"/>
-            <a:r>
-              <a:rPr lang="en-US" smtClean="0"/>
-              <a:t>Third level</a:t>
-            </a:r>
-          </a:p>
-          <a:p>
-            <a:pPr lvl="3"/>
-            <a:r>
-              <a:rPr lang="en-US" smtClean="0"/>
-              <a:t>Fourth level</a:t>
-            </a:r>
-          </a:p>
-          <a:p>
-            <a:pPr lvl="4"/>
-            <a:r>
-              <a:rPr lang="en-US" smtClean="0"/>
-              <a:t>Fifth level</a:t>
-            </a:r>
-            <a:endParaRPr lang="en-US"/>
-          </a:p>
-        </p:txBody>
-      </p:sp>
-      <p:sp>
-        <p:nvSpPr>
-          <p:cNvPr id="6" name="Footer Placeholder 5"/>
-          <p:cNvSpPr>
-            <a:spLocks noGrp="1"/>
-          </p:cNvSpPr>
-          <p:nvPr>
-            <p:ph type="ftr" sz="quarter" idx="4"/>
-          </p:nvPr>
-        </p:nvSpPr>
-        <p:spPr>
-          <a:xfrm>
-            <a:off x="0" y="8685213"/>
-            <a:ext cx="2971800" cy="457200"/>
-          </a:xfrm>
-          <a:prstGeom prst="rect">
-            <a:avLst/>
-          </a:prstGeom>
-        </p:spPr>
-        <p:txBody>
-          <a:bodyPr vert="horz" lIns="91440" tIns="45720" rIns="91440" bIns="45720" rtlCol="0" anchor="b"/>
-          <a:lstStyle>
-            <a:lvl1pPr algn="l">
-              <a:defRPr sz="1200"/>
-            </a:lvl1pPr>
-          </a:lstStyle>
-          <a:p>
-            <a:endParaRPr lang="en-US"/>
-          </a:p>
-        </p:txBody>
-      </p:sp>
-      <p:sp>
-        <p:nvSpPr>
-          <p:cNvPr id="7" name="Slide Number Placeholder 6"/>
-          <p:cNvSpPr>
-            <a:spLocks noGrp="1"/>
-          </p:cNvSpPr>
-          <p:nvPr>
-            <p:ph type="sldNum" sz="quarter" idx="5"/>
-          </p:nvPr>
-        </p:nvSpPr>
-        <p:spPr>
-          <a:xfrm>
-            <a:off x="3884613" y="8685213"/>
-            <a:ext cx="2971800" cy="457200"/>
-          </a:xfrm>
-          <a:prstGeom prst="rect">
-            <a:avLst/>
-          </a:prstGeom>
-        </p:spPr>
-        <p:txBody>
-          <a:bodyPr vert="horz" lIns="91440" tIns="45720" rIns="91440" bIns="45720" rtlCol="0" anchor="b"/>
-          <a:lstStyle>
-            <a:lvl1pPr algn="r">
-              <a:defRPr sz="1200"/>
-            </a:lvl1pPr>
-          </a:lstStyle>
-          <a:p>
-            <a:fld id="{BB5E49A5-4136-284D-997B-48E1D791AD67}" type="slidenum">
-              <a:rPr lang="en-US" smtClean="0"/>
-              <a:t>‹#›</a:t>
-            </a:fld>
-            <a:endParaRPr lang="en-US"/>
-          </a:p>
-        </p:txBody>
-      </p:sp>
     </p:spTree>
     <p:extLst>
       <p:ext uri="{BB962C8B-B14F-4D97-AF65-F5344CB8AC3E}">
-        <p14:creationId xmlns:p14="http://schemas.microsoft.com/office/powerpoint/2010/main" val="2623252185"/>
+        <p14:creationId xmlns:p14="http://schemas.microsoft.com/office/powerpoint/2010/main" val="1147847572"/>
       </p:ext>
     </p:extLst>
   </p:cSld>
   <p:clrMap bg1="lt1" tx1="dk1" bg2="lt2" tx2="dk2" accent1="accent1" accent2="accent2" accent3="accent3" accent4="accent4" accent5="accent5" accent6="accent6" hlink="hlink" folHlink="folHlink"/>
   <p:notesStyle>
-    <a:lvl1pPr marL="0" algn="l" defTabSz="457200" rtl="0" eaLnBrk="1" latinLnBrk="0" hangingPunct="1">
+    <a:lvl1pPr marL="0" algn="l" defTabSz="914400" rtl="0" eaLnBrk="1" latinLnBrk="0" hangingPunct="1">
       <a:defRPr sz="1200" kern="1200">
         <a:solidFill>
           <a:schemeClr val="tx1"/>
@@ -385,7 +168,7 @@
         <a:cs typeface="+mn-cs"/>
       </a:defRPr>
     </a:lvl1pPr>
-    <a:lvl2pPr marL="457200" algn="l" defTabSz="457200" rtl="0" eaLnBrk="1" latinLnBrk="0" hangingPunct="1">
+    <a:lvl2pPr marL="457200" algn="l" defTabSz="914400" rtl="0" eaLnBrk="1" latinLnBrk="0" hangingPunct="1">
       <a:defRPr sz="1200" kern="1200">
         <a:solidFill>
           <a:schemeClr val="tx1"/>
@@ -395,7 +178,7 @@
         <a:cs typeface="+mn-cs"/>
       </a:defRPr>
     </a:lvl2pPr>
-    <a:lvl3pPr marL="914400" algn="l" defTabSz="457200" rtl="0" eaLnBrk="1" latinLnBrk="0" hangingPunct="1">
+    <a:lvl3pPr marL="914400" algn="l" defTabSz="914400" rtl="0" eaLnBrk="1" latinLnBrk="0" hangingPunct="1">
       <a:defRPr sz="1200" kern="1200">
         <a:solidFill>
           <a:schemeClr val="tx1"/>
@@ -405,7 +188,7 @@
         <a:cs typeface="+mn-cs"/>
       </a:defRPr>
     </a:lvl3pPr>
-    <a:lvl4pPr marL="1371600" algn="l" defTabSz="457200" rtl="0" eaLnBrk="1" latinLnBrk="0" hangingPunct="1">
+    <a:lvl4pPr marL="1371600" algn="l" defTabSz="914400" rtl="0" eaLnBrk="1" latinLnBrk="0" hangingPunct="1">
       <a:defRPr sz="1200" kern="1200">
         <a:solidFill>
           <a:schemeClr val="tx1"/>
@@ -415,7 +198,7 @@
         <a:cs typeface="+mn-cs"/>
       </a:defRPr>
     </a:lvl4pPr>
-    <a:lvl5pPr marL="1828800" algn="l" defTabSz="457200" rtl="0" eaLnBrk="1" latinLnBrk="0" hangingPunct="1">
+    <a:lvl5pPr marL="1828800" algn="l" defTabSz="914400" rtl="0" eaLnBrk="1" latinLnBrk="0" hangingPunct="1">
       <a:defRPr sz="1200" kern="1200">
         <a:solidFill>
           <a:schemeClr val="tx1"/>
@@ -425,7 +208,7 @@
         <a:cs typeface="+mn-cs"/>
       </a:defRPr>
     </a:lvl5pPr>
-    <a:lvl6pPr marL="2286000" algn="l" defTabSz="457200" rtl="0" eaLnBrk="1" latinLnBrk="0" hangingPunct="1">
+    <a:lvl6pPr marL="2286000" algn="l" defTabSz="914400" rtl="0" eaLnBrk="1" latinLnBrk="0" hangingPunct="1">
       <a:defRPr sz="1200" kern="1200">
         <a:solidFill>
           <a:schemeClr val="tx1"/>
@@ -435,7 +218,7 @@
         <a:cs typeface="+mn-cs"/>
       </a:defRPr>
     </a:lvl6pPr>
-    <a:lvl7pPr marL="2743200" algn="l" defTabSz="457200" rtl="0" eaLnBrk="1" latinLnBrk="0" hangingPunct="1">
+    <a:lvl7pPr marL="2743200" algn="l" defTabSz="914400" rtl="0" eaLnBrk="1" latinLnBrk="0" hangingPunct="1">
       <a:defRPr sz="1200" kern="1200">
         <a:solidFill>
           <a:schemeClr val="tx1"/>
@@ -445,7 +228,7 @@
         <a:cs typeface="+mn-cs"/>
       </a:defRPr>
     </a:lvl7pPr>
-    <a:lvl8pPr marL="3200400" algn="l" defTabSz="457200" rtl="0" eaLnBrk="1" latinLnBrk="0" hangingPunct="1">
+    <a:lvl8pPr marL="3200400" algn="l" defTabSz="914400" rtl="0" eaLnBrk="1" latinLnBrk="0" hangingPunct="1">
       <a:defRPr sz="1200" kern="1200">
         <a:solidFill>
           <a:schemeClr val="tx1"/>
@@ -455,7 +238,7 @@
         <a:cs typeface="+mn-cs"/>
       </a:defRPr>
     </a:lvl8pPr>
-    <a:lvl9pPr marL="3657600" algn="l" defTabSz="457200" rtl="0" eaLnBrk="1" latinLnBrk="0" hangingPunct="1">
+    <a:lvl9pPr marL="3657600" algn="l" defTabSz="914400" rtl="0" eaLnBrk="1" latinLnBrk="0" hangingPunct="1">
       <a:defRPr sz="1200" kern="1200">
         <a:solidFill>
           <a:schemeClr val="tx1"/>
@@ -470,7 +253,7 @@
 </file>
 
 <file path=ppt/notesSlides/notesSlide1.xml><?xml version="1.0" encoding="utf-8"?>
-<p:notes xmlns:a="http://schemas.openxmlformats.org/drawingml/2006/main" xmlns:p="http://schemas.openxmlformats.org/presentationml/2006/main" xmlns:r="http://schemas.openxmlformats.org/officeDocument/2006/relationships">
+<p:notes xmlns:a="http://schemas.openxmlformats.org/drawingml/2006/main" xmlns:r="http://schemas.openxmlformats.org/officeDocument/2006/relationships" xmlns:p="http://schemas.openxmlformats.org/presentationml/2006/main">
   <p:cSld>
     <p:spTree>
       <p:nvGrpSpPr>
@@ -490,7 +273,7 @@
         <p:nvSpPr>
           <p:cNvPr id="2" name="Slide Image Placeholder 1"/>
           <p:cNvSpPr>
-            <a:spLocks noGrp="1"/>
+            <a:spLocks noGrp="1" noRot="1" noChangeAspect="1"/>
           </p:cNvSpPr>
           <p:nvPr>
             <p:ph type="sldImg" idx="2"/>
@@ -505,7 +288,7 @@
             <a:spLocks noGrp="1"/>
           </p:cNvSpPr>
           <p:nvPr>
-            <p:ph type="body" idx="3" sz="quarter"/>
+            <p:ph type="body" sz="quarter" idx="3"/>
           </p:nvPr>
         </p:nvSpPr>
         <p:spPr/>
@@ -514,18 +297,20 @@
           <a:lstStyle/>
           <a:p>
             <a:r>
-              <a:t>[1:00 – 1:45]</a:t>
-            </a:r>
-          </a:p>
-          <a:p>
-            <a:r>
-              <a:t>"Our agenda today directly addresses the key requirements: First, the core mechanics of DEM applied to conveyor systems; second, the state of the art and literature gaps; third, my explicit research methodology and anticipated challenges; and finally, a personal reflection on my competencies."</a:t>
-            </a:r>
-          </a:p>
-          <a:p/>
-          <a:p>
-            <a:r>
-              <a:t>Slide notes: the four agenda items map 1:1 to the four topics requested for the interview (see planning.md, Topics 1-4).</a:t>
+              <a:t>[0:00 – 1:00]</a:t>
+            </a:r>
+          </a:p>
+          <a:p>
+            <a:r>
+              <a:t>"Good morning, everyone. Today, I am excited to present my research proposal for developing an advanced particle-based modelling framework for optimising scrap handling systems. In the next 15 minutes, I will walk you through the fundamental theory of the Discrete Element Method (DEM), the critical knowledge gaps in EAF scrap feeding, my proposed 4-year methodology, and how my technical background aligns with Tata Steel's operational goals."</a:t>
+            </a:r>
+          </a:p>
+          <a:p>
+            <a:endParaRPr/>
+          </a:p>
+          <a:p>
+            <a:r>
+              <a:t>Slide notes: keep the opening short and confident; make eye contact; the committee values time management — this deck is timed for exactly 15 minutes of speaking (slides 2–12), with the reference slide [13] as backup.</a:t>
             </a:r>
           </a:p>
         </p:txBody>
@@ -537,7 +322,7 @@
             <a:spLocks noGrp="1"/>
           </p:cNvSpPr>
           <p:nvPr>
-            <p:ph type="sldNum" idx="5" sz="quarter"/>
+            <p:ph type="sldNum" sz="quarter" idx="5"/>
           </p:nvPr>
         </p:nvSpPr>
         <p:spPr/>
@@ -551,7 +336,7 @@
 </file>
 
 <file path=ppt/notesSlides/notesSlide10.xml><?xml version="1.0" encoding="utf-8"?>
-<p:notes xmlns:a="http://schemas.openxmlformats.org/drawingml/2006/main" xmlns:p="http://schemas.openxmlformats.org/presentationml/2006/main" xmlns:r="http://schemas.openxmlformats.org/officeDocument/2006/relationships">
+<p:notes xmlns:a="http://schemas.openxmlformats.org/drawingml/2006/main" xmlns:r="http://schemas.openxmlformats.org/officeDocument/2006/relationships" xmlns:p="http://schemas.openxmlformats.org/presentationml/2006/main">
   <p:cSld>
     <p:spTree>
       <p:nvGrpSpPr>
@@ -571,7 +356,7 @@
         <p:nvSpPr>
           <p:cNvPr id="2" name="Slide Image Placeholder 1"/>
           <p:cNvSpPr>
-            <a:spLocks noGrp="1"/>
+            <a:spLocks noGrp="1" noRot="1" noChangeAspect="1"/>
           </p:cNvSpPr>
           <p:nvPr>
             <p:ph type="sldImg" idx="2"/>
@@ -586,7 +371,7 @@
             <a:spLocks noGrp="1"/>
           </p:cNvSpPr>
           <p:nvPr>
-            <p:ph type="body" idx="3" sz="quarter"/>
+            <p:ph type="body" sz="quarter" idx="3"/>
           </p:nvPr>
         </p:nvSpPr>
         <p:spPr/>
@@ -595,18 +380,23 @@
           <a:lstStyle/>
           <a:p>
             <a:r>
-              <a:t>[13:15 – 14:15]</a:t>
-            </a:r>
-          </a:p>
-          <a:p>
-            <a:r>
-              <a:t>"Beyond technical software skills, a project backed by Tata Steel requires strong project management and cross-functional communication. I pride myself on being able to translate dense academic data into clear, operational value for plant operations. I am eager to collaborate directly with industrial engineers in the Netherlands, gathering on-site data and ensuring that my doctoral research delivers highly practical, bottom-line improvements to the steelmaking process."</a:t>
-            </a:r>
-          </a:p>
-          <a:p/>
-          <a:p>
-            <a:r>
-              <a:t>Slide notes: this is a values slide, not a CV. Name-drop the IJmuiden site and the green-steel context (HBI + scrap, hydrogen-based route) to show you know what the partner is building.</a:t>
+              <a:rPr dirty="0"/>
+              <a:t>[11:45 – 13:15]</a:t>
+            </a:r>
+          </a:p>
+          <a:p>
+            <a:r>
+              <a:rPr dirty="0"/>
+              <a:t>"Why am I the right candidate for this specific project? My academic training has provided me with a robust foundation in granular physics, continuum mechanics, and numerical programming. I have practical experience handling large data arrays and translating raw physical phenomena into structural code. Furthermore, I am deeply familiar with modern engineering simulation frameworks and possess the hands-on laboratory discipline required to design and execute validation experiments that will make our virtual models reliable."</a:t>
+            </a:r>
+          </a:p>
+          <a:p>
+            <a:endParaRPr dirty="0"/>
+          </a:p>
+          <a:p>
+            <a:r>
+              <a:rPr dirty="0"/>
+              <a:t>Slide notes: be ready to name the exact tools you have touched (EDEM/Rocky/LIGGGHTS/MFIX-DEM) and the exact experiments you can run (AOR, drop, draw-down, mass flow). The open-source angle shows cost awareness for a 4-year industrial PhD.</a:t>
             </a:r>
           </a:p>
         </p:txBody>
@@ -618,7 +408,7 @@
             <a:spLocks noGrp="1"/>
           </p:cNvSpPr>
           <p:nvPr>
-            <p:ph type="sldNum" idx="5" sz="quarter"/>
+            <p:ph type="sldNum" sz="quarter" idx="5"/>
           </p:nvPr>
         </p:nvSpPr>
         <p:spPr/>
@@ -632,7 +422,7 @@
 </file>
 
 <file path=ppt/notesSlides/notesSlide11.xml><?xml version="1.0" encoding="utf-8"?>
-<p:notes xmlns:a="http://schemas.openxmlformats.org/drawingml/2006/main" xmlns:p="http://schemas.openxmlformats.org/presentationml/2006/main" xmlns:r="http://schemas.openxmlformats.org/officeDocument/2006/relationships">
+<p:notes xmlns:a="http://schemas.openxmlformats.org/drawingml/2006/main" xmlns:r="http://schemas.openxmlformats.org/officeDocument/2006/relationships" xmlns:p="http://schemas.openxmlformats.org/presentationml/2006/main">
   <p:cSld>
     <p:spTree>
       <p:nvGrpSpPr>
@@ -652,7 +442,7 @@
         <p:nvSpPr>
           <p:cNvPr id="2" name="Slide Image Placeholder 1"/>
           <p:cNvSpPr>
-            <a:spLocks noGrp="1"/>
+            <a:spLocks noGrp="1" noRot="1" noChangeAspect="1"/>
           </p:cNvSpPr>
           <p:nvPr>
             <p:ph type="sldImg" idx="2"/>
@@ -667,7 +457,7 @@
             <a:spLocks noGrp="1"/>
           </p:cNvSpPr>
           <p:nvPr>
-            <p:ph type="body" idx="3" sz="quarter"/>
+            <p:ph type="body" sz="quarter" idx="3"/>
           </p:nvPr>
         </p:nvSpPr>
         <p:spPr/>
@@ -676,18 +466,23 @@
           <a:lstStyle/>
           <a:p>
             <a:r>
-              <a:t>[14:15 – 15:00]</a:t>
-            </a:r>
-          </a:p>
-          <a:p>
-            <a:r>
-              <a:t>"In conclusion, this project represents a vital step toward making continuous EAF furnace feeding more predictable, energy-efficient, and physically stable. By mastering non-spherical particle mechanics, bridging the literature gap in scrap handling, and applying rigorous coarse-graining calibration, this research will provide invaluable tools for Tata Steel Netherlands. Thank you for your time, and I welcome any questions you may have."</a:t>
-            </a:r>
-          </a:p>
-          <a:p/>
-          <a:p>
-            <a:r>
-              <a:t>Anticipated questions to prepare: (1) Why multi-sphere instead of polyhedra/voxels for scrap? → contact-detection cost &gt;80% CPU, robustness, existing EDEM support. (2) How do you validate at industrial scale? → high-speed video, load cells, vision-based feeder speed (Xiao et al.), mass balance. (3) What if upscaling breaks? → per-quantity scale limits (Rossow/Schefler), hybrid AVM+IFM-style strategy. (4) HBI relevance to Tata's green steel route.</a:t>
+              <a:rPr dirty="0"/>
+              <a:t>[13:15 – 14:15]</a:t>
+            </a:r>
+          </a:p>
+          <a:p>
+            <a:r>
+              <a:rPr dirty="0"/>
+              <a:t>"Beyond technical software skills, a project backed by Tata Steel requires strong project management and cross-functional communication. I pride myself on being able to translate dense academic data into clear, operational value for plant operations. I am eager to collaborate directly with industrial engineers in the Netherlands, gathering on-site data and ensuring that my doctoral research delivers highly practical, bottom-line improvements to the steelmaking process."</a:t>
+            </a:r>
+          </a:p>
+          <a:p>
+            <a:endParaRPr dirty="0"/>
+          </a:p>
+          <a:p>
+            <a:r>
+              <a:rPr dirty="0"/>
+              <a:t>Slide notes: this is a values slide, not a CV. Name-drop the IJmuiden site and the green-steel context (HBI + scrap, hydrogen-based route) to show you know what the partner is building.</a:t>
             </a:r>
           </a:p>
         </p:txBody>
@@ -699,7 +494,7 @@
             <a:spLocks noGrp="1"/>
           </p:cNvSpPr>
           <p:nvPr>
-            <p:ph type="sldNum" idx="5" sz="quarter"/>
+            <p:ph type="sldNum" sz="quarter" idx="5"/>
           </p:nvPr>
         </p:nvSpPr>
         <p:spPr/>
@@ -713,7 +508,7 @@
 </file>
 
 <file path=ppt/notesSlides/notesSlide12.xml><?xml version="1.0" encoding="utf-8"?>
-<p:notes xmlns:a="http://schemas.openxmlformats.org/drawingml/2006/main" xmlns:p="http://schemas.openxmlformats.org/presentationml/2006/main" xmlns:r="http://schemas.openxmlformats.org/officeDocument/2006/relationships">
+<p:notes xmlns:a="http://schemas.openxmlformats.org/drawingml/2006/main" xmlns:r="http://schemas.openxmlformats.org/officeDocument/2006/relationships" xmlns:p="http://schemas.openxmlformats.org/presentationml/2006/main">
   <p:cSld>
     <p:spTree>
       <p:nvGrpSpPr>
@@ -733,7 +528,7 @@
         <p:nvSpPr>
           <p:cNvPr id="2" name="Slide Image Placeholder 1"/>
           <p:cNvSpPr>
-            <a:spLocks noGrp="1"/>
+            <a:spLocks noGrp="1" noRot="1" noChangeAspect="1"/>
           </p:cNvSpPr>
           <p:nvPr>
             <p:ph type="sldImg" idx="2"/>
@@ -748,7 +543,7 @@
             <a:spLocks noGrp="1"/>
           </p:cNvSpPr>
           <p:nvPr>
-            <p:ph type="body" idx="3" sz="quarter"/>
+            <p:ph type="body" sz="quarter" idx="3"/>
           </p:nvPr>
         </p:nvSpPr>
         <p:spPr/>
@@ -757,7 +552,39 @@
           <a:lstStyle/>
           <a:p>
             <a:r>
-              <a:t>Reference list — no speaking time. References [1]–[11] have full PDFs in the 'papers/particles-based models' folder of the project repository; [12]–[14] are the additional state-of-the-art sources from the literature plan (planning.md).</a:t>
+              <a:rPr dirty="0"/>
+              <a:t>[14:15 – 15:00]</a:t>
+            </a:r>
+          </a:p>
+          <a:p>
+            <a:r>
+              <a:rPr dirty="0"/>
+              <a:t>"In conclusion, this project represents a vital step toward making continuous EAF furnace feeding more predictable, energy-efficient, and physically stable. By mastering non-spherical particle mechanics, bridging the literature gap in scrap handling, and applying rigorous coarse-graining calibration, this research will provide invaluable tools for Tata Steel Netherlands. Thank you for your time, and I welcome any questions you may have."</a:t>
+            </a:r>
+          </a:p>
+          <a:p>
+            <a:endParaRPr dirty="0"/>
+          </a:p>
+          <a:p>
+            <a:r>
+              <a:rPr dirty="0"/>
+              <a:t>Anticipated questions to prepare: (1) Why multi-sphere instead of </a:t>
+            </a:r>
+            <a:r>
+              <a:rPr dirty="0" err="1"/>
+              <a:t>polyhedra</a:t>
+            </a:r>
+            <a:r>
+              <a:rPr dirty="0"/>
+              <a:t>/voxels for scrap? → contact-detection cost &gt;80% CPU, robustness, existing EDEM support. (2) How do you validate at industrial scale? → high-speed video, load cells, vision-based feeder speed (Xiao et al.), mass balance. (3) What if upscaling breaks? → per-quantity scale limits (Rossow/</a:t>
+            </a:r>
+            <a:r>
+              <a:rPr dirty="0" err="1"/>
+              <a:t>Schefler</a:t>
+            </a:r>
+            <a:r>
+              <a:rPr dirty="0"/>
+              <a:t>), hybrid AVM+IFM-style strategy. (4) HBI relevance to Tata's green steel route.</a:t>
             </a:r>
           </a:p>
         </p:txBody>
@@ -769,7 +596,7 @@
             <a:spLocks noGrp="1"/>
           </p:cNvSpPr>
           <p:nvPr>
-            <p:ph type="sldNum" idx="5" sz="quarter"/>
+            <p:ph type="sldNum" sz="quarter" idx="5"/>
           </p:nvPr>
         </p:nvSpPr>
         <p:spPr/>
@@ -783,7 +610,7 @@
 </file>
 
 <file path=ppt/notesSlides/notesSlide13.xml><?xml version="1.0" encoding="utf-8"?>
-<p:notes xmlns:a="http://schemas.openxmlformats.org/drawingml/2006/main" xmlns:p="http://schemas.openxmlformats.org/presentationml/2006/main" xmlns:r="http://schemas.openxmlformats.org/officeDocument/2006/relationships">
+<p:notes xmlns:a="http://schemas.openxmlformats.org/drawingml/2006/main" xmlns:r="http://schemas.openxmlformats.org/officeDocument/2006/relationships" xmlns:p="http://schemas.openxmlformats.org/presentationml/2006/main">
   <p:cSld>
     <p:spTree>
       <p:nvGrpSpPr>
@@ -803,7 +630,7 @@
         <p:nvSpPr>
           <p:cNvPr id="2" name="Slide Image Placeholder 1"/>
           <p:cNvSpPr>
-            <a:spLocks noGrp="1"/>
+            <a:spLocks noGrp="1" noRot="1" noChangeAspect="1"/>
           </p:cNvSpPr>
           <p:nvPr>
             <p:ph type="sldImg" idx="2"/>
@@ -818,7 +645,7 @@
             <a:spLocks noGrp="1"/>
           </p:cNvSpPr>
           <p:nvPr>
-            <p:ph type="body" idx="3" sz="quarter"/>
+            <p:ph type="body" sz="quarter" idx="3"/>
           </p:nvPr>
         </p:nvSpPr>
         <p:spPr/>
@@ -827,18 +654,16 @@
           <a:lstStyle/>
           <a:p>
             <a:r>
-              <a:t>[0:00 – 1:00]</a:t>
-            </a:r>
-          </a:p>
-          <a:p>
-            <a:r>
-              <a:t>"Good morning, everyone. Today, I am excited to present my research proposal for developing an advanced particle-based modelling framework for optimising scrap handling systems. In the next 15 minutes, I will walk you through the fundamental theory of the Discrete Element Method (DEM), the critical knowledge gaps in EAF scrap feeding, my proposed 4-year methodology, and how my technical background aligns with Tata Steel's operational goals."</a:t>
-            </a:r>
-          </a:p>
-          <a:p/>
-          <a:p>
-            <a:r>
-              <a:t>Slide notes: keep the opening short and confident; make eye contact; the committee values time management — this deck is timed for exactly 15 minutes of speaking (slides 2–12), with the reference slide [13] as backup.</a:t>
+              <a:rPr dirty="0"/>
+              <a:t>Reference list — no speaking time. References [1]–[11] have full PDFs in the 'papers/particles-based models' folder of the project repository; [12]–[14] are the additional state-of-the-art sources from the literature plan (</a:t>
+            </a:r>
+            <a:r>
+              <a:rPr dirty="0" err="1"/>
+              <a:t>planning.md</a:t>
+            </a:r>
+            <a:r>
+              <a:rPr dirty="0"/>
+              <a:t>).</a:t>
             </a:r>
           </a:p>
         </p:txBody>
@@ -850,7 +675,7 @@
             <a:spLocks noGrp="1"/>
           </p:cNvSpPr>
           <p:nvPr>
-            <p:ph type="sldNum" idx="5" sz="quarter"/>
+            <p:ph type="sldNum" sz="quarter" idx="5"/>
           </p:nvPr>
         </p:nvSpPr>
         <p:spPr/>
@@ -864,7 +689,7 @@
 </file>
 
 <file path=ppt/notesSlides/notesSlide2.xml><?xml version="1.0" encoding="utf-8"?>
-<p:notes xmlns:a="http://schemas.openxmlformats.org/drawingml/2006/main" xmlns:p="http://schemas.openxmlformats.org/presentationml/2006/main" xmlns:r="http://schemas.openxmlformats.org/officeDocument/2006/relationships">
+<p:notes xmlns:a="http://schemas.openxmlformats.org/drawingml/2006/main" xmlns:r="http://schemas.openxmlformats.org/officeDocument/2006/relationships" xmlns:p="http://schemas.openxmlformats.org/presentationml/2006/main">
   <p:cSld>
     <p:spTree>
       <p:nvGrpSpPr>
@@ -884,7 +709,7 @@
         <p:nvSpPr>
           <p:cNvPr id="2" name="Slide Image Placeholder 1"/>
           <p:cNvSpPr>
-            <a:spLocks noGrp="1"/>
+            <a:spLocks noGrp="1" noRot="1" noChangeAspect="1"/>
           </p:cNvSpPr>
           <p:nvPr>
             <p:ph type="sldImg" idx="2"/>
@@ -899,7 +724,7 @@
             <a:spLocks noGrp="1"/>
           </p:cNvSpPr>
           <p:nvPr>
-            <p:ph type="body" idx="3" sz="quarter"/>
+            <p:ph type="body" sz="quarter" idx="3"/>
           </p:nvPr>
         </p:nvSpPr>
         <p:spPr/>
@@ -908,18 +733,31 @@
           <a:lstStyle/>
           <a:p>
             <a:r>
-              <a:t>[1:45 – 3:15]</a:t>
-            </a:r>
-          </a:p>
-          <a:p>
-            <a:r>
-              <a:t>"Let's begin with the fundamental physics. The Discrete Element Method operates by tracking individual particles via Newton's laws of motion. In industrial scrap yards, particles are highly non-spherical. To capture realistic friction and interlocking behaviour, I will employ Multi-Sphere models or Polyhedral elements. While spheres are computationally cheap, they roll too easily. We must account for the high aspect ratios and sharp edges typical of steel scrap to accurately simulate structural bridging and interlocking."</a:t>
-            </a:r>
-          </a:p>
-          <a:p/>
-          <a:p>
-            <a:r>
-              <a:t>Slide notes: right column shows (top) the 3D super-quadric shape family from Lu et al. (2015) Fig. 6 — blockiness parameters ε1/ε2 sweep from rounded to blocky; (bottom) their implicit equation (16) and Fig. 4b contact-region approximation. Emphasise: for scrap we will mainly use multi-sphere clusters built from 3D scans (robust + fast contact detection), with super-quadrics/polyhedra where smooth/angular fidelity matters. Contact detection can take &gt;80% of CPU time, so the choice of representation is a compute decision, not just a physics decision.</a:t>
+              <a:rPr dirty="0"/>
+              <a:t>[1:00 – 1:45]</a:t>
+            </a:r>
+          </a:p>
+          <a:p>
+            <a:r>
+              <a:rPr dirty="0"/>
+              <a:t>"Our agenda today directly addresses the key requirements: First, the core mechanics of DEM applied to conveyor systems; second, the state of the art and literature gaps; third, my explicit research methodology and anticipated challenges; and finally, a personal reflection on my competencies."</a:t>
+            </a:r>
+          </a:p>
+          <a:p>
+            <a:endParaRPr dirty="0"/>
+          </a:p>
+          <a:p>
+            <a:r>
+              <a:rPr dirty="0"/>
+              <a:t>Slide notes: the four agenda items map 1:1 to the four topics requested for the interview (see </a:t>
+            </a:r>
+            <a:r>
+              <a:rPr dirty="0" err="1"/>
+              <a:t>planning.md</a:t>
+            </a:r>
+            <a:r>
+              <a:rPr dirty="0"/>
+              <a:t>, Topics 1-4).</a:t>
             </a:r>
           </a:p>
         </p:txBody>
@@ -931,7 +769,7 @@
             <a:spLocks noGrp="1"/>
           </p:cNvSpPr>
           <p:nvPr>
-            <p:ph type="sldNum" idx="5" sz="quarter"/>
+            <p:ph type="sldNum" sz="quarter" idx="5"/>
           </p:nvPr>
         </p:nvSpPr>
         <p:spPr/>
@@ -945,7 +783,7 @@
 </file>
 
 <file path=ppt/notesSlides/notesSlide3.xml><?xml version="1.0" encoding="utf-8"?>
-<p:notes xmlns:a="http://schemas.openxmlformats.org/drawingml/2006/main" xmlns:p="http://schemas.openxmlformats.org/presentationml/2006/main" xmlns:r="http://schemas.openxmlformats.org/officeDocument/2006/relationships">
+<p:notes xmlns:a="http://schemas.openxmlformats.org/drawingml/2006/main" xmlns:r="http://schemas.openxmlformats.org/officeDocument/2006/relationships" xmlns:p="http://schemas.openxmlformats.org/presentationml/2006/main">
   <p:cSld>
     <p:spTree>
       <p:nvGrpSpPr>
@@ -965,7 +803,7 @@
         <p:nvSpPr>
           <p:cNvPr id="2" name="Slide Image Placeholder 1"/>
           <p:cNvSpPr>
-            <a:spLocks noGrp="1"/>
+            <a:spLocks noGrp="1" noRot="1" noChangeAspect="1"/>
           </p:cNvSpPr>
           <p:nvPr>
             <p:ph type="sldImg" idx="2"/>
@@ -980,7 +818,7 @@
             <a:spLocks noGrp="1"/>
           </p:cNvSpPr>
           <p:nvPr>
-            <p:ph type="body" idx="3" sz="quarter"/>
+            <p:ph type="body" sz="quarter" idx="3"/>
           </p:nvPr>
         </p:nvSpPr>
         <p:spPr/>
@@ -989,18 +827,55 @@
           <a:lstStyle/>
           <a:p>
             <a:r>
-              <a:t>[3:15 – 4:45]</a:t>
-            </a:r>
-          </a:p>
-          <a:p>
-            <a:r>
-              <a:t>"When bulk scrap transfers from a conveyor belt to an EAF infeed chute, it undergoes severe dynamic stress. By solving the contact force equations at moving boundaries, our model will simulate wall friction, boundary velocity distributions, and impact energy. On vibratory feeders, the frequency and amplitude of the bed dictate particle acceleration. DEM allows us to isolate how different frequencies cause structural segregation, ensuring we can predict which particles discharge first and where the mechanical wear on the hopper liners will be most severe."</a:t>
-            </a:r>
-          </a:p>
-          <a:p/>
-          <a:p>
-            <a:r>
-              <a:t>Slide notes: cite Rossow &amp; Coetzee (chevron belt + chute, high-speed validation, upscaling limit 1.6) and Schefler &amp; Coetzee (cohesive discharge, &lt;15% error) as the mature modelling base; You et al. as the vibration-segregation evidence; Xiao et al. as proof that real scrap-feeding measurement exists today (vision-based) — our models can be validated against it.</a:t>
+              <a:rPr dirty="0"/>
+              <a:t>[1:45 – 3:15]</a:t>
+            </a:r>
+          </a:p>
+          <a:p>
+            <a:r>
+              <a:rPr dirty="0"/>
+              <a:t>"Let's begin with the fundamental physics. The Discrete Element Method operates by tracking individual particles via Newton's laws of motion. In industrial scrap yards, particles are highly non-spherical. To capture realistic friction and interlocking </a:t>
+            </a:r>
+            <a:r>
+              <a:rPr dirty="0" err="1"/>
+              <a:t>behaviour</a:t>
+            </a:r>
+            <a:r>
+              <a:rPr dirty="0"/>
+              <a:t>, I will employ Multi-Sphere models or Polyhedral elements. While spheres are computationally cheap, they roll too easily. We must account for the high aspect ratios and sharp edges typical of steel scrap to accurately simulate structural bridging and interlocking."</a:t>
+            </a:r>
+          </a:p>
+          <a:p>
+            <a:endParaRPr dirty="0"/>
+          </a:p>
+          <a:p>
+            <a:r>
+              <a:rPr dirty="0"/>
+              <a:t>Slide notes: right column shows (top) the 3D super-quadric shape family from Lu et al. (2015) Fig. 6 — </a:t>
+            </a:r>
+            <a:r>
+              <a:rPr dirty="0" err="1"/>
+              <a:t>blockiness</a:t>
+            </a:r>
+            <a:r>
+              <a:rPr dirty="0"/>
+              <a:t> parameters ε1/ε2 sweep from rounded to blocky; (bottom) their implicit equation (16) and Fig. 4b contact-region approximation. </a:t>
+            </a:r>
+            <a:r>
+              <a:rPr dirty="0" err="1"/>
+              <a:t>Emphasise</a:t>
+            </a:r>
+            <a:r>
+              <a:rPr dirty="0"/>
+              <a:t>: for scrap we will mainly use multi-sphere clusters built from 3D scans (robust + fast contact detection), with super-quadrics/</a:t>
+            </a:r>
+            <a:r>
+              <a:rPr dirty="0" err="1"/>
+              <a:t>polyhedra</a:t>
+            </a:r>
+            <a:r>
+              <a:rPr dirty="0"/>
+              <a:t> where smooth/angular fidelity matters. Contact detection can take &gt;80% of CPU time, so the choice of representation is a compute decision, not just a physics decision.</a:t>
             </a:r>
           </a:p>
         </p:txBody>
@@ -1012,7 +887,7 @@
             <a:spLocks noGrp="1"/>
           </p:cNvSpPr>
           <p:nvPr>
-            <p:ph type="sldNum" idx="5" sz="quarter"/>
+            <p:ph type="sldNum" sz="quarter" idx="5"/>
           </p:nvPr>
         </p:nvSpPr>
         <p:spPr/>
@@ -1026,7 +901,7 @@
 </file>
 
 <file path=ppt/notesSlides/notesSlide4.xml><?xml version="1.0" encoding="utf-8"?>
-<p:notes xmlns:a="http://schemas.openxmlformats.org/drawingml/2006/main" xmlns:p="http://schemas.openxmlformats.org/presentationml/2006/main" xmlns:r="http://schemas.openxmlformats.org/officeDocument/2006/relationships">
+<p:notes xmlns:a="http://schemas.openxmlformats.org/drawingml/2006/main" xmlns:r="http://schemas.openxmlformats.org/officeDocument/2006/relationships" xmlns:p="http://schemas.openxmlformats.org/presentationml/2006/main">
   <p:cSld>
     <p:spTree>
       <p:nvGrpSpPr>
@@ -1046,7 +921,7 @@
         <p:nvSpPr>
           <p:cNvPr id="2" name="Slide Image Placeholder 1"/>
           <p:cNvSpPr>
-            <a:spLocks noGrp="1"/>
+            <a:spLocks noGrp="1" noRot="1" noChangeAspect="1"/>
           </p:cNvSpPr>
           <p:nvPr>
             <p:ph type="sldImg" idx="2"/>
@@ -1061,7 +936,7 @@
             <a:spLocks noGrp="1"/>
           </p:cNvSpPr>
           <p:nvPr>
-            <p:ph type="body" idx="3" sz="quarter"/>
+            <p:ph type="body" sz="quarter" idx="3"/>
           </p:nvPr>
         </p:nvSpPr>
         <p:spPr/>
@@ -1070,18 +945,31 @@
           <a:lstStyle/>
           <a:p>
             <a:r>
-              <a:t>[4:45 – 6:15]</a:t>
-            </a:r>
-          </a:p>
-          <a:p>
-            <a:r>
-              <a:t>"Reviewing the current state of the art shows a significant disconnect. Excellent DEM models exist for blast furnace charging — such as research calibrated at Tata Steel IJmuiden — but these focus on uniform materials like iron ore pellets. Conversely, current EAF literature focuses heavily on the thermodynamic and CFD chemical melting inside the furnace, completely neglecting the mechanical bulk flow of raw scrap before it enters the liquid bath. There is a profound lack of physical particle tracking models for heterogeneous scrap recipes."</a:t>
-            </a:r>
-          </a:p>
-          <a:p/>
-          <a:p>
-            <a:r>
-              <a:t>Slide notes: table walks top→bottom: reviews (Lu 2015, Zhong 2016) → industrial BF charging at Tata Steel IJmuiden (Ahmed et al. 2026) → conveyor/chute DEM validation studies (Rossow 2021, Schefler 2023, You 2018) → EAF melting models (Chen 2022, Li 2008). Close on the bottom strip: both halves are mature, the interface is not.</a:t>
+              <a:rPr dirty="0"/>
+              <a:t>[3:15 – 4:45]</a:t>
+            </a:r>
+          </a:p>
+          <a:p>
+            <a:r>
+              <a:rPr dirty="0"/>
+              <a:t>"When bulk scrap transfers from a conveyor belt to an EAF infeed chute, it undergoes severe dynamic stress. By solving the contact force equations at moving boundaries, our model will simulate wall friction, boundary velocity distributions, and impact energy. On vibratory feeders, the frequency and amplitude of the bed dictate particle acceleration. DEM allows us to isolate how different frequencies cause structural segregation, ensuring we can predict which particles discharge first and where the mechanical wear on the hopper liners will be most severe."</a:t>
+            </a:r>
+          </a:p>
+          <a:p>
+            <a:endParaRPr dirty="0"/>
+          </a:p>
+          <a:p>
+            <a:r>
+              <a:rPr dirty="0"/>
+              <a:t>Slide notes: cite Rossow &amp; Coetzee (chevron belt + chute, high-speed validation, upscaling limit 1.6) and </a:t>
+            </a:r>
+            <a:r>
+              <a:rPr dirty="0" err="1"/>
+              <a:t>Schefler</a:t>
+            </a:r>
+            <a:r>
+              <a:rPr dirty="0"/>
+              <a:t> &amp; Coetzee (cohesive discharge, &lt;15% error) as the mature modelling base; You et al. as the vibration-segregation evidence; Xiao et al. as proof that real scrap-feeding measurement exists today (vision-based) — our models can be validated against it.</a:t>
             </a:r>
           </a:p>
         </p:txBody>
@@ -1093,7 +981,7 @@
             <a:spLocks noGrp="1"/>
           </p:cNvSpPr>
           <p:nvPr>
-            <p:ph type="sldNum" idx="5" sz="quarter"/>
+            <p:ph type="sldNum" sz="quarter" idx="5"/>
           </p:nvPr>
         </p:nvSpPr>
         <p:spPr/>
@@ -1107,7 +995,7 @@
 </file>
 
 <file path=ppt/notesSlides/notesSlide5.xml><?xml version="1.0" encoding="utf-8"?>
-<p:notes xmlns:a="http://schemas.openxmlformats.org/drawingml/2006/main" xmlns:p="http://schemas.openxmlformats.org/presentationml/2006/main" xmlns:r="http://schemas.openxmlformats.org/officeDocument/2006/relationships">
+<p:notes xmlns:a="http://schemas.openxmlformats.org/drawingml/2006/main" xmlns:r="http://schemas.openxmlformats.org/officeDocument/2006/relationships" xmlns:p="http://schemas.openxmlformats.org/presentationml/2006/main">
   <p:cSld>
     <p:spTree>
       <p:nvGrpSpPr>
@@ -1127,7 +1015,7 @@
         <p:nvSpPr>
           <p:cNvPr id="2" name="Slide Image Placeholder 1"/>
           <p:cNvSpPr>
-            <a:spLocks noGrp="1"/>
+            <a:spLocks noGrp="1" noRot="1" noChangeAspect="1"/>
           </p:cNvSpPr>
           <p:nvPr>
             <p:ph type="sldImg" idx="2"/>
@@ -1142,7 +1030,7 @@
             <a:spLocks noGrp="1"/>
           </p:cNvSpPr>
           <p:nvPr>
-            <p:ph type="body" idx="3" sz="quarter"/>
+            <p:ph type="body" sz="quarter" idx="3"/>
           </p:nvPr>
         </p:nvSpPr>
         <p:spPr/>
@@ -1151,18 +1039,39 @@
           <a:lstStyle/>
           <a:p>
             <a:r>
-              <a:t>[6:15 – 7:30]</a:t>
-            </a:r>
-          </a:p>
-          <a:p>
-            <a:r>
-              <a:t>"This brings us to the two key knowledge gaps this PhD will bridge. First, how do we model a bulk material stream that is structurally heterogeneous, ranging from lightweight shredded metal to massive, dense heavy melting scrap bundles? Second, how does this heterogeneity trigger material segregation during continuous charging? If fine scrap blocks the chute or heavy bundles drop unpredictably, it causes thermal imbalances and massive energy spikes in the EAF."</a:t>
-            </a:r>
-          </a:p>
-          <a:p/>
-          <a:p>
-            <a:r>
-              <a:t>Slide notes: the three secondary gaps come from the literature review (see LeapSpace summary in the repo): coupling of handling &amp; furnace physics; realistic scrap shape &amp; packing; charge dynamics during delivery; validation with industrial scrap; multiphysics at the charge surface. Tie Gap 2 to Li et al. 2008: late/iceberg melting is exactly what happens when the charge arrives wrong.</a:t>
+              <a:rPr dirty="0"/>
+              <a:t>[4:45 – 6:15]</a:t>
+            </a:r>
+          </a:p>
+          <a:p>
+            <a:r>
+              <a:rPr dirty="0"/>
+              <a:t>"Reviewing the current state of the art shows a significant disconnect. Excellent DEM models exist for blast furnace charging — such as research calibrated at Tata Steel IJmuiden — but these focus on uniform materials like iron ore pellets. Conversely, current EAF literature focuses heavily on the thermodynamic and CFD chemical melting inside the furnace, completely neglecting the mechanical bulk flow of raw scrap before it enters the liquid bath. There is a profound lack of physical particle tracking models for heterogeneous scrap recipes."</a:t>
+            </a:r>
+          </a:p>
+          <a:p>
+            <a:endParaRPr dirty="0"/>
+          </a:p>
+          <a:p>
+            <a:r>
+              <a:rPr dirty="0"/>
+              <a:t>Slide notes: table walks </a:t>
+            </a:r>
+            <a:r>
+              <a:rPr dirty="0" err="1"/>
+              <a:t>top→bottom</a:t>
+            </a:r>
+            <a:r>
+              <a:rPr dirty="0"/>
+              <a:t>: reviews (Lu 2015, Zhong 2016) → industrial BF charging at Tata Steel IJmuiden (Ahmed et al. 2026) → conveyor/chute DEM validation studies (Rossow 2021, </a:t>
+            </a:r>
+            <a:r>
+              <a:rPr dirty="0" err="1"/>
+              <a:t>Schefler</a:t>
+            </a:r>
+            <a:r>
+              <a:rPr dirty="0"/>
+              <a:t> 2023, You 2018) → EAF melting models (Chen 2022, Li 2008). Close on the bottom strip: both halves are mature, the interface is not.</a:t>
             </a:r>
           </a:p>
         </p:txBody>
@@ -1174,7 +1083,7 @@
             <a:spLocks noGrp="1"/>
           </p:cNvSpPr>
           <p:nvPr>
-            <p:ph type="sldNum" idx="5" sz="quarter"/>
+            <p:ph type="sldNum" sz="quarter" idx="5"/>
           </p:nvPr>
         </p:nvSpPr>
         <p:spPr/>
@@ -1188,7 +1097,7 @@
 </file>
 
 <file path=ppt/notesSlides/notesSlide6.xml><?xml version="1.0" encoding="utf-8"?>
-<p:notes xmlns:a="http://schemas.openxmlformats.org/drawingml/2006/main" xmlns:p="http://schemas.openxmlformats.org/presentationml/2006/main" xmlns:r="http://schemas.openxmlformats.org/officeDocument/2006/relationships">
+<p:notes xmlns:a="http://schemas.openxmlformats.org/drawingml/2006/main" xmlns:r="http://schemas.openxmlformats.org/officeDocument/2006/relationships" xmlns:p="http://schemas.openxmlformats.org/presentationml/2006/main">
   <p:cSld>
     <p:spTree>
       <p:nvGrpSpPr>
@@ -1208,7 +1117,7 @@
         <p:nvSpPr>
           <p:cNvPr id="2" name="Slide Image Placeholder 1"/>
           <p:cNvSpPr>
-            <a:spLocks noGrp="1"/>
+            <a:spLocks noGrp="1" noRot="1" noChangeAspect="1"/>
           </p:cNvSpPr>
           <p:nvPr>
             <p:ph type="sldImg" idx="2"/>
@@ -1223,7 +1132,7 @@
             <a:spLocks noGrp="1"/>
           </p:cNvSpPr>
           <p:nvPr>
-            <p:ph type="body" idx="3" sz="quarter"/>
+            <p:ph type="body" sz="quarter" idx="3"/>
           </p:nvPr>
         </p:nvSpPr>
         <p:spPr/>
@@ -1232,18 +1141,39 @@
           <a:lstStyle/>
           <a:p>
             <a:r>
-              <a:t>[7:30 – 9:00]</a:t>
-            </a:r>
-          </a:p>
-          <a:p>
-            <a:r>
-              <a:t>"To address these gaps, my proposed 4-year research plan is structured systematically. Year 1 focuses on mathematical code development and baseline shape characterisation. Year 2 will integrate industrial data sets from Tata Steel Netherlands to calibrate our virtual materials. Year 3 will focus on simulating various charging recipes and sequence optimisation. Year 4 will translate these computational models into practical, actionable rules for industrial plant engineers."</a:t>
-            </a:r>
-          </a:p>
-          <a:p/>
-          <a:p>
-            <a:r>
-              <a:t>Slide notes: Y1 = Lu/Zhong shape representations + lab calibration suite; Y2 = Tata Steel NL data + validation (Rossow-style high-speed footage, Xiao-style vision measurement); Y3 = recipe optimisation incl. segregation; Y4 = digital twin + recommendations. Emphasise the artefact-per-year discipline.</a:t>
+              <a:rPr dirty="0"/>
+              <a:t>[6:15 – 7:30]</a:t>
+            </a:r>
+          </a:p>
+          <a:p>
+            <a:r>
+              <a:rPr dirty="0"/>
+              <a:t>"This brings us to the two key knowledge gaps this PhD will bridge. First, how do we model a bulk material stream that is structurally heterogeneous, ranging from lightweight shredded metal to massive, dense heavy melting scrap bundles? Second, how does this heterogeneity trigger material segregation during continuous charging? If fine scrap blocks the chute or heavy bundles drop unpredictably, it causes thermal imbalances and massive energy spikes in the EAF."</a:t>
+            </a:r>
+          </a:p>
+          <a:p>
+            <a:endParaRPr dirty="0"/>
+          </a:p>
+          <a:p>
+            <a:r>
+              <a:rPr dirty="0"/>
+              <a:t>Slide notes: the three secondary gaps come from the literature review (see </a:t>
+            </a:r>
+            <a:r>
+              <a:rPr dirty="0" err="1"/>
+              <a:t>LeapSpace</a:t>
+            </a:r>
+            <a:r>
+              <a:rPr dirty="0"/>
+              <a:t> summary in the repo): coupling of handling &amp; furnace physics; realistic scrap shape &amp; packing; charge dynamics during delivery; validation with industrial scrap; </a:t>
+            </a:r>
+            <a:r>
+              <a:rPr dirty="0" err="1"/>
+              <a:t>multiphysics</a:t>
+            </a:r>
+            <a:r>
+              <a:rPr dirty="0"/>
+              <a:t> at the charge surface. Tie Gap 2 to Li et al. 2008: late/iceberg melting is exactly what happens when the charge arrives wrong.</a:t>
             </a:r>
           </a:p>
         </p:txBody>
@@ -1255,7 +1185,7 @@
             <a:spLocks noGrp="1"/>
           </p:cNvSpPr>
           <p:nvPr>
-            <p:ph type="sldNum" idx="5" sz="quarter"/>
+            <p:ph type="sldNum" sz="quarter" idx="5"/>
           </p:nvPr>
         </p:nvSpPr>
         <p:spPr/>
@@ -1269,7 +1199,7 @@
 </file>
 
 <file path=ppt/notesSlides/notesSlide7.xml><?xml version="1.0" encoding="utf-8"?>
-<p:notes xmlns:a="http://schemas.openxmlformats.org/drawingml/2006/main" xmlns:p="http://schemas.openxmlformats.org/presentationml/2006/main" xmlns:r="http://schemas.openxmlformats.org/officeDocument/2006/relationships">
+<p:notes xmlns:a="http://schemas.openxmlformats.org/drawingml/2006/main" xmlns:r="http://schemas.openxmlformats.org/officeDocument/2006/relationships" xmlns:p="http://schemas.openxmlformats.org/presentationml/2006/main">
   <p:cSld>
     <p:spTree>
       <p:nvGrpSpPr>
@@ -1289,7 +1219,7 @@
         <p:nvSpPr>
           <p:cNvPr id="2" name="Slide Image Placeholder 1"/>
           <p:cNvSpPr>
-            <a:spLocks noGrp="1"/>
+            <a:spLocks noGrp="1" noRot="1" noChangeAspect="1"/>
           </p:cNvSpPr>
           <p:nvPr>
             <p:ph type="sldImg" idx="2"/>
@@ -1304,7 +1234,7 @@
             <a:spLocks noGrp="1"/>
           </p:cNvSpPr>
           <p:nvPr>
-            <p:ph type="body" idx="3" sz="quarter"/>
+            <p:ph type="body" sz="quarter" idx="3"/>
           </p:nvPr>
         </p:nvSpPr>
         <p:spPr/>
@@ -1313,18 +1243,55 @@
           <a:lstStyle/>
           <a:p>
             <a:r>
-              <a:t>[9:00 – 10:30]</a:t>
-            </a:r>
-          </a:p>
-          <a:p>
-            <a:r>
-              <a:t>"The greatest anticipated challenge in this project is scale and computation time. Simulating millions of unique scrap fragments down to the millimetre scale is computationally impossible. My strategy involves coarse-graining / upscaling methodologies. We will cluster smaller particles into representative numerical equivalents. We will then perform laboratory-scale calibration experiments — such as angle of repose and pouring tests — to adjust rolling friction coefficients until the virtual scrap pile matches the behaviour of the real physical material."</a:t>
-            </a:r>
-          </a:p>
-          <a:p/>
-          <a:p>
-            <a:r>
-              <a:t>Slide notes: the 4-step loop is the core methodological claim. Quote the numbers: Rossow &amp; Coetzee max scale factor 1.6 (errors ≤10%); Schefler &amp; Coetzee — scale limit is geometric to the measured quantity; container/particle ≥ 8–10:1 for negligible wall effects. This is the 'industrially calibrated simulation' that separates this project from idealised spherical-particle work.</a:t>
+              <a:rPr dirty="0"/>
+              <a:t>[7:30 – 9:00]</a:t>
+            </a:r>
+          </a:p>
+          <a:p>
+            <a:r>
+              <a:rPr dirty="0"/>
+              <a:t>"To address these gaps, my proposed 4-year research plan is structured systematically. Year 1 focuses on mathematical code development and baseline shape </a:t>
+            </a:r>
+            <a:r>
+              <a:rPr dirty="0" err="1"/>
+              <a:t>characterisation</a:t>
+            </a:r>
+            <a:r>
+              <a:rPr dirty="0"/>
+              <a:t>. Year 2 will integrate industrial data sets from Tata Steel Netherlands to calibrate our virtual materials. Year 3 will focus on simulating various charging recipes and sequence </a:t>
+            </a:r>
+            <a:r>
+              <a:rPr dirty="0" err="1"/>
+              <a:t>optimisation</a:t>
+            </a:r>
+            <a:r>
+              <a:rPr dirty="0"/>
+              <a:t>. Year 4 will translate these computational models into practical, actionable rules for industrial plant engineers."</a:t>
+            </a:r>
+          </a:p>
+          <a:p>
+            <a:endParaRPr dirty="0"/>
+          </a:p>
+          <a:p>
+            <a:r>
+              <a:rPr dirty="0"/>
+              <a:t>Slide notes: Y1 = Lu/Zhong shape representations + lab calibration suite; Y2 = Tata Steel NL data + validation (Rossow-style high-speed footage, Xiao-style vision measurement); Y3 = recipe </a:t>
+            </a:r>
+            <a:r>
+              <a:rPr dirty="0" err="1"/>
+              <a:t>optimisation</a:t>
+            </a:r>
+            <a:r>
+              <a:rPr dirty="0"/>
+              <a:t> incl. segregation; Y4 = digital twin + recommendations. </a:t>
+            </a:r>
+            <a:r>
+              <a:rPr dirty="0" err="1"/>
+              <a:t>Emphasise</a:t>
+            </a:r>
+            <a:r>
+              <a:rPr dirty="0"/>
+              <a:t> the artefact-per-year discipline.</a:t>
             </a:r>
           </a:p>
         </p:txBody>
@@ -1336,7 +1303,7 @@
             <a:spLocks noGrp="1"/>
           </p:cNvSpPr>
           <p:nvPr>
-            <p:ph type="sldNum" idx="5" sz="quarter"/>
+            <p:ph type="sldNum" sz="quarter" idx="5"/>
           </p:nvPr>
         </p:nvSpPr>
         <p:spPr/>
@@ -1350,7 +1317,7 @@
 </file>
 
 <file path=ppt/notesSlides/notesSlide8.xml><?xml version="1.0" encoding="utf-8"?>
-<p:notes xmlns:a="http://schemas.openxmlformats.org/drawingml/2006/main" xmlns:p="http://schemas.openxmlformats.org/presentationml/2006/main" xmlns:r="http://schemas.openxmlformats.org/officeDocument/2006/relationships">
+<p:notes xmlns:a="http://schemas.openxmlformats.org/drawingml/2006/main" xmlns:r="http://schemas.openxmlformats.org/officeDocument/2006/relationships" xmlns:p="http://schemas.openxmlformats.org/presentationml/2006/main">
   <p:cSld>
     <p:spTree>
       <p:nvGrpSpPr>
@@ -1370,7 +1337,7 @@
         <p:nvSpPr>
           <p:cNvPr id="2" name="Slide Image Placeholder 1"/>
           <p:cNvSpPr>
-            <a:spLocks noGrp="1"/>
+            <a:spLocks noGrp="1" noRot="1" noChangeAspect="1"/>
           </p:cNvSpPr>
           <p:nvPr>
             <p:ph type="sldImg" idx="2"/>
@@ -1385,7 +1352,7 @@
             <a:spLocks noGrp="1"/>
           </p:cNvSpPr>
           <p:nvPr>
-            <p:ph type="body" idx="3" sz="quarter"/>
+            <p:ph type="body" sz="quarter" idx="3"/>
           </p:nvPr>
         </p:nvSpPr>
         <p:spPr/>
@@ -1394,18 +1361,55 @@
           <a:lstStyle/>
           <a:p>
             <a:r>
-              <a:t>[10:30 – 11:45]</a:t>
-            </a:r>
-          </a:p>
-          <a:p>
-            <a:r>
-              <a:t>"The true core novelty of this PhD project is the creation of an industrially validated Digital Twin for multi-property scrap flows. We are moving away from treating raw materials as uniform rocks. Instead, this framework will allow Tata Steel to test new, cheaper scrap recipes virtually, optimising discharge sequences to guarantee smooth, continuous feeding. The direct outcomes will be a measurable reduction in mechanical wear on handling infrastructure and optimised energy efficiency during EAF startup phases."</a:t>
-            </a:r>
-          </a:p>
-          <a:p/>
-          <a:p>
-            <a:r>
-              <a:t>Slide notes: novelty = multi-scale + multi-property + industrial (three words to remember). Deliverables map to the interview's 'industrial value' expectation: twin (asset), sequence optimisation (process gain), energy/wear (money).</a:t>
+              <a:rPr dirty="0"/>
+              <a:t>[9:00 – 10:30]</a:t>
+            </a:r>
+          </a:p>
+          <a:p>
+            <a:r>
+              <a:rPr dirty="0"/>
+              <a:t>"The greatest anticipated challenge in this project is scale and computation time. Simulating millions of unique scrap fragments down to the </a:t>
+            </a:r>
+            <a:r>
+              <a:rPr dirty="0" err="1"/>
+              <a:t>millimetre</a:t>
+            </a:r>
+            <a:r>
+              <a:rPr dirty="0"/>
+              <a:t> scale is computationally impossible. My strategy involves coarse-graining / upscaling methodologies. We will cluster smaller particles into representative numerical equivalents. We will then perform laboratory-scale calibration experiments — such as angle of repose and pouring tests — to adjust rolling friction coefficients until the virtual scrap pile matches the </a:t>
+            </a:r>
+            <a:r>
+              <a:rPr dirty="0" err="1"/>
+              <a:t>behaviour</a:t>
+            </a:r>
+            <a:r>
+              <a:rPr dirty="0"/>
+              <a:t> of the real physical material."</a:t>
+            </a:r>
+          </a:p>
+          <a:p>
+            <a:endParaRPr dirty="0"/>
+          </a:p>
+          <a:p>
+            <a:r>
+              <a:rPr dirty="0"/>
+              <a:t>Slide notes: the 4-step loop is the core methodological claim. Quote the numbers: Rossow &amp; Coetzee max scale factor 1.6 (errors ≤10%); </a:t>
+            </a:r>
+            <a:r>
+              <a:rPr dirty="0" err="1"/>
+              <a:t>Schefler</a:t>
+            </a:r>
+            <a:r>
+              <a:rPr dirty="0"/>
+              <a:t> &amp; Coetzee — scale limit is geometric to the measured quantity; container/particle ≥ 8–10:1 for negligible wall effects. This is the 'industrially calibrated simulation' that separates this project from </a:t>
+            </a:r>
+            <a:r>
+              <a:rPr dirty="0" err="1"/>
+              <a:t>idealised</a:t>
+            </a:r>
+            <a:r>
+              <a:rPr dirty="0"/>
+              <a:t> spherical-particle work.</a:t>
             </a:r>
           </a:p>
         </p:txBody>
@@ -1417,7 +1421,7 @@
             <a:spLocks noGrp="1"/>
           </p:cNvSpPr>
           <p:nvPr>
-            <p:ph type="sldNum" idx="5" sz="quarter"/>
+            <p:ph type="sldNum" sz="quarter" idx="5"/>
           </p:nvPr>
         </p:nvSpPr>
         <p:spPr/>
@@ -1431,7 +1435,7 @@
 </file>
 
 <file path=ppt/notesSlides/notesSlide9.xml><?xml version="1.0" encoding="utf-8"?>
-<p:notes xmlns:a="http://schemas.openxmlformats.org/drawingml/2006/main" xmlns:p="http://schemas.openxmlformats.org/presentationml/2006/main" xmlns:r="http://schemas.openxmlformats.org/officeDocument/2006/relationships">
+<p:notes xmlns:a="http://schemas.openxmlformats.org/drawingml/2006/main" xmlns:r="http://schemas.openxmlformats.org/officeDocument/2006/relationships" xmlns:p="http://schemas.openxmlformats.org/presentationml/2006/main">
   <p:cSld>
     <p:spTree>
       <p:nvGrpSpPr>
@@ -1451,7 +1455,7 @@
         <p:nvSpPr>
           <p:cNvPr id="2" name="Slide Image Placeholder 1"/>
           <p:cNvSpPr>
-            <a:spLocks noGrp="1"/>
+            <a:spLocks noGrp="1" noRot="1" noChangeAspect="1"/>
           </p:cNvSpPr>
           <p:nvPr>
             <p:ph type="sldImg" idx="2"/>
@@ -1466,7 +1470,7 @@
             <a:spLocks noGrp="1"/>
           </p:cNvSpPr>
           <p:nvPr>
-            <p:ph type="body" idx="3" sz="quarter"/>
+            <p:ph type="body" sz="quarter" idx="3"/>
           </p:nvPr>
         </p:nvSpPr>
         <p:spPr/>
@@ -1475,18 +1479,47 @@
           <a:lstStyle/>
           <a:p>
             <a:r>
-              <a:t>[11:45 – 13:15]</a:t>
-            </a:r>
-          </a:p>
-          <a:p>
-            <a:r>
-              <a:t>"Why am I the right candidate for this specific project? My academic training has provided me with a robust foundation in granular physics, continuum mechanics, and numerical programming. I have practical experience handling large data arrays and translating raw physical phenomena into structural code. Furthermore, I am deeply familiar with modern engineering simulation frameworks and possess the hands-on laboratory discipline required to design and execute validation experiments that will make our virtual models reliable."</a:t>
-            </a:r>
-          </a:p>
-          <a:p/>
-          <a:p>
-            <a:r>
-              <a:t>Slide notes: be ready to name the exact tools you have touched (EDEM/Rocky/LIGGGHTS/MFIX-DEM) and the exact experiments you can run (AOR, drop, draw-down, mass flow). The open-source angle shows cost awareness for a 4-year industrial PhD.</a:t>
+              <a:rPr dirty="0"/>
+              <a:t>[10:30 – 11:45]</a:t>
+            </a:r>
+          </a:p>
+          <a:p>
+            <a:r>
+              <a:rPr dirty="0"/>
+              <a:t>"The true core novelty of this PhD project is the creation of an industrially validated Digital Twin for multi-property scrap flows. We are moving away from treating raw materials as uniform rocks. Instead, this framework will allow Tata Steel to test new, cheaper scrap recipes virtually, </a:t>
+            </a:r>
+            <a:r>
+              <a:rPr dirty="0" err="1"/>
+              <a:t>optimising</a:t>
+            </a:r>
+            <a:r>
+              <a:rPr dirty="0"/>
+              <a:t> discharge sequences to guarantee smooth, continuous feeding. The direct outcomes will be a measurable reduction in mechanical wear on handling infrastructure and </a:t>
+            </a:r>
+            <a:r>
+              <a:rPr dirty="0" err="1"/>
+              <a:t>optimised</a:t>
+            </a:r>
+            <a:r>
+              <a:rPr dirty="0"/>
+              <a:t> energy efficiency during EAF startup phases."</a:t>
+            </a:r>
+          </a:p>
+          <a:p>
+            <a:endParaRPr dirty="0"/>
+          </a:p>
+          <a:p>
+            <a:r>
+              <a:rPr dirty="0"/>
+              <a:t>Slide notes: novelty = multi-scale + multi-property + industrial (three words to remember). Deliverables map to the interview's 'industrial value' expectation: twin (asset), sequence </a:t>
+            </a:r>
+            <a:r>
+              <a:rPr dirty="0" err="1"/>
+              <a:t>optimisation</a:t>
+            </a:r>
+            <a:r>
+              <a:rPr dirty="0"/>
+              <a:t> (process gain), energy/wear (money).</a:t>
             </a:r>
           </a:p>
         </p:txBody>
@@ -1498,7 +1531,7 @@
             <a:spLocks noGrp="1"/>
           </p:cNvSpPr>
           <p:nvPr>
-            <p:ph type="sldNum" idx="5" sz="quarter"/>
+            <p:ph type="sldNum" sz="quarter" idx="5"/>
           </p:nvPr>
         </p:nvSpPr>
         <p:spPr/>
@@ -1681,7 +1714,7 @@
             <a:fld id="{87DE6118-2437-4B30-8E3C-4D2BE6020583}" type="datetimeFigureOut">
               <a:rPr lang="en-US" dirty="0"/>
               <a:pPr/>
-              <a:t>9/15/26</a:t>
+              <a:t>9/18/26</a:t>
             </a:fld>
             <a:endParaRPr lang="en-US" dirty="0"/>
           </a:p>
@@ -2021,7 +2054,7 @@
           <a:p>
             <a:fld id="{87DE6118-2437-4B30-8E3C-4D2BE6020583}" type="datetimeFigureOut">
               <a:rPr lang="en-US" dirty="0"/>
-              <a:t>9/15/26</a:t>
+              <a:t>9/18/26</a:t>
             </a:fld>
             <a:endParaRPr lang="en-US" dirty="0"/>
           </a:p>
@@ -2196,7 +2229,7 @@
           <a:p>
             <a:fld id="{87DE6118-2437-4B30-8E3C-4D2BE6020583}" type="datetimeFigureOut">
               <a:rPr lang="en-US" dirty="0"/>
-              <a:t>9/15/26</a:t>
+              <a:t>9/18/26</a:t>
             </a:fld>
             <a:endParaRPr lang="en-US" dirty="0"/>
           </a:p>
@@ -2361,7 +2394,7 @@
           <a:p>
             <a:fld id="{87DE6118-2437-4B30-8E3C-4D2BE6020583}" type="datetimeFigureOut">
               <a:rPr lang="en-US" dirty="0"/>
-              <a:t>9/15/26</a:t>
+              <a:t>9/18/26</a:t>
             </a:fld>
             <a:endParaRPr lang="en-US" dirty="0"/>
           </a:p>
@@ -2634,7 +2667,7 @@
             <a:fld id="{87DE6118-2437-4B30-8E3C-4D2BE6020583}" type="datetimeFigureOut">
               <a:rPr lang="en-US" dirty="0"/>
               <a:pPr/>
-              <a:t>9/15/26</a:t>
+              <a:t>9/18/26</a:t>
             </a:fld>
             <a:endParaRPr lang="en-US" dirty="0"/>
           </a:p>
@@ -3024,7 +3057,7 @@
           <a:p>
             <a:fld id="{87DE6118-2437-4B30-8E3C-4D2BE6020583}" type="datetimeFigureOut">
               <a:rPr lang="en-US" dirty="0"/>
-              <a:t>9/15/26</a:t>
+              <a:t>9/18/26</a:t>
             </a:fld>
             <a:endParaRPr lang="en-US" dirty="0"/>
           </a:p>
@@ -3496,7 +3529,7 @@
           <a:p>
             <a:fld id="{87DE6118-2437-4B30-8E3C-4D2BE6020583}" type="datetimeFigureOut">
               <a:rPr lang="en-US" dirty="0"/>
-              <a:t>9/15/26</a:t>
+              <a:t>9/18/26</a:t>
             </a:fld>
             <a:endParaRPr lang="en-US" dirty="0"/>
           </a:p>
@@ -3609,7 +3642,7 @@
           <a:p>
             <a:fld id="{87DE6118-2437-4B30-8E3C-4D2BE6020583}" type="datetimeFigureOut">
               <a:rPr lang="en-US" dirty="0"/>
-              <a:t>9/15/26</a:t>
+              <a:t>9/18/26</a:t>
             </a:fld>
             <a:endParaRPr lang="en-US" dirty="0"/>
           </a:p>
@@ -3699,27 +3732,8 @@
           <a:p>
             <a:fld id="{87DE6118-2437-4B30-8E3C-4D2BE6020583}" type="datetimeFigureOut">
               <a:rPr lang="en-US" dirty="0"/>
-              <a:t>9/15/26</a:t>
+              <a:t>9/18/26</a:t>
             </a:fld>
-            <a:endParaRPr lang="en-US" dirty="0"/>
-          </a:p>
-        </p:txBody>
-      </p:sp>
-      <p:sp>
-        <p:nvSpPr>
-          <p:cNvPr id="3" name="Footer Placeholder 2"/>
-          <p:cNvSpPr>
-            <a:spLocks noGrp="1"/>
-          </p:cNvSpPr>
-          <p:nvPr>
-            <p:ph type="ftr" sz="quarter" idx="11"/>
-          </p:nvPr>
-        </p:nvSpPr>
-        <p:spPr/>
-        <p:txBody>
-          <a:bodyPr/>
-          <a:lstStyle/>
-          <a:p>
             <a:endParaRPr lang="en-US" dirty="0"/>
           </a:p>
         </p:txBody>
@@ -3744,6 +3758,57 @@
               <a:t>‹#›</a:t>
             </a:fld>
             <a:endParaRPr lang="en-US" dirty="0"/>
+          </a:p>
+        </p:txBody>
+      </p:sp>
+      <p:sp>
+        <p:nvSpPr>
+          <p:cNvPr id="5" name="TextBox 4">
+            <a:extLst>
+              <a:ext uri="{FF2B5EF4-FFF2-40B4-BE49-F238E27FC236}">
+                <a16:creationId xmlns:a16="http://schemas.microsoft.com/office/drawing/2014/main" id="{BBBFD374-0B03-8D1A-984F-02E653DEB6F5}"/>
+              </a:ext>
+            </a:extLst>
+          </p:cNvPr>
+          <p:cNvSpPr txBox="1"/>
+          <p:nvPr userDrawn="1"/>
+        </p:nvSpPr>
+        <p:spPr>
+          <a:xfrm>
+            <a:off x="936136" y="6583680"/>
+            <a:ext cx="8686800" cy="274320"/>
+          </a:xfrm>
+          <a:prstGeom prst="rect">
+            <a:avLst/>
+          </a:prstGeom>
+          <a:noFill/>
+        </p:spPr>
+        <p:txBody>
+          <a:bodyPr wrap="square" lIns="0" tIns="0" rIns="0" bIns="0">
+            <a:spAutoFit/>
+          </a:bodyPr>
+          <a:lstStyle/>
+          <a:p>
+            <a:pPr algn="l">
+              <a:lnSpc>
+                <a:spcPct val="100000"/>
+              </a:lnSpc>
+              <a:spcBef>
+                <a:spcPts val="0"/>
+              </a:spcBef>
+              <a:spcAft>
+                <a:spcPts val="400"/>
+              </a:spcAft>
+            </a:pPr>
+            <a:r>
+              <a:rPr sz="800" b="0" i="0" dirty="0">
+                <a:solidFill>
+                  <a:srgbClr val="6B6B6B"/>
+                </a:solidFill>
+                <a:latin typeface="Calibri"/>
+              </a:rPr>
+              <a:t>Particle-Based Modelling of Scrap Handling for Green Steel Production  •  TU Delft × Tata Steel Netherlands</a:t>
+            </a:r>
           </a:p>
         </p:txBody>
       </p:sp>
@@ -4041,7 +4106,7 @@
             <a:fld id="{87DE6118-2437-4B30-8E3C-4D2BE6020583}" type="datetimeFigureOut">
               <a:rPr lang="en-US" dirty="0"/>
               <a:pPr/>
-              <a:t>9/15/26</a:t>
+              <a:t>9/18/26</a:t>
             </a:fld>
             <a:endParaRPr lang="en-US" dirty="0"/>
           </a:p>
@@ -4426,7 +4491,7 @@
             <a:fld id="{87DE6118-2437-4B30-8E3C-4D2BE6020583}" type="datetimeFigureOut">
               <a:rPr lang="en-US" dirty="0"/>
               <a:pPr/>
-              <a:t>9/15/26</a:t>
+              <a:t>9/18/26</a:t>
             </a:fld>
             <a:endParaRPr lang="en-US" dirty="0"/>
           </a:p>
@@ -4701,7 +4766,7 @@
             <a:fld id="{87DE6118-2437-4B30-8E3C-4D2BE6020583}" type="datetimeFigureOut">
               <a:rPr lang="en-US" dirty="0"/>
               <a:pPr/>
-              <a:t>9/15/26</a:t>
+              <a:t>9/18/26</a:t>
             </a:fld>
             <a:endParaRPr lang="en-US" dirty="0"/>
           </a:p>
@@ -5290,7 +5355,7 @@
           <p:nvPr/>
         </p:nvPicPr>
         <p:blipFill>
-          <a:blip r:embed="rId2"/>
+          <a:blip r:embed="rId3"/>
           <a:stretch>
             <a:fillRect/>
           </a:stretch>
@@ -5320,7 +5385,7 @@
           <p:nvPr/>
         </p:nvPicPr>
         <p:blipFill>
-          <a:blip r:embed="rId3"/>
+          <a:blip r:embed="rId4"/>
           <a:stretch>
             <a:fillRect/>
           </a:stretch>
@@ -5349,7 +5414,7 @@
 </file>
 
 <file path=ppt/slides/slide10.xml><?xml version="1.0" encoding="utf-8"?>
-<p:sld xmlns:a="http://schemas.openxmlformats.org/drawingml/2006/main" xmlns:p="http://schemas.openxmlformats.org/presentationml/2006/main" xmlns:r="http://schemas.openxmlformats.org/officeDocument/2006/relationships">
+<p:sld xmlns:a="http://schemas.openxmlformats.org/drawingml/2006/main" xmlns:r="http://schemas.openxmlformats.org/officeDocument/2006/relationships" xmlns:p="http://schemas.openxmlformats.org/presentationml/2006/main">
   <p:cSld>
     <p:spTree>
       <p:nvGrpSpPr>
@@ -5357,7 +5422,14 @@
         <p:cNvGrpSpPr/>
         <p:nvPr/>
       </p:nvGrpSpPr>
-      <p:grpSpPr/>
+      <p:grpSpPr>
+        <a:xfrm>
+          <a:off x="0" y="0"/>
+          <a:ext cx="0" cy="0"/>
+          <a:chOff x="0" y="0"/>
+          <a:chExt cx="0" cy="0"/>
+        </a:xfrm>
+      </p:grpSpPr>
       <p:sp>
         <p:nvSpPr>
           <p:cNvPr id="2" name="TextBox 1"/>
@@ -5366,7 +5438,7 @@
         </p:nvSpPr>
         <p:spPr>
           <a:xfrm>
-            <a:off x="411480" y="237744"/>
+            <a:off x="839724" y="304038"/>
             <a:ext cx="11338560" cy="777240"/>
           </a:xfrm>
           <a:prstGeom prst="rect">
@@ -5375,7 +5447,7 @@
           <a:noFill/>
         </p:spPr>
         <p:txBody>
-          <a:bodyPr wrap="square" lIns="0" rIns="0" tIns="0" bIns="0">
+          <a:bodyPr wrap="square" lIns="0" tIns="0" rIns="0" bIns="0">
             <a:spAutoFit/>
           </a:bodyPr>
           <a:lstStyle/>
@@ -5433,7 +5505,7 @@
         </p:nvSpPr>
         <p:spPr>
           <a:xfrm>
-            <a:off x="429768" y="969264"/>
+            <a:off x="839724" y="973836"/>
             <a:ext cx="1234440" cy="41148"/>
           </a:xfrm>
           <a:prstGeom prst="rect">
@@ -5466,6 +5538,7 @@
           <a:lstStyle/>
           <a:p>
             <a:pPr algn="ctr"/>
+            <a:endParaRPr/>
           </a:p>
         </p:txBody>
       </p:sp>
@@ -5510,19 +5583,20 @@
           <a:lstStyle/>
           <a:p>
             <a:pPr algn="ctr"/>
-          </a:p>
-        </p:txBody>
-      </p:sp>
-      <p:sp>
-        <p:nvSpPr>
-          <p:cNvPr id="5" name="TextBox 4"/>
+            <a:endParaRPr/>
+          </a:p>
+        </p:txBody>
+      </p:sp>
+      <p:sp>
+        <p:nvSpPr>
+          <p:cNvPr id="6" name="TextBox 5"/>
           <p:cNvSpPr txBox="1"/>
           <p:nvPr/>
         </p:nvSpPr>
         <p:spPr>
           <a:xfrm>
-            <a:off x="411480" y="6556248"/>
-            <a:ext cx="8686800" cy="274320"/>
+            <a:off x="10972800" y="6556248"/>
+            <a:ext cx="804672" cy="274320"/>
           </a:xfrm>
           <a:prstGeom prst="rect">
             <a:avLst/>
@@ -5530,52 +5604,7 @@
           <a:noFill/>
         </p:spPr>
         <p:txBody>
-          <a:bodyPr wrap="square" lIns="0" rIns="0" tIns="0" bIns="0">
-            <a:spAutoFit/>
-          </a:bodyPr>
-          <a:lstStyle/>
-          <a:p>
-            <a:pPr algn="l">
-              <a:lnSpc>
-                <a:spcPct val="100000"/>
-              </a:lnSpc>
-              <a:spcBef>
-                <a:spcPts val="0"/>
-              </a:spcBef>
-              <a:spcAft>
-                <a:spcPts val="400"/>
-              </a:spcAft>
-            </a:pPr>
-            <a:r>
-              <a:rPr sz="800" b="0" i="0">
-                <a:solidFill>
-                  <a:srgbClr val="6B6B6B"/>
-                </a:solidFill>
-                <a:latin typeface="Calibri"/>
-              </a:rPr>
-              <a:t>Particle-Based Modelling of Scrap Handling for Green Steel Production  •  TU Delft × Tata Steel Netherlands</a:t>
-            </a:r>
-          </a:p>
-        </p:txBody>
-      </p:sp>
-      <p:sp>
-        <p:nvSpPr>
-          <p:cNvPr id="6" name="TextBox 5"/>
-          <p:cNvSpPr txBox="1"/>
-          <p:nvPr/>
-        </p:nvSpPr>
-        <p:spPr>
-          <a:xfrm>
-            <a:off x="10972800" y="6556248"/>
-            <a:ext cx="804672" cy="274320"/>
-          </a:xfrm>
-          <a:prstGeom prst="rect">
-            <a:avLst/>
-          </a:prstGeom>
-          <a:noFill/>
-        </p:spPr>
-        <p:txBody>
-          <a:bodyPr wrap="square" lIns="0" rIns="0" tIns="0" bIns="0">
+          <a:bodyPr wrap="square" lIns="0" tIns="0" rIns="0" bIns="0">
             <a:spAutoFit/>
           </a:bodyPr>
           <a:lstStyle/>
@@ -5609,10 +5638,16 @@
           <p:cNvGraphicFramePr>
             <a:graphicFrameLocks noGrp="1"/>
           </p:cNvGraphicFramePr>
-          <p:nvPr/>
+          <p:nvPr>
+            <p:extLst>
+              <p:ext uri="{D42A27DB-BD31-4B8C-83A1-F6EECF244321}">
+                <p14:modId xmlns:p14="http://schemas.microsoft.com/office/powerpoint/2010/main" val="4109781996"/>
+              </p:ext>
+            </p:extLst>
+          </p:nvPr>
         </p:nvGraphicFramePr>
         <p:xfrm>
-          <a:off x="411480" y="1188720"/>
+          <a:off x="826008" y="1188720"/>
           <a:ext cx="11365992" cy="4023360"/>
         </p:xfrm>
         <a:graphic>
@@ -5622,13 +5657,25 @@
                 <a:tableStyleId>{5C22544A-7EE6-4342-B048-85BDC9FD1C3A}</a:tableStyleId>
               </a:tblPr>
               <a:tblGrid>
-                <a:gridCol w="4160520"/>
-                <a:gridCol w="7205472"/>
+                <a:gridCol w="4160520">
+                  <a:extLst>
+                    <a:ext uri="{9D8B030D-6E8A-4147-A177-3AD203B41FA5}">
+                      <a16:colId xmlns:a16="http://schemas.microsoft.com/office/drawing/2014/main" val="20000"/>
+                    </a:ext>
+                  </a:extLst>
+                </a:gridCol>
+                <a:gridCol w="7205472">
+                  <a:extLst>
+                    <a:ext uri="{9D8B030D-6E8A-4147-A177-3AD203B41FA5}">
+                      <a16:colId xmlns:a16="http://schemas.microsoft.com/office/drawing/2014/main" val="20001"/>
+                    </a:ext>
+                  </a:extLst>
+                </a:gridCol>
               </a:tblGrid>
               <a:tr h="365760">
                 <a:tc>
                   <a:txBody>
-                    <a:bodyPr wrap="square" lIns="64008" rIns="64008" tIns="27432" bIns="27432"/>
+                    <a:bodyPr/>
                     <a:lstStyle/>
                     <a:p>
                       <a:pPr algn="l">
@@ -5655,7 +5702,7 @@
                 </a:tc>
                 <a:tc>
                   <a:txBody>
-                    <a:bodyPr wrap="square" lIns="64008" rIns="64008" tIns="27432" bIns="27432"/>
+                    <a:bodyPr/>
                     <a:lstStyle/>
                     <a:p>
                       <a:pPr algn="l">
@@ -5680,11 +5727,16 @@
                     </a:solidFill>
                   </a:tcPr>
                 </a:tc>
+                <a:extLst>
+                  <a:ext uri="{0D108BD9-81ED-4DB2-BD59-A6C34878D82A}">
+                    <a16:rowId xmlns:a16="http://schemas.microsoft.com/office/drawing/2014/main" val="10000"/>
+                  </a:ext>
+                </a:extLst>
               </a:tr>
               <a:tr h="914400">
                 <a:tc>
                   <a:txBody>
-                    <a:bodyPr wrap="square" lIns="64008" rIns="64008" tIns="27432" bIns="27432"/>
+                    <a:bodyPr/>
                     <a:lstStyle/>
                     <a:p>
                       <a:pPr algn="l">
@@ -5711,7 +5763,7 @@
                 </a:tc>
                 <a:tc>
                   <a:txBody>
-                    <a:bodyPr wrap="square" lIns="64008" rIns="64008" tIns="27432" bIns="27432"/>
+                    <a:bodyPr/>
                     <a:lstStyle/>
                     <a:p>
                       <a:pPr algn="l">
@@ -5736,11 +5788,16 @@
                     </a:solidFill>
                   </a:tcPr>
                 </a:tc>
+                <a:extLst>
+                  <a:ext uri="{0D108BD9-81ED-4DB2-BD59-A6C34878D82A}">
+                    <a16:rowId xmlns:a16="http://schemas.microsoft.com/office/drawing/2014/main" val="10001"/>
+                  </a:ext>
+                </a:extLst>
               </a:tr>
               <a:tr h="914400">
                 <a:tc>
                   <a:txBody>
-                    <a:bodyPr wrap="square" lIns="64008" rIns="64008" tIns="27432" bIns="27432"/>
+                    <a:bodyPr/>
                     <a:lstStyle/>
                     <a:p>
                       <a:pPr algn="l">
@@ -5767,7 +5824,7 @@
                 </a:tc>
                 <a:tc>
                   <a:txBody>
-                    <a:bodyPr wrap="square" lIns="64008" rIns="64008" tIns="27432" bIns="27432"/>
+                    <a:bodyPr/>
                     <a:lstStyle/>
                     <a:p>
                       <a:pPr algn="l">
@@ -5792,11 +5849,16 @@
                     </a:solidFill>
                   </a:tcPr>
                 </a:tc>
+                <a:extLst>
+                  <a:ext uri="{0D108BD9-81ED-4DB2-BD59-A6C34878D82A}">
+                    <a16:rowId xmlns:a16="http://schemas.microsoft.com/office/drawing/2014/main" val="10002"/>
+                  </a:ext>
+                </a:extLst>
               </a:tr>
               <a:tr h="914400">
                 <a:tc>
                   <a:txBody>
-                    <a:bodyPr wrap="square" lIns="64008" rIns="64008" tIns="27432" bIns="27432"/>
+                    <a:bodyPr/>
                     <a:lstStyle/>
                     <a:p>
                       <a:pPr algn="l">
@@ -5823,7 +5885,7 @@
                 </a:tc>
                 <a:tc>
                   <a:txBody>
-                    <a:bodyPr wrap="square" lIns="64008" rIns="64008" tIns="27432" bIns="27432"/>
+                    <a:bodyPr/>
                     <a:lstStyle/>
                     <a:p>
                       <a:pPr algn="l">
@@ -5832,7 +5894,7 @@
                         </a:lnSpc>
                       </a:pPr>
                       <a:r>
-                        <a:rPr sz="1050" b="0" i="0">
+                        <a:rPr sz="1050" b="0" i="0" dirty="0">
                           <a:solidFill>
                             <a:srgbClr val="2B2B2B"/>
                           </a:solidFill>
@@ -5848,11 +5910,16 @@
                     </a:solidFill>
                   </a:tcPr>
                 </a:tc>
+                <a:extLst>
+                  <a:ext uri="{0D108BD9-81ED-4DB2-BD59-A6C34878D82A}">
+                    <a16:rowId xmlns:a16="http://schemas.microsoft.com/office/drawing/2014/main" val="10003"/>
+                  </a:ext>
+                </a:extLst>
               </a:tr>
               <a:tr h="914400">
                 <a:tc>
                   <a:txBody>
-                    <a:bodyPr wrap="square" lIns="64008" rIns="64008" tIns="27432" bIns="27432"/>
+                    <a:bodyPr/>
                     <a:lstStyle/>
                     <a:p>
                       <a:pPr algn="l">
@@ -5879,7 +5946,7 @@
                 </a:tc>
                 <a:tc>
                   <a:txBody>
-                    <a:bodyPr wrap="square" lIns="64008" rIns="64008" tIns="27432" bIns="27432"/>
+                    <a:bodyPr/>
                     <a:lstStyle/>
                     <a:p>
                       <a:pPr algn="l">
@@ -5888,7 +5955,7 @@
                         </a:lnSpc>
                       </a:pPr>
                       <a:r>
-                        <a:rPr sz="1050" b="0" i="0">
+                        <a:rPr sz="1050" b="0" i="0" dirty="0">
                           <a:solidFill>
                             <a:srgbClr val="2B2B2B"/>
                           </a:solidFill>
@@ -5904,6 +5971,11 @@
                     </a:solidFill>
                   </a:tcPr>
                 </a:tc>
+                <a:extLst>
+                  <a:ext uri="{0D108BD9-81ED-4DB2-BD59-A6C34878D82A}">
+                    <a16:rowId xmlns:a16="http://schemas.microsoft.com/office/drawing/2014/main" val="10004"/>
+                  </a:ext>
+                </a:extLst>
               </a:tr>
             </a:tbl>
           </a:graphicData>
@@ -5917,7 +5989,7 @@
         </p:nvSpPr>
         <p:spPr>
           <a:xfrm>
-            <a:off x="411480" y="5440680"/>
+            <a:off x="826008" y="5426964"/>
             <a:ext cx="11365992" cy="868680"/>
           </a:xfrm>
           <a:prstGeom prst="roundRect">
@@ -5948,7 +6020,7 @@
           </a:fontRef>
         </p:style>
         <p:txBody>
-          <a:bodyPr rtlCol="0" anchor="ctr" wrap="square" lIns="201168" rIns="201168"/>
+          <a:bodyPr wrap="square" lIns="201168" rIns="201168" rtlCol="0" anchor="ctr"/>
           <a:lstStyle/>
           <a:p>
             <a:pPr algn="ctr">
@@ -5957,7 +6029,7 @@
               </a:lnSpc>
             </a:pPr>
             <a:r>
-              <a:rPr sz="1150" b="1" i="0">
+              <a:rPr sz="1150" b="1" i="0" dirty="0">
                 <a:solidFill>
                   <a:srgbClr val="143B5C"/>
                 </a:solidFill>
@@ -5966,7 +6038,7 @@
               <a:t>Simulation strategy:  </a:t>
             </a:r>
             <a:r>
-              <a:rPr sz="1150" b="0" i="0">
+              <a:rPr sz="1150" b="0" i="0" dirty="0">
                 <a:solidFill>
                   <a:srgbClr val="2B2B2B"/>
                 </a:solidFill>
@@ -5986,7 +6058,7 @@
 </file>
 
 <file path=ppt/slides/slide11.xml><?xml version="1.0" encoding="utf-8"?>
-<p:sld xmlns:a="http://schemas.openxmlformats.org/drawingml/2006/main" xmlns:p="http://schemas.openxmlformats.org/presentationml/2006/main" xmlns:r="http://schemas.openxmlformats.org/officeDocument/2006/relationships">
+<p:sld xmlns:a="http://schemas.openxmlformats.org/drawingml/2006/main" xmlns:r="http://schemas.openxmlformats.org/officeDocument/2006/relationships" xmlns:p="http://schemas.openxmlformats.org/presentationml/2006/main">
   <p:cSld>
     <p:spTree>
       <p:nvGrpSpPr>
@@ -5994,7 +6066,14 @@
         <p:cNvGrpSpPr/>
         <p:nvPr/>
       </p:nvGrpSpPr>
-      <p:grpSpPr/>
+      <p:grpSpPr>
+        <a:xfrm>
+          <a:off x="0" y="0"/>
+          <a:ext cx="0" cy="0"/>
+          <a:chOff x="0" y="0"/>
+          <a:chExt cx="0" cy="0"/>
+        </a:xfrm>
+      </p:grpSpPr>
       <p:sp>
         <p:nvSpPr>
           <p:cNvPr id="2" name="TextBox 1"/>
@@ -6003,7 +6082,7 @@
         </p:nvSpPr>
         <p:spPr>
           <a:xfrm>
-            <a:off x="411480" y="237744"/>
+            <a:off x="1046988" y="256032"/>
             <a:ext cx="11338560" cy="777240"/>
           </a:xfrm>
           <a:prstGeom prst="rect">
@@ -6012,7 +6091,7 @@
           <a:noFill/>
         </p:spPr>
         <p:txBody>
-          <a:bodyPr wrap="square" lIns="0" rIns="0" tIns="0" bIns="0">
+          <a:bodyPr wrap="square" lIns="0" tIns="0" rIns="0" bIns="0">
             <a:spAutoFit/>
           </a:bodyPr>
           <a:lstStyle/>
@@ -6029,7 +6108,7 @@
               </a:spcAft>
             </a:pPr>
             <a:r>
-              <a:rPr sz="1050" b="1" i="0">
+              <a:rPr sz="1050" b="1" i="0" dirty="0">
                 <a:solidFill>
                   <a:srgbClr val="00A4E4"/>
                 </a:solidFill>
@@ -6051,7 +6130,7 @@
               </a:spcAft>
             </a:pPr>
             <a:r>
-              <a:rPr sz="2500" b="1" i="0">
+              <a:rPr sz="2500" b="1" i="0" dirty="0">
                 <a:solidFill>
                   <a:srgbClr val="143B5C"/>
                 </a:solidFill>
@@ -6070,7 +6149,7 @@
         </p:nvSpPr>
         <p:spPr>
           <a:xfrm>
-            <a:off x="429768" y="969264"/>
+            <a:off x="1046988" y="908292"/>
             <a:ext cx="1234440" cy="41148"/>
           </a:xfrm>
           <a:prstGeom prst="rect">
@@ -6103,6 +6182,7 @@
           <a:lstStyle/>
           <a:p>
             <a:pPr algn="ctr"/>
+            <a:endParaRPr/>
           </a:p>
         </p:txBody>
       </p:sp>
@@ -6147,19 +6227,20 @@
           <a:lstStyle/>
           <a:p>
             <a:pPr algn="ctr"/>
-          </a:p>
-        </p:txBody>
-      </p:sp>
-      <p:sp>
-        <p:nvSpPr>
-          <p:cNvPr id="5" name="TextBox 4"/>
+            <a:endParaRPr/>
+          </a:p>
+        </p:txBody>
+      </p:sp>
+      <p:sp>
+        <p:nvSpPr>
+          <p:cNvPr id="6" name="TextBox 5"/>
           <p:cNvSpPr txBox="1"/>
           <p:nvPr/>
         </p:nvSpPr>
         <p:spPr>
           <a:xfrm>
-            <a:off x="411480" y="6556248"/>
-            <a:ext cx="8686800" cy="274320"/>
+            <a:off x="10972800" y="6556248"/>
+            <a:ext cx="804672" cy="274320"/>
           </a:xfrm>
           <a:prstGeom prst="rect">
             <a:avLst/>
@@ -6167,52 +6248,7 @@
           <a:noFill/>
         </p:spPr>
         <p:txBody>
-          <a:bodyPr wrap="square" lIns="0" rIns="0" tIns="0" bIns="0">
-            <a:spAutoFit/>
-          </a:bodyPr>
-          <a:lstStyle/>
-          <a:p>
-            <a:pPr algn="l">
-              <a:lnSpc>
-                <a:spcPct val="100000"/>
-              </a:lnSpc>
-              <a:spcBef>
-                <a:spcPts val="0"/>
-              </a:spcBef>
-              <a:spcAft>
-                <a:spcPts val="400"/>
-              </a:spcAft>
-            </a:pPr>
-            <a:r>
-              <a:rPr sz="800" b="0" i="0">
-                <a:solidFill>
-                  <a:srgbClr val="6B6B6B"/>
-                </a:solidFill>
-                <a:latin typeface="Calibri"/>
-              </a:rPr>
-              <a:t>Particle-Based Modelling of Scrap Handling for Green Steel Production  •  TU Delft × Tata Steel Netherlands</a:t>
-            </a:r>
-          </a:p>
-        </p:txBody>
-      </p:sp>
-      <p:sp>
-        <p:nvSpPr>
-          <p:cNvPr id="6" name="TextBox 5"/>
-          <p:cNvSpPr txBox="1"/>
-          <p:nvPr/>
-        </p:nvSpPr>
-        <p:spPr>
-          <a:xfrm>
-            <a:off x="10972800" y="6556248"/>
-            <a:ext cx="804672" cy="274320"/>
-          </a:xfrm>
-          <a:prstGeom prst="rect">
-            <a:avLst/>
-          </a:prstGeom>
-          <a:noFill/>
-        </p:spPr>
-        <p:txBody>
-          <a:bodyPr wrap="square" lIns="0" rIns="0" tIns="0" bIns="0">
+          <a:bodyPr wrap="square" lIns="0" tIns="0" rIns="0" bIns="0">
             <a:spAutoFit/>
           </a:bodyPr>
           <a:lstStyle/>
@@ -6248,7 +6284,7 @@
         </p:nvSpPr>
         <p:spPr>
           <a:xfrm>
-            <a:off x="594360" y="1508760"/>
+            <a:off x="789230" y="1508760"/>
             <a:ext cx="3611880" cy="3291840"/>
           </a:xfrm>
           <a:prstGeom prst="roundRect">
@@ -6285,6 +6321,7 @@
           <a:lstStyle/>
           <a:p>
             <a:pPr algn="ctr"/>
+            <a:endParaRPr/>
           </a:p>
         </p:txBody>
       </p:sp>
@@ -6296,7 +6333,7 @@
         </p:nvSpPr>
         <p:spPr>
           <a:xfrm>
-            <a:off x="822960" y="1709928"/>
+            <a:off x="1017830" y="1709928"/>
             <a:ext cx="3154680" cy="2926080"/>
           </a:xfrm>
           <a:prstGeom prst="rect">
@@ -6305,7 +6342,7 @@
           <a:noFill/>
         </p:spPr>
         <p:txBody>
-          <a:bodyPr wrap="square" lIns="0" rIns="0" tIns="0" bIns="0">
+          <a:bodyPr wrap="square" lIns="0" tIns="0" rIns="0" bIns="0">
             <a:spAutoFit/>
           </a:bodyPr>
           <a:lstStyle/>
@@ -6322,7 +6359,7 @@
               </a:spcAft>
             </a:pPr>
             <a:r>
-              <a:rPr sz="1400" b="1" i="0">
+              <a:rPr sz="1400" b="1" i="0" dirty="0">
                 <a:solidFill>
                   <a:srgbClr val="143B5C"/>
                 </a:solidFill>
@@ -6341,7 +6378,7 @@
               </a:spcAft>
             </a:pPr>
             <a:r>
-              <a:rPr sz="1050" b="1" i="0">
+              <a:rPr sz="1050" b="1" i="0" dirty="0">
                 <a:solidFill>
                   <a:srgbClr val="00A4E4"/>
                 </a:solidFill>
@@ -6350,7 +6387,7 @@
               <a:t>•  </a:t>
             </a:r>
             <a:r>
-              <a:rPr sz="1050" b="0" i="0">
+              <a:rPr sz="1050" b="0" i="0" dirty="0">
                 <a:solidFill>
                   <a:srgbClr val="2B2B2B"/>
                 </a:solidFill>
@@ -6369,7 +6406,7 @@
               </a:spcAft>
             </a:pPr>
             <a:r>
-              <a:rPr sz="1050" b="1" i="0">
+              <a:rPr sz="1050" b="1" i="0" dirty="0">
                 <a:solidFill>
                   <a:srgbClr val="00A4E4"/>
                 </a:solidFill>
@@ -6378,7 +6415,7 @@
               <a:t>•  </a:t>
             </a:r>
             <a:r>
-              <a:rPr sz="1050" b="0" i="0">
+              <a:rPr sz="1050" b="0" i="0" dirty="0">
                 <a:solidFill>
                   <a:srgbClr val="2B2B2B"/>
                 </a:solidFill>
@@ -6397,7 +6434,7 @@
               </a:spcAft>
             </a:pPr>
             <a:r>
-              <a:rPr sz="1050" b="1" i="0">
+              <a:rPr sz="1050" b="1" i="0" dirty="0">
                 <a:solidFill>
                   <a:srgbClr val="00A4E4"/>
                 </a:solidFill>
@@ -6406,7 +6443,7 @@
               <a:t>•  </a:t>
             </a:r>
             <a:r>
-              <a:rPr sz="1050" b="0" i="0">
+              <a:rPr sz="1050" b="0" i="0" dirty="0">
                 <a:solidFill>
                   <a:srgbClr val="2B2B2B"/>
                 </a:solidFill>
@@ -6425,7 +6462,7 @@
         </p:nvSpPr>
         <p:spPr>
           <a:xfrm>
-            <a:off x="7616952" y="1508760"/>
+            <a:off x="7811822" y="1508760"/>
             <a:ext cx="3977639" cy="3291840"/>
           </a:xfrm>
           <a:prstGeom prst="roundRect">
@@ -6462,6 +6499,7 @@
           <a:lstStyle/>
           <a:p>
             <a:pPr algn="ctr"/>
+            <a:endParaRPr/>
           </a:p>
         </p:txBody>
       </p:sp>
@@ -6473,7 +6511,7 @@
         </p:nvSpPr>
         <p:spPr>
           <a:xfrm>
-            <a:off x="7845552" y="1709928"/>
+            <a:off x="8040422" y="1709928"/>
             <a:ext cx="3520439" cy="2926080"/>
           </a:xfrm>
           <a:prstGeom prst="rect">
@@ -6482,7 +6520,7 @@
           <a:noFill/>
         </p:spPr>
         <p:txBody>
-          <a:bodyPr wrap="square" lIns="0" rIns="0" tIns="0" bIns="0">
+          <a:bodyPr wrap="square" lIns="0" tIns="0" rIns="0" bIns="0">
             <a:spAutoFit/>
           </a:bodyPr>
           <a:lstStyle/>
@@ -6602,7 +6640,7 @@
         </p:nvSpPr>
         <p:spPr>
           <a:xfrm>
-            <a:off x="4681728" y="2788920"/>
+            <a:off x="4876598" y="2788920"/>
             <a:ext cx="2834640" cy="749808"/>
           </a:xfrm>
           <a:prstGeom prst="rect">
@@ -6631,7 +6669,7 @@
           </a:fontRef>
         </p:style>
         <p:txBody>
-          <a:bodyPr rtlCol="0" anchor="ctr" wrap="square"/>
+          <a:bodyPr wrap="square" rtlCol="0" anchor="ctr"/>
           <a:lstStyle/>
           <a:p>
             <a:pPr algn="ctr"/>
@@ -6667,7 +6705,7 @@
         </p:nvSpPr>
         <p:spPr>
           <a:xfrm>
-            <a:off x="4443984" y="2999232"/>
+            <a:off x="4638854" y="2999232"/>
             <a:ext cx="256032" cy="274320"/>
           </a:xfrm>
           <a:prstGeom prst="rightArrow">
@@ -6700,6 +6738,7 @@
           <a:lstStyle/>
           <a:p>
             <a:pPr algn="ctr"/>
+            <a:endParaRPr/>
           </a:p>
         </p:txBody>
       </p:sp>
@@ -6711,7 +6750,7 @@
         </p:nvSpPr>
         <p:spPr>
           <a:xfrm>
-            <a:off x="7333488" y="2999232"/>
+            <a:off x="7528358" y="2999232"/>
             <a:ext cx="256032" cy="274320"/>
           </a:xfrm>
           <a:prstGeom prst="rightArrow">
@@ -6744,6 +6783,7 @@
           <a:lstStyle/>
           <a:p>
             <a:pPr algn="ctr"/>
+            <a:endParaRPr/>
           </a:p>
         </p:txBody>
       </p:sp>
@@ -6755,7 +6795,7 @@
         </p:nvSpPr>
         <p:spPr>
           <a:xfrm rot="10800000">
-            <a:off x="4443984" y="3310128"/>
+            <a:off x="4638854" y="3310128"/>
             <a:ext cx="256032" cy="274320"/>
           </a:xfrm>
           <a:prstGeom prst="rightArrow">
@@ -6788,6 +6828,7 @@
           <a:lstStyle/>
           <a:p>
             <a:pPr algn="ctr"/>
+            <a:endParaRPr/>
           </a:p>
         </p:txBody>
       </p:sp>
@@ -6799,7 +6840,7 @@
         </p:nvSpPr>
         <p:spPr>
           <a:xfrm rot="10800000">
-            <a:off x="7333488" y="3310128"/>
+            <a:off x="7528358" y="3310128"/>
             <a:ext cx="256032" cy="274320"/>
           </a:xfrm>
           <a:prstGeom prst="rightArrow">
@@ -6832,6 +6873,7 @@
           <a:lstStyle/>
           <a:p>
             <a:pPr algn="ctr"/>
+            <a:endParaRPr/>
           </a:p>
         </p:txBody>
       </p:sp>
@@ -6843,7 +6885,7 @@
         </p:nvSpPr>
         <p:spPr>
           <a:xfrm>
-            <a:off x="594360" y="5138928"/>
+            <a:off x="822960" y="5148072"/>
             <a:ext cx="10972800" cy="1188720"/>
           </a:xfrm>
           <a:prstGeom prst="rect">
@@ -6852,7 +6894,7 @@
           <a:noFill/>
         </p:spPr>
         <p:txBody>
-          <a:bodyPr wrap="square" lIns="0" rIns="0" tIns="0" bIns="0">
+          <a:bodyPr wrap="square" lIns="0" tIns="0" rIns="0" bIns="0">
             <a:spAutoFit/>
           </a:bodyPr>
           <a:lstStyle/>
@@ -6869,7 +6911,7 @@
               </a:spcAft>
             </a:pPr>
             <a:r>
-              <a:rPr sz="1300" b="1" i="0">
+              <a:rPr sz="1300" b="1" i="0" dirty="0">
                 <a:solidFill>
                   <a:srgbClr val="143B5C"/>
                 </a:solidFill>
@@ -6891,7 +6933,7 @@
               </a:spcAft>
             </a:pPr>
             <a:r>
-              <a:rPr sz="1100" b="0" i="0">
+              <a:rPr sz="1100" b="0" i="0" dirty="0">
                 <a:solidFill>
                   <a:srgbClr val="2B2B2B"/>
                 </a:solidFill>
@@ -6911,7 +6953,7 @@
 </file>
 
 <file path=ppt/slides/slide12.xml><?xml version="1.0" encoding="utf-8"?>
-<p:sld xmlns:a="http://schemas.openxmlformats.org/drawingml/2006/main" xmlns:p="http://schemas.openxmlformats.org/presentationml/2006/main" xmlns:r="http://schemas.openxmlformats.org/officeDocument/2006/relationships">
+<p:sld xmlns:a="http://schemas.openxmlformats.org/drawingml/2006/main" xmlns:r="http://schemas.openxmlformats.org/officeDocument/2006/relationships" xmlns:p="http://schemas.openxmlformats.org/presentationml/2006/main">
   <p:cSld>
     <p:spTree>
       <p:nvGrpSpPr>
@@ -6919,7 +6961,14 @@
         <p:cNvGrpSpPr/>
         <p:nvPr/>
       </p:nvGrpSpPr>
-      <p:grpSpPr/>
+      <p:grpSpPr>
+        <a:xfrm>
+          <a:off x="0" y="0"/>
+          <a:ext cx="0" cy="0"/>
+          <a:chOff x="0" y="0"/>
+          <a:chExt cx="0" cy="0"/>
+        </a:xfrm>
+      </p:grpSpPr>
       <p:sp>
         <p:nvSpPr>
           <p:cNvPr id="2" name="TextBox 1"/>
@@ -6928,7 +6977,7 @@
         </p:nvSpPr>
         <p:spPr>
           <a:xfrm>
-            <a:off x="411480" y="237744"/>
+            <a:off x="853440" y="242316"/>
             <a:ext cx="11338560" cy="777240"/>
           </a:xfrm>
           <a:prstGeom prst="rect">
@@ -6937,7 +6986,7 @@
           <a:noFill/>
         </p:spPr>
         <p:txBody>
-          <a:bodyPr wrap="square" lIns="0" rIns="0" tIns="0" bIns="0">
+          <a:bodyPr wrap="square" lIns="0" tIns="0" rIns="0" bIns="0">
             <a:spAutoFit/>
           </a:bodyPr>
           <a:lstStyle/>
@@ -6954,7 +7003,7 @@
               </a:spcAft>
             </a:pPr>
             <a:r>
-              <a:rPr sz="1050" b="1" i="0">
+              <a:rPr sz="1050" b="1" i="0" dirty="0">
                 <a:solidFill>
                   <a:srgbClr val="00A4E4"/>
                 </a:solidFill>
@@ -6976,7 +7025,7 @@
               </a:spcAft>
             </a:pPr>
             <a:r>
-              <a:rPr sz="2500" b="1" i="0">
+              <a:rPr sz="2500" b="1" i="0" dirty="0">
                 <a:solidFill>
                   <a:srgbClr val="143B5C"/>
                 </a:solidFill>
@@ -6995,7 +7044,7 @@
         </p:nvSpPr>
         <p:spPr>
           <a:xfrm>
-            <a:off x="429768" y="969264"/>
+            <a:off x="853440" y="864108"/>
             <a:ext cx="1234440" cy="41148"/>
           </a:xfrm>
           <a:prstGeom prst="rect">
@@ -7028,6 +7077,7 @@
           <a:lstStyle/>
           <a:p>
             <a:pPr algn="ctr"/>
+            <a:endParaRPr/>
           </a:p>
         </p:txBody>
       </p:sp>
@@ -7072,19 +7122,20 @@
           <a:lstStyle/>
           <a:p>
             <a:pPr algn="ctr"/>
-          </a:p>
-        </p:txBody>
-      </p:sp>
-      <p:sp>
-        <p:nvSpPr>
-          <p:cNvPr id="5" name="TextBox 4"/>
+            <a:endParaRPr/>
+          </a:p>
+        </p:txBody>
+      </p:sp>
+      <p:sp>
+        <p:nvSpPr>
+          <p:cNvPr id="6" name="TextBox 5"/>
           <p:cNvSpPr txBox="1"/>
           <p:nvPr/>
         </p:nvSpPr>
         <p:spPr>
           <a:xfrm>
-            <a:off x="411480" y="6556248"/>
-            <a:ext cx="8686800" cy="274320"/>
+            <a:off x="10972800" y="6556248"/>
+            <a:ext cx="804672" cy="274320"/>
           </a:xfrm>
           <a:prstGeom prst="rect">
             <a:avLst/>
@@ -7092,52 +7143,7 @@
           <a:noFill/>
         </p:spPr>
         <p:txBody>
-          <a:bodyPr wrap="square" lIns="0" rIns="0" tIns="0" bIns="0">
-            <a:spAutoFit/>
-          </a:bodyPr>
-          <a:lstStyle/>
-          <a:p>
-            <a:pPr algn="l">
-              <a:lnSpc>
-                <a:spcPct val="100000"/>
-              </a:lnSpc>
-              <a:spcBef>
-                <a:spcPts val="0"/>
-              </a:spcBef>
-              <a:spcAft>
-                <a:spcPts val="400"/>
-              </a:spcAft>
-            </a:pPr>
-            <a:r>
-              <a:rPr sz="800" b="0" i="0">
-                <a:solidFill>
-                  <a:srgbClr val="6B6B6B"/>
-                </a:solidFill>
-                <a:latin typeface="Calibri"/>
-              </a:rPr>
-              <a:t>Particle-Based Modelling of Scrap Handling for Green Steel Production  •  TU Delft × Tata Steel Netherlands</a:t>
-            </a:r>
-          </a:p>
-        </p:txBody>
-      </p:sp>
-      <p:sp>
-        <p:nvSpPr>
-          <p:cNvPr id="6" name="TextBox 5"/>
-          <p:cNvSpPr txBox="1"/>
-          <p:nvPr/>
-        </p:nvSpPr>
-        <p:spPr>
-          <a:xfrm>
-            <a:off x="10972800" y="6556248"/>
-            <a:ext cx="804672" cy="274320"/>
-          </a:xfrm>
-          <a:prstGeom prst="rect">
-            <a:avLst/>
-          </a:prstGeom>
-          <a:noFill/>
-        </p:spPr>
-        <p:txBody>
-          <a:bodyPr wrap="square" lIns="0" rIns="0" tIns="0" bIns="0">
+          <a:bodyPr wrap="square" lIns="0" tIns="0" rIns="0" bIns="0">
             <a:spAutoFit/>
           </a:bodyPr>
           <a:lstStyle/>
@@ -7173,7 +7179,7 @@
         </p:nvSpPr>
         <p:spPr>
           <a:xfrm>
-            <a:off x="411480" y="1298448"/>
+            <a:off x="747548" y="1151881"/>
             <a:ext cx="1234440" cy="566928"/>
           </a:xfrm>
           <a:prstGeom prst="roundRect">
@@ -7209,7 +7215,7 @@
           <a:p>
             <a:pPr algn="ctr"/>
             <a:r>
-              <a:rPr sz="1200" b="1" i="0">
+              <a:rPr sz="1200" b="1" i="0" dirty="0">
                 <a:solidFill>
                   <a:srgbClr val="FFFFFF"/>
                 </a:solidFill>
@@ -7228,7 +7234,7 @@
         </p:nvSpPr>
         <p:spPr>
           <a:xfrm>
-            <a:off x="1874519" y="1271016"/>
+            <a:off x="2087880" y="1325880"/>
             <a:ext cx="9921240" cy="822960"/>
           </a:xfrm>
           <a:prstGeom prst="rect">
@@ -7237,7 +7243,7 @@
           <a:noFill/>
         </p:spPr>
         <p:txBody>
-          <a:bodyPr wrap="square" lIns="0" rIns="0" tIns="0" bIns="0">
+          <a:bodyPr wrap="square" lIns="0" tIns="0" rIns="0" bIns="0">
             <a:spAutoFit/>
           </a:bodyPr>
           <a:lstStyle/>
@@ -7254,13 +7260,31 @@
               </a:spcAft>
             </a:pPr>
             <a:r>
-              <a:rPr sz="1200" b="0" i="0">
+              <a:rPr sz="1200" b="0" i="0" dirty="0">
                 <a:solidFill>
                   <a:srgbClr val="2B2B2B"/>
                 </a:solidFill>
                 <a:latin typeface="Calibri"/>
               </a:rPr>
-              <a:t>DEM with realistic non-spherical representation (multi-sphere / super-quadric / polyhedra) is the right tool for scrap handling — shape is physics, not decoration.</a:t>
+              <a:t>DEM with realistic non-spherical representation (multi-sphere / super-quadric / </a:t>
+            </a:r>
+            <a:r>
+              <a:rPr sz="1200" b="0" i="0" dirty="0" err="1">
+                <a:solidFill>
+                  <a:srgbClr val="2B2B2B"/>
+                </a:solidFill>
+                <a:latin typeface="Calibri"/>
+              </a:rPr>
+              <a:t>polyhedra</a:t>
+            </a:r>
+            <a:r>
+              <a:rPr sz="1200" b="0" i="0" dirty="0">
+                <a:solidFill>
+                  <a:srgbClr val="2B2B2B"/>
+                </a:solidFill>
+                <a:latin typeface="Calibri"/>
+              </a:rPr>
+              <a:t>) is the right tool for scrap handling — shape is physics, not decoration.</a:t>
             </a:r>
           </a:p>
         </p:txBody>
@@ -7273,7 +7297,7 @@
         </p:nvSpPr>
         <p:spPr>
           <a:xfrm>
-            <a:off x="411480" y="2231136"/>
+            <a:off x="747548" y="2130421"/>
             <a:ext cx="1234440" cy="566928"/>
           </a:xfrm>
           <a:prstGeom prst="roundRect">
@@ -7328,7 +7352,7 @@
         </p:nvSpPr>
         <p:spPr>
           <a:xfrm>
-            <a:off x="1874519" y="2203704"/>
+            <a:off x="2087880" y="2189988"/>
             <a:ext cx="9921240" cy="822960"/>
           </a:xfrm>
           <a:prstGeom prst="rect">
@@ -7337,7 +7361,7 @@
           <a:noFill/>
         </p:spPr>
         <p:txBody>
-          <a:bodyPr wrap="square" lIns="0" rIns="0" tIns="0" bIns="0">
+          <a:bodyPr wrap="square" lIns="0" tIns="0" rIns="0" bIns="0">
             <a:spAutoFit/>
           </a:bodyPr>
           <a:lstStyle/>
@@ -7354,7 +7378,7 @@
               </a:spcAft>
             </a:pPr>
             <a:r>
-              <a:rPr sz="1200" b="0" i="0">
+              <a:rPr sz="1200" b="0" i="0" dirty="0">
                 <a:solidFill>
                   <a:srgbClr val="2B2B2B"/>
                 </a:solidFill>
@@ -7373,7 +7397,7 @@
         </p:nvSpPr>
         <p:spPr>
           <a:xfrm>
-            <a:off x="411480" y="3163824"/>
+            <a:off x="747548" y="3051810"/>
             <a:ext cx="1234440" cy="566928"/>
           </a:xfrm>
           <a:prstGeom prst="roundRect">
@@ -7428,7 +7452,7 @@
         </p:nvSpPr>
         <p:spPr>
           <a:xfrm>
-            <a:off x="1874519" y="3136392"/>
+            <a:off x="2087880" y="3145536"/>
             <a:ext cx="9921240" cy="822960"/>
           </a:xfrm>
           <a:prstGeom prst="rect">
@@ -7437,7 +7461,7 @@
           <a:noFill/>
         </p:spPr>
         <p:txBody>
-          <a:bodyPr wrap="square" lIns="0" rIns="0" tIns="0" bIns="0">
+          <a:bodyPr wrap="square" lIns="0" tIns="0" rIns="0" bIns="0">
             <a:spAutoFit/>
           </a:bodyPr>
           <a:lstStyle/>
@@ -7454,13 +7478,31 @@
               </a:spcAft>
             </a:pPr>
             <a:r>
-              <a:rPr sz="1200" b="0" i="0">
+              <a:rPr sz="1200" b="0" i="0" dirty="0">
                 <a:solidFill>
                   <a:srgbClr val="2B2B2B"/>
                 </a:solidFill>
                 <a:latin typeface="Calibri"/>
               </a:rPr>
-              <a:t>Coarse-graining + industrial calibration turns the gap into a validated digital twin of EAF infeed — optimised sequences, less wear, less energy.</a:t>
+              <a:t>Coarse-graining + industrial calibration turns the gap into a validated digital twin of EAF infeed — </a:t>
+            </a:r>
+            <a:r>
+              <a:rPr sz="1200" b="0" i="0" dirty="0" err="1">
+                <a:solidFill>
+                  <a:srgbClr val="2B2B2B"/>
+                </a:solidFill>
+                <a:latin typeface="Calibri"/>
+              </a:rPr>
+              <a:t>optimised</a:t>
+            </a:r>
+            <a:r>
+              <a:rPr sz="1200" b="0" i="0" dirty="0">
+                <a:solidFill>
+                  <a:srgbClr val="2B2B2B"/>
+                </a:solidFill>
+                <a:latin typeface="Calibri"/>
+              </a:rPr>
+              <a:t> sequences, less wear, less energy.</a:t>
             </a:r>
           </a:p>
         </p:txBody>
@@ -7473,7 +7515,7 @@
         </p:nvSpPr>
         <p:spPr>
           <a:xfrm>
-            <a:off x="411480" y="4224528"/>
+            <a:off x="747548" y="4237981"/>
             <a:ext cx="11365992" cy="1051560"/>
           </a:xfrm>
           <a:prstGeom prst="roundRect">
@@ -7504,7 +7546,7 @@
           </a:fontRef>
         </p:style>
         <p:txBody>
-          <a:bodyPr rtlCol="0" anchor="ctr" wrap="square" lIns="228600" rIns="228600"/>
+          <a:bodyPr wrap="square" lIns="228600" rIns="228600" rtlCol="0" anchor="ctr"/>
           <a:lstStyle/>
           <a:p>
             <a:pPr algn="ctr"/>
@@ -7529,7 +7571,7 @@
         <p:spPr>
           <a:xfrm>
             <a:off x="411480" y="5532120"/>
-            <a:ext cx="11365992" cy="822960"/>
+            <a:ext cx="11365992" cy="377026"/>
           </a:xfrm>
           <a:prstGeom prst="rect">
             <a:avLst/>
@@ -7537,14 +7579,14 @@
           <a:noFill/>
         </p:spPr>
         <p:txBody>
-          <a:bodyPr wrap="square" lIns="0" rIns="0" tIns="0" bIns="0">
+          <a:bodyPr wrap="square" lIns="0" tIns="0" rIns="0" bIns="0">
             <a:spAutoFit/>
           </a:bodyPr>
           <a:lstStyle/>
           <a:p>
             <a:pPr algn="ctr"/>
             <a:r>
-              <a:rPr sz="1400" b="1" i="0">
+              <a:rPr sz="1400" b="1" i="0" dirty="0">
                 <a:solidFill>
                   <a:srgbClr val="143B5C"/>
                 </a:solidFill>
@@ -7556,14 +7598,38 @@
           <a:p>
             <a:pPr algn="ctr"/>
             <a:r>
-              <a:rPr sz="1050" b="0" i="0">
+              <a:rPr lang="fr-FR" sz="1050" b="0" i="0" dirty="0">
                 <a:solidFill>
                   <a:srgbClr val="6B6B6B"/>
                 </a:solidFill>
                 <a:latin typeface="Calibri"/>
               </a:rPr>
-              <a:t>Your Name  •  TU Delft  •  email@tu.nl</a:t>
-            </a:r>
+              <a:t>Kevin Tongue</a:t>
+            </a:r>
+            <a:r>
+              <a:rPr sz="1050" b="0" i="0" dirty="0">
+                <a:solidFill>
+                  <a:srgbClr val="6B6B6B"/>
+                </a:solidFill>
+                <a:latin typeface="Calibri"/>
+              </a:rPr>
+              <a:t> •  </a:t>
+            </a:r>
+            <a:r>
+              <a:rPr lang="fr-FR" sz="1050" b="0" i="0" dirty="0">
+                <a:solidFill>
+                  <a:srgbClr val="6B6B6B"/>
+                </a:solidFill>
+                <a:latin typeface="Calibri"/>
+              </a:rPr>
+              <a:t>tonguekevin00@gmail.com</a:t>
+            </a:r>
+            <a:endParaRPr sz="1050" b="0" i="0" dirty="0">
+              <a:solidFill>
+                <a:srgbClr val="6B6B6B"/>
+              </a:solidFill>
+              <a:latin typeface="Calibri"/>
+            </a:endParaRPr>
           </a:p>
         </p:txBody>
       </p:sp>
@@ -7576,7 +7642,7 @@
 </file>
 
 <file path=ppt/slides/slide13.xml><?xml version="1.0" encoding="utf-8"?>
-<p:sld xmlns:a="http://schemas.openxmlformats.org/drawingml/2006/main" xmlns:p="http://schemas.openxmlformats.org/presentationml/2006/main" xmlns:r="http://schemas.openxmlformats.org/officeDocument/2006/relationships">
+<p:sld xmlns:a="http://schemas.openxmlformats.org/drawingml/2006/main" xmlns:r="http://schemas.openxmlformats.org/officeDocument/2006/relationships" xmlns:p="http://schemas.openxmlformats.org/presentationml/2006/main">
   <p:cSld>
     <p:spTree>
       <p:nvGrpSpPr>
@@ -7584,7 +7650,14 @@
         <p:cNvGrpSpPr/>
         <p:nvPr/>
       </p:nvGrpSpPr>
-      <p:grpSpPr/>
+      <p:grpSpPr>
+        <a:xfrm>
+          <a:off x="0" y="0"/>
+          <a:ext cx="0" cy="0"/>
+          <a:chOff x="0" y="0"/>
+          <a:chExt cx="0" cy="0"/>
+        </a:xfrm>
+      </p:grpSpPr>
       <p:sp>
         <p:nvSpPr>
           <p:cNvPr id="2" name="TextBox 1"/>
@@ -7602,7 +7675,7 @@
           <a:noFill/>
         </p:spPr>
         <p:txBody>
-          <a:bodyPr wrap="square" lIns="0" rIns="0" tIns="0" bIns="0">
+          <a:bodyPr wrap="square" lIns="0" tIns="0" rIns="0" bIns="0">
             <a:spAutoFit/>
           </a:bodyPr>
           <a:lstStyle/>
@@ -7693,6 +7766,7 @@
           <a:lstStyle/>
           <a:p>
             <a:pPr algn="ctr"/>
+            <a:endParaRPr/>
           </a:p>
         </p:txBody>
       </p:sp>
@@ -7737,19 +7811,20 @@
           <a:lstStyle/>
           <a:p>
             <a:pPr algn="ctr"/>
-          </a:p>
-        </p:txBody>
-      </p:sp>
-      <p:sp>
-        <p:nvSpPr>
-          <p:cNvPr id="5" name="TextBox 4"/>
+            <a:endParaRPr/>
+          </a:p>
+        </p:txBody>
+      </p:sp>
+      <p:sp>
+        <p:nvSpPr>
+          <p:cNvPr id="6" name="TextBox 5"/>
           <p:cNvSpPr txBox="1"/>
           <p:nvPr/>
         </p:nvSpPr>
         <p:spPr>
           <a:xfrm>
-            <a:off x="411480" y="6556248"/>
-            <a:ext cx="8686800" cy="274320"/>
+            <a:off x="10972800" y="6556248"/>
+            <a:ext cx="804672" cy="274320"/>
           </a:xfrm>
           <a:prstGeom prst="rect">
             <a:avLst/>
@@ -7757,52 +7832,7 @@
           <a:noFill/>
         </p:spPr>
         <p:txBody>
-          <a:bodyPr wrap="square" lIns="0" rIns="0" tIns="0" bIns="0">
-            <a:spAutoFit/>
-          </a:bodyPr>
-          <a:lstStyle/>
-          <a:p>
-            <a:pPr algn="l">
-              <a:lnSpc>
-                <a:spcPct val="100000"/>
-              </a:lnSpc>
-              <a:spcBef>
-                <a:spcPts val="0"/>
-              </a:spcBef>
-              <a:spcAft>
-                <a:spcPts val="400"/>
-              </a:spcAft>
-            </a:pPr>
-            <a:r>
-              <a:rPr sz="800" b="0" i="0">
-                <a:solidFill>
-                  <a:srgbClr val="6B6B6B"/>
-                </a:solidFill>
-                <a:latin typeface="Calibri"/>
-              </a:rPr>
-              <a:t>Particle-Based Modelling of Scrap Handling for Green Steel Production  •  TU Delft × Tata Steel Netherlands</a:t>
-            </a:r>
-          </a:p>
-        </p:txBody>
-      </p:sp>
-      <p:sp>
-        <p:nvSpPr>
-          <p:cNvPr id="6" name="TextBox 5"/>
-          <p:cNvSpPr txBox="1"/>
-          <p:nvPr/>
-        </p:nvSpPr>
-        <p:spPr>
-          <a:xfrm>
-            <a:off x="10972800" y="6556248"/>
-            <a:ext cx="804672" cy="274320"/>
-          </a:xfrm>
-          <a:prstGeom prst="rect">
-            <a:avLst/>
-          </a:prstGeom>
-          <a:noFill/>
-        </p:spPr>
-        <p:txBody>
-          <a:bodyPr wrap="square" lIns="0" rIns="0" tIns="0" bIns="0">
+          <a:bodyPr wrap="square" lIns="0" tIns="0" rIns="0" bIns="0">
             <a:spAutoFit/>
           </a:bodyPr>
           <a:lstStyle/>
@@ -7838,7 +7868,7 @@
         </p:nvSpPr>
         <p:spPr>
           <a:xfrm>
-            <a:off x="411480" y="1234440"/>
+            <a:off x="789852" y="1239170"/>
             <a:ext cx="5577840" cy="5120640"/>
           </a:xfrm>
           <a:prstGeom prst="rect">
@@ -7847,7 +7877,7 @@
           <a:noFill/>
         </p:spPr>
         <p:txBody>
-          <a:bodyPr wrap="square" lIns="0" rIns="0" tIns="0" bIns="0">
+          <a:bodyPr wrap="square" lIns="0" tIns="0" rIns="0" bIns="0">
             <a:spAutoFit/>
           </a:bodyPr>
           <a:lstStyle/>
@@ -7861,7 +7891,7 @@
               </a:spcAft>
             </a:pPr>
             <a:r>
-              <a:rPr sz="850" b="0" i="0">
+              <a:rPr sz="850" b="0" i="0" dirty="0">
                 <a:solidFill>
                   <a:srgbClr val="2B2B2B"/>
                 </a:solidFill>
@@ -7880,7 +7910,7 @@
               </a:spcAft>
             </a:pPr>
             <a:r>
-              <a:rPr sz="850" b="0" i="0">
+              <a:rPr sz="850" b="0" i="0" dirty="0">
                 <a:solidFill>
                   <a:srgbClr val="2B2B2B"/>
                 </a:solidFill>
@@ -7899,7 +7929,7 @@
               </a:spcAft>
             </a:pPr>
             <a:r>
-              <a:rPr sz="850" b="0" i="0">
+              <a:rPr sz="850" b="0" i="0" dirty="0">
                 <a:solidFill>
                   <a:srgbClr val="2B2B2B"/>
                 </a:solidFill>
@@ -7918,13 +7948,31 @@
               </a:spcAft>
             </a:pPr>
             <a:r>
-              <a:rPr sz="850" b="0" i="0">
+              <a:rPr sz="850" b="0" i="0" dirty="0">
                 <a:solidFill>
                   <a:srgbClr val="2B2B2B"/>
                 </a:solidFill>
                 <a:latin typeface="Calibri"/>
               </a:rPr>
-              <a:t>[4]  Schefler O.C., Coetzee C.J. (2023). Discrete element modelling of a bulk cohesive material discharging from a conveyor belt onto an impact plate. Minerals 13(12): 1501.</a:t>
+              <a:t>[4]  </a:t>
+            </a:r>
+            <a:r>
+              <a:rPr sz="850" b="0" i="0" dirty="0" err="1">
+                <a:solidFill>
+                  <a:srgbClr val="2B2B2B"/>
+                </a:solidFill>
+                <a:latin typeface="Calibri"/>
+              </a:rPr>
+              <a:t>Schefler</a:t>
+            </a:r>
+            <a:r>
+              <a:rPr sz="850" b="0" i="0" dirty="0">
+                <a:solidFill>
+                  <a:srgbClr val="2B2B2B"/>
+                </a:solidFill>
+                <a:latin typeface="Calibri"/>
+              </a:rPr>
+              <a:t> O.C., Coetzee C.J. (2023). Discrete element modelling of a bulk cohesive material discharging from a conveyor belt onto an impact plate. Minerals 13(12): 1501.</a:t>
             </a:r>
           </a:p>
           <a:p>
@@ -7937,7 +7985,7 @@
               </a:spcAft>
             </a:pPr>
             <a:r>
-              <a:rPr sz="850" b="0" i="0">
+              <a:rPr sz="850" b="0" i="0" dirty="0">
                 <a:solidFill>
                   <a:srgbClr val="2B2B2B"/>
                 </a:solidFill>
@@ -7956,7 +8004,7 @@
               </a:spcAft>
             </a:pPr>
             <a:r>
-              <a:rPr sz="850" b="0" i="0">
+              <a:rPr sz="850" b="0" i="0" dirty="0">
                 <a:solidFill>
                   <a:srgbClr val="2B2B2B"/>
                 </a:solidFill>
@@ -7975,13 +8023,31 @@
               </a:spcAft>
             </a:pPr>
             <a:r>
-              <a:rPr sz="850" b="0" i="0">
+              <a:rPr sz="850" b="0" i="0" dirty="0">
                 <a:solidFill>
                   <a:srgbClr val="2B2B2B"/>
                 </a:solidFill>
                 <a:latin typeface="Calibri"/>
               </a:rPr>
-              <a:t>[7]  Chen Y., Ryan S., Silaen A.K., Zhou C.Q. (2022). Simulation of scrap melting process in an AC electric arc furnace: CFD model development and experimental validation. Metallurgical and Materials Transactions B 53: 3256–3272.</a:t>
+              <a:t>[7]  Chen Y., Ryan S., </a:t>
+            </a:r>
+            <a:r>
+              <a:rPr sz="850" b="0" i="0" dirty="0" err="1">
+                <a:solidFill>
+                  <a:srgbClr val="2B2B2B"/>
+                </a:solidFill>
+                <a:latin typeface="Calibri"/>
+              </a:rPr>
+              <a:t>Silaen</a:t>
+            </a:r>
+            <a:r>
+              <a:rPr sz="850" b="0" i="0" dirty="0">
+                <a:solidFill>
+                  <a:srgbClr val="2B2B2B"/>
+                </a:solidFill>
+                <a:latin typeface="Calibri"/>
+              </a:rPr>
+              <a:t> A.K., Zhou C.Q. (2022). Simulation of scrap melting process in an AC electric arc furnace: CFD model development and experimental validation. Metallurgical and Materials Transactions B 53: 3256–3272.</a:t>
             </a:r>
           </a:p>
         </p:txBody>
@@ -7994,7 +8060,7 @@
         </p:nvSpPr>
         <p:spPr>
           <a:xfrm>
-            <a:off x="6172200" y="1234440"/>
+            <a:off x="6614160" y="1259140"/>
             <a:ext cx="5577840" cy="5120640"/>
           </a:xfrm>
           <a:prstGeom prst="rect">
@@ -8003,7 +8069,7 @@
           <a:noFill/>
         </p:spPr>
         <p:txBody>
-          <a:bodyPr wrap="square" lIns="0" rIns="0" tIns="0" bIns="0">
+          <a:bodyPr wrap="square" lIns="0" tIns="0" rIns="0" bIns="0">
             <a:spAutoFit/>
           </a:bodyPr>
           <a:lstStyle/>
@@ -8017,13 +8083,31 @@
               </a:spcAft>
             </a:pPr>
             <a:r>
-              <a:rPr sz="850" b="0" i="0">
+              <a:rPr sz="850" b="0" i="0" dirty="0">
                 <a:solidFill>
                   <a:srgbClr val="2B2B2B"/>
                 </a:solidFill>
                 <a:latin typeface="Calibri"/>
               </a:rPr>
-              <a:t>[8]  Li J., Provatas N., Irons G.A. (2008). Modelling of late melting of scrap in an EAF. AISTech 2008, Irons A8046.</a:t>
+              <a:t>[8]  Li J., </a:t>
+            </a:r>
+            <a:r>
+              <a:rPr sz="850" b="0" i="0" dirty="0" err="1">
+                <a:solidFill>
+                  <a:srgbClr val="2B2B2B"/>
+                </a:solidFill>
+                <a:latin typeface="Calibri"/>
+              </a:rPr>
+              <a:t>Provatas</a:t>
+            </a:r>
+            <a:r>
+              <a:rPr sz="850" b="0" i="0" dirty="0">
+                <a:solidFill>
+                  <a:srgbClr val="2B2B2B"/>
+                </a:solidFill>
+                <a:latin typeface="Calibri"/>
+              </a:rPr>
+              <a:t> N., Irons G.A. (2008). Modelling of late melting of scrap in an EAF. AISTech 2008, Irons A8046.</a:t>
             </a:r>
           </a:p>
           <a:p>
@@ -8036,13 +8120,49 @@
               </a:spcAft>
             </a:pPr>
             <a:r>
-              <a:rPr sz="850" b="0" i="0">
+              <a:rPr sz="850" b="0" i="0" dirty="0">
                 <a:solidFill>
                   <a:srgbClr val="2B2B2B"/>
                 </a:solidFill>
                 <a:latin typeface="Calibri"/>
               </a:rPr>
-              <a:t>[9]  Kryszak D., Bartoszewicz A., Szufa S., Piersa P., Obraniak A., Olejnik T.P. (2020). Modelling of transport of loose products with the use of the non-grid method of discrete elements (DEM). Processes 8(11): 1489.</a:t>
+              <a:t>[9]  Kryszak D., Bartoszewicz A., </a:t>
+            </a:r>
+            <a:r>
+              <a:rPr sz="850" b="0" i="0" dirty="0" err="1">
+                <a:solidFill>
+                  <a:srgbClr val="2B2B2B"/>
+                </a:solidFill>
+                <a:latin typeface="Calibri"/>
+              </a:rPr>
+              <a:t>Szufa</a:t>
+            </a:r>
+            <a:r>
+              <a:rPr sz="850" b="0" i="0" dirty="0">
+                <a:solidFill>
+                  <a:srgbClr val="2B2B2B"/>
+                </a:solidFill>
+                <a:latin typeface="Calibri"/>
+              </a:rPr>
+              <a:t> S., Piersa P., </a:t>
+            </a:r>
+            <a:r>
+              <a:rPr sz="850" b="0" i="0" dirty="0" err="1">
+                <a:solidFill>
+                  <a:srgbClr val="2B2B2B"/>
+                </a:solidFill>
+                <a:latin typeface="Calibri"/>
+              </a:rPr>
+              <a:t>Obraniak</a:t>
+            </a:r>
+            <a:r>
+              <a:rPr sz="850" b="0" i="0" dirty="0">
+                <a:solidFill>
+                  <a:srgbClr val="2B2B2B"/>
+                </a:solidFill>
+                <a:latin typeface="Calibri"/>
+              </a:rPr>
+              <a:t> A., Olejnik T.P. (2020). Modelling of transport of loose products with the use of the non-grid method of discrete elements (DEM). Processes 8(11): 1489.</a:t>
             </a:r>
           </a:p>
           <a:p>
@@ -8055,7 +8175,7 @@
               </a:spcAft>
             </a:pPr>
             <a:r>
-              <a:rPr sz="850" b="0" i="0">
+              <a:rPr sz="850" b="0" i="0" dirty="0">
                 <a:solidFill>
                   <a:srgbClr val="2B2B2B"/>
                 </a:solidFill>
@@ -8074,13 +8194,31 @@
               </a:spcAft>
             </a:pPr>
             <a:r>
-              <a:rPr sz="850" b="0" i="0">
+              <a:rPr sz="850" b="0" i="0" dirty="0">
                 <a:solidFill>
                   <a:srgbClr val="2B2B2B"/>
                 </a:solidFill>
                 <a:latin typeface="Calibri"/>
               </a:rPr>
-              <a:t>[11]  Kozicki J., Tejchman J. (2005). Application of a cellular automaton to simulations of granular flow in silos. Granular Matter 7: 45–54.</a:t>
+              <a:t>[11]  Kozicki J., </a:t>
+            </a:r>
+            <a:r>
+              <a:rPr sz="850" b="0" i="0" dirty="0" err="1">
+                <a:solidFill>
+                  <a:srgbClr val="2B2B2B"/>
+                </a:solidFill>
+                <a:latin typeface="Calibri"/>
+              </a:rPr>
+              <a:t>Tejchman</a:t>
+            </a:r>
+            <a:r>
+              <a:rPr sz="850" b="0" i="0" dirty="0">
+                <a:solidFill>
+                  <a:srgbClr val="2B2B2B"/>
+                </a:solidFill>
+                <a:latin typeface="Calibri"/>
+              </a:rPr>
+              <a:t> J. (2005). Application of a cellular automaton to simulations of granular flow in silos. Granular Matter 7: 45–54.</a:t>
             </a:r>
           </a:p>
           <a:p>
@@ -8093,7 +8231,7 @@
               </a:spcAft>
             </a:pPr>
             <a:r>
-              <a:rPr sz="850" b="0" i="0">
+              <a:rPr sz="850" b="0" i="0" dirty="0">
                 <a:solidFill>
                   <a:srgbClr val="2B2B2B"/>
                 </a:solidFill>
@@ -8112,7 +8250,7 @@
               </a:spcAft>
             </a:pPr>
             <a:r>
-              <a:rPr sz="850" b="0" i="0">
+              <a:rPr sz="850" b="0" i="0" dirty="0">
                 <a:solidFill>
                   <a:srgbClr val="2B2B2B"/>
                 </a:solidFill>
@@ -8131,7 +8269,7 @@
               </a:spcAft>
             </a:pPr>
             <a:r>
-              <a:rPr sz="850" b="0" i="0">
+              <a:rPr sz="850" b="0" i="0" dirty="0">
                 <a:solidFill>
                   <a:srgbClr val="2B2B2B"/>
                 </a:solidFill>
@@ -8189,10 +8327,6 @@
           <a:lstStyle/>
           <a:p>
             <a:r>
-              <a:rPr lang="en-FR" dirty="0"/>
-              <a:t/>
-            </a:r>
-            <a:r>
               <a:rPr sz="3000" b="1" i="0">
                 <a:solidFill>
                   <a:srgbClr val="143B5C"/>
@@ -8212,7 +8346,7 @@
         </p:nvSpPr>
         <p:spPr>
           <a:xfrm>
-            <a:off x="502920" y="1417320"/>
+            <a:off x="731520" y="1344168"/>
             <a:ext cx="566928" cy="566928"/>
           </a:xfrm>
           <a:prstGeom prst="ellipse">
@@ -8241,7 +8375,7 @@
           </a:fontRef>
         </p:style>
         <p:txBody>
-          <a:bodyPr rtlCol="0" anchor="ctr" wrap="none"/>
+          <a:bodyPr wrap="none" rtlCol="0" anchor="ctr"/>
           <a:lstStyle/>
           <a:p>
             <a:pPr algn="ctr"/>
@@ -8265,7 +8399,7 @@
         </p:nvSpPr>
         <p:spPr>
           <a:xfrm>
-            <a:off x="1371600" y="1380744"/>
+            <a:off x="1371600" y="1392174"/>
             <a:ext cx="10241280" cy="868680"/>
           </a:xfrm>
           <a:prstGeom prst="rect">
@@ -8274,7 +8408,7 @@
           <a:noFill/>
         </p:spPr>
         <p:txBody>
-          <a:bodyPr wrap="square" lIns="0" rIns="0" tIns="0" bIns="0">
+          <a:bodyPr wrap="square" lIns="0" tIns="0" rIns="0" bIns="0">
             <a:spAutoFit/>
           </a:bodyPr>
           <a:lstStyle/>
@@ -8291,7 +8425,7 @@
               </a:spcAft>
             </a:pPr>
             <a:r>
-              <a:rPr sz="1700" b="1" i="0">
+              <a:rPr sz="1700" b="1" i="0" dirty="0">
                 <a:solidFill>
                   <a:srgbClr val="143B5C"/>
                 </a:solidFill>
@@ -8313,7 +8447,7 @@
               </a:spcAft>
             </a:pPr>
             <a:r>
-              <a:rPr sz="1150" b="0" i="0">
+              <a:rPr sz="1150" b="0" i="0" dirty="0">
                 <a:solidFill>
                   <a:srgbClr val="6B6B6B"/>
                 </a:solidFill>
@@ -8332,7 +8466,7 @@
         </p:nvSpPr>
         <p:spPr>
           <a:xfrm>
-            <a:off x="502920" y="2587752"/>
+            <a:off x="756458" y="2459736"/>
             <a:ext cx="566928" cy="566928"/>
           </a:xfrm>
           <a:prstGeom prst="ellipse">
@@ -8361,12 +8495,12 @@
           </a:fontRef>
         </p:style>
         <p:txBody>
-          <a:bodyPr rtlCol="0" anchor="ctr" wrap="none"/>
+          <a:bodyPr wrap="none" rtlCol="0" anchor="ctr"/>
           <a:lstStyle/>
           <a:p>
             <a:pPr algn="ctr"/>
             <a:r>
-              <a:rPr sz="2000" b="1" i="0">
+              <a:rPr sz="2000" b="1" i="0" dirty="0">
                 <a:solidFill>
                   <a:srgbClr val="FFFFFF"/>
                 </a:solidFill>
@@ -8394,7 +8528,7 @@
           <a:noFill/>
         </p:spPr>
         <p:txBody>
-          <a:bodyPr wrap="square" lIns="0" rIns="0" tIns="0" bIns="0">
+          <a:bodyPr wrap="square" lIns="0" tIns="0" rIns="0" bIns="0">
             <a:spAutoFit/>
           </a:bodyPr>
           <a:lstStyle/>
@@ -8411,7 +8545,7 @@
               </a:spcAft>
             </a:pPr>
             <a:r>
-              <a:rPr sz="1700" b="1" i="0">
+              <a:rPr sz="1700" b="1" i="0" dirty="0">
                 <a:solidFill>
                   <a:srgbClr val="143B5C"/>
                 </a:solidFill>
@@ -8433,7 +8567,7 @@
               </a:spcAft>
             </a:pPr>
             <a:r>
-              <a:rPr sz="1150" b="0" i="0">
+              <a:rPr sz="1150" b="0" i="0" dirty="0">
                 <a:solidFill>
                   <a:srgbClr val="6B6B6B"/>
                 </a:solidFill>
@@ -8452,7 +8586,7 @@
         </p:nvSpPr>
         <p:spPr>
           <a:xfrm>
-            <a:off x="502920" y="3758184"/>
+            <a:off x="756458" y="3685032"/>
             <a:ext cx="566928" cy="566928"/>
           </a:xfrm>
           <a:prstGeom prst="ellipse">
@@ -8481,12 +8615,12 @@
           </a:fontRef>
         </p:style>
         <p:txBody>
-          <a:bodyPr rtlCol="0" anchor="ctr" wrap="none"/>
+          <a:bodyPr wrap="none" rtlCol="0" anchor="ctr"/>
           <a:lstStyle/>
           <a:p>
             <a:pPr algn="ctr"/>
             <a:r>
-              <a:rPr sz="2000" b="1" i="0">
+              <a:rPr sz="2000" b="1" i="0" dirty="0">
                 <a:solidFill>
                   <a:srgbClr val="FFFFFF"/>
                 </a:solidFill>
@@ -8514,7 +8648,7 @@
           <a:noFill/>
         </p:spPr>
         <p:txBody>
-          <a:bodyPr wrap="square" lIns="0" rIns="0" tIns="0" bIns="0">
+          <a:bodyPr wrap="square" lIns="0" tIns="0" rIns="0" bIns="0">
             <a:spAutoFit/>
           </a:bodyPr>
           <a:lstStyle/>
@@ -8531,7 +8665,7 @@
               </a:spcAft>
             </a:pPr>
             <a:r>
-              <a:rPr sz="1700" b="1" i="0">
+              <a:rPr sz="1700" b="1" i="0" dirty="0">
                 <a:solidFill>
                   <a:srgbClr val="143B5C"/>
                 </a:solidFill>
@@ -8553,7 +8687,7 @@
               </a:spcAft>
             </a:pPr>
             <a:r>
-              <a:rPr sz="1150" b="0" i="0">
+              <a:rPr sz="1150" b="0" i="0" dirty="0">
                 <a:solidFill>
                   <a:srgbClr val="6B6B6B"/>
                 </a:solidFill>
@@ -8572,7 +8706,7 @@
         </p:nvSpPr>
         <p:spPr>
           <a:xfrm>
-            <a:off x="502920" y="4928616"/>
+            <a:off x="756458" y="4892040"/>
             <a:ext cx="566928" cy="566928"/>
           </a:xfrm>
           <a:prstGeom prst="ellipse">
@@ -8601,7 +8735,7 @@
           </a:fontRef>
         </p:style>
         <p:txBody>
-          <a:bodyPr rtlCol="0" anchor="ctr" wrap="none"/>
+          <a:bodyPr wrap="none" rtlCol="0" anchor="ctr"/>
           <a:lstStyle/>
           <a:p>
             <a:pPr algn="ctr"/>
@@ -8625,7 +8759,7 @@
         </p:nvSpPr>
         <p:spPr>
           <a:xfrm>
-            <a:off x="1371600" y="4892040"/>
+            <a:off x="1371600" y="4975999"/>
             <a:ext cx="10241280" cy="868680"/>
           </a:xfrm>
           <a:prstGeom prst="rect">
@@ -8634,7 +8768,7 @@
           <a:noFill/>
         </p:spPr>
         <p:txBody>
-          <a:bodyPr wrap="square" lIns="0" rIns="0" tIns="0" bIns="0">
+          <a:bodyPr wrap="square" lIns="0" tIns="0" rIns="0" bIns="0">
             <a:spAutoFit/>
           </a:bodyPr>
           <a:lstStyle/>
@@ -8651,7 +8785,7 @@
               </a:spcAft>
             </a:pPr>
             <a:r>
-              <a:rPr sz="1700" b="1" i="0">
+              <a:rPr sz="1700" b="1" i="0" dirty="0">
                 <a:solidFill>
                   <a:srgbClr val="143B5C"/>
                 </a:solidFill>
@@ -8673,7 +8807,7 @@
               </a:spcAft>
             </a:pPr>
             <a:r>
-              <a:rPr sz="1150" b="0" i="0">
+              <a:rPr sz="1150" b="0" i="0" dirty="0">
                 <a:solidFill>
                   <a:srgbClr val="6B6B6B"/>
                 </a:solidFill>
@@ -8725,6 +8859,7 @@
           <a:lstStyle/>
           <a:p>
             <a:pPr algn="ctr"/>
+            <a:endParaRPr/>
           </a:p>
         </p:txBody>
       </p:sp>
@@ -8736,7 +8871,7 @@
         </p:nvSpPr>
         <p:spPr>
           <a:xfrm>
-            <a:off x="411480" y="6556248"/>
+            <a:off x="910244" y="6555140"/>
             <a:ext cx="8686800" cy="274320"/>
           </a:xfrm>
           <a:prstGeom prst="rect">
@@ -8745,7 +8880,7 @@
           <a:noFill/>
         </p:spPr>
         <p:txBody>
-          <a:bodyPr wrap="square" lIns="0" rIns="0" tIns="0" bIns="0">
+          <a:bodyPr wrap="square" lIns="0" tIns="0" rIns="0" bIns="0">
             <a:spAutoFit/>
           </a:bodyPr>
           <a:lstStyle/>
@@ -8762,7 +8897,7 @@
               </a:spcAft>
             </a:pPr>
             <a:r>
-              <a:rPr sz="800" b="0" i="0">
+              <a:rPr sz="800" b="0" i="0" dirty="0">
                 <a:solidFill>
                   <a:srgbClr val="6B6B6B"/>
                 </a:solidFill>
@@ -8790,7 +8925,7 @@
           <a:noFill/>
         </p:spPr>
         <p:txBody>
-          <a:bodyPr wrap="square" lIns="0" rIns="0" tIns="0" bIns="0">
+          <a:bodyPr wrap="square" lIns="0" tIns="0" rIns="0" bIns="0">
             <a:spAutoFit/>
           </a:bodyPr>
           <a:lstStyle/>
@@ -8863,14 +8998,14 @@
           <p:nvPr/>
         </p:nvPicPr>
         <p:blipFill>
-          <a:blip r:embed="rId2"/>
+          <a:blip r:embed="rId3"/>
           <a:stretch>
             <a:fillRect/>
           </a:stretch>
         </p:blipFill>
         <p:spPr>
           <a:xfrm>
-            <a:off x="5989320" y="1024128"/>
+            <a:off x="6096000" y="1010412"/>
             <a:ext cx="5779008" cy="3924986"/>
           </a:xfrm>
           <a:prstGeom prst="rect">
@@ -8893,14 +9028,14 @@
           <p:nvPr/>
         </p:nvPicPr>
         <p:blipFill>
-          <a:blip r:embed="rId3"/>
+          <a:blip r:embed="rId4"/>
           <a:stretch>
             <a:fillRect/>
           </a:stretch>
         </p:blipFill>
         <p:spPr>
           <a:xfrm>
-            <a:off x="457200" y="5248656"/>
+            <a:off x="1046988" y="5191984"/>
             <a:ext cx="4617720" cy="573474"/>
           </a:xfrm>
           <a:prstGeom prst="rect">
@@ -8923,7 +9058,7 @@
           <p:nvPr/>
         </p:nvPicPr>
         <p:blipFill>
-          <a:blip r:embed="rId4"/>
+          <a:blip r:embed="rId5"/>
           <a:stretch>
             <a:fillRect/>
           </a:stretch>
@@ -8955,7 +9090,7 @@
           <a:noFill/>
         </p:spPr>
         <p:txBody>
-          <a:bodyPr wrap="square" lIns="0" rIns="0" tIns="0" bIns="0">
+          <a:bodyPr wrap="square" lIns="0" tIns="0" rIns="0" bIns="0">
             <a:spAutoFit/>
           </a:bodyPr>
           <a:lstStyle/>
@@ -9046,6 +9181,7 @@
           <a:lstStyle/>
           <a:p>
             <a:pPr algn="ctr"/>
+            <a:endParaRPr/>
           </a:p>
         </p:txBody>
       </p:sp>
@@ -9057,7 +9193,7 @@
         </p:nvSpPr>
         <p:spPr>
           <a:xfrm>
-            <a:off x="411480" y="1024128"/>
+            <a:off x="868680" y="1077184"/>
             <a:ext cx="5440680" cy="4114800"/>
           </a:xfrm>
           <a:prstGeom prst="rect">
@@ -9066,7 +9202,7 @@
           <a:noFill/>
         </p:spPr>
         <p:txBody>
-          <a:bodyPr wrap="square" lIns="0" rIns="0" tIns="0" bIns="0">
+          <a:bodyPr wrap="square" lIns="0" tIns="0" rIns="0" bIns="0">
             <a:spAutoFit/>
           </a:bodyPr>
           <a:lstStyle/>
@@ -9080,7 +9216,7 @@
               </a:spcAft>
             </a:pPr>
             <a:r>
-              <a:rPr sz="1150" b="1" i="0">
+              <a:rPr sz="1150" b="1" i="0" dirty="0">
                 <a:solidFill>
                   <a:srgbClr val="00A4E4"/>
                 </a:solidFill>
@@ -9089,13 +9225,49 @@
               <a:t>•  </a:t>
             </a:r>
             <a:r>
-              <a:rPr sz="1150" b="0" i="0">
+              <a:rPr sz="1150" b="0" i="0" dirty="0">
                 <a:solidFill>
                   <a:srgbClr val="2B2B2B"/>
                 </a:solidFill>
                 <a:latin typeface="Calibri"/>
               </a:rPr>
-              <a:t>DEM tracks every scrap fragment individually via Newton's laws (Lagrangian); each contact carries a normal force Fn and a tangential force Ft (spring–damper contact model)</a:t>
+              <a:t>DEM tracks every scrap fragment individually via Newton's laws (</a:t>
+            </a:r>
+            <a:r>
+              <a:rPr sz="1150" b="0" i="0" dirty="0" err="1">
+                <a:solidFill>
+                  <a:srgbClr val="2B2B2B"/>
+                </a:solidFill>
+                <a:latin typeface="Calibri"/>
+              </a:rPr>
+              <a:t>Lagrangian</a:t>
+            </a:r>
+            <a:r>
+              <a:rPr sz="1150" b="0" i="0" dirty="0">
+                <a:solidFill>
+                  <a:srgbClr val="2B2B2B"/>
+                </a:solidFill>
+                <a:latin typeface="Calibri"/>
+              </a:rPr>
+              <a:t>); each contact carries a normal force </a:t>
+            </a:r>
+            <a:r>
+              <a:rPr sz="1150" b="0" i="0" dirty="0" err="1">
+                <a:solidFill>
+                  <a:srgbClr val="2B2B2B"/>
+                </a:solidFill>
+                <a:latin typeface="Calibri"/>
+              </a:rPr>
+              <a:t>Fn</a:t>
+            </a:r>
+            <a:r>
+              <a:rPr sz="1150" b="0" i="0" dirty="0">
+                <a:solidFill>
+                  <a:srgbClr val="2B2B2B"/>
+                </a:solidFill>
+                <a:latin typeface="Calibri"/>
+              </a:rPr>
+              <a:t> and a tangential force Ft (spring–damper contact model)</a:t>
             </a:r>
           </a:p>
           <a:p>
@@ -9108,7 +9280,7 @@
               </a:spcAft>
             </a:pPr>
             <a:r>
-              <a:rPr sz="1150" b="1" i="0">
+              <a:rPr sz="1150" b="1" i="0" dirty="0">
                 <a:solidFill>
                   <a:srgbClr val="00A4E4"/>
                 </a:solidFill>
@@ -9117,7 +9289,7 @@
               <a:t>•  </a:t>
             </a:r>
             <a:r>
-              <a:rPr sz="1150" b="0" i="0">
+              <a:rPr sz="1150" b="0" i="0" dirty="0">
                 <a:solidFill>
                   <a:srgbClr val="2B2B2B"/>
                 </a:solidFill>
@@ -9136,7 +9308,7 @@
               </a:spcAft>
             </a:pPr>
             <a:r>
-              <a:rPr sz="1150" b="1" i="0">
+              <a:rPr sz="1150" b="1" i="0" dirty="0">
                 <a:solidFill>
                   <a:srgbClr val="00A4E4"/>
                 </a:solidFill>
@@ -9145,7 +9317,7 @@
               <a:t>•  </a:t>
             </a:r>
             <a:r>
-              <a:rPr sz="1150" b="1" i="0">
+              <a:rPr sz="1150" b="1" i="0" dirty="0">
                 <a:solidFill>
                   <a:srgbClr val="2B2B2B"/>
                 </a:solidFill>
@@ -9164,7 +9336,7 @@
               </a:spcAft>
             </a:pPr>
             <a:r>
-              <a:rPr sz="1150" b="1" i="0">
+              <a:rPr sz="1150" b="1" i="0" dirty="0">
                 <a:solidFill>
                   <a:srgbClr val="00A4E4"/>
                 </a:solidFill>
@@ -9173,7 +9345,7 @@
               <a:t>–  </a:t>
             </a:r>
             <a:r>
-              <a:rPr sz="1150" b="0" i="0">
+              <a:rPr sz="1150" b="0" i="0" dirty="0">
                 <a:solidFill>
                   <a:srgbClr val="2B2B2B"/>
                 </a:solidFill>
@@ -9192,7 +9364,7 @@
               </a:spcAft>
             </a:pPr>
             <a:r>
-              <a:rPr sz="1150" b="1" i="0">
+              <a:rPr sz="1150" b="1" i="0" dirty="0">
                 <a:solidFill>
                   <a:srgbClr val="00A4E4"/>
                 </a:solidFill>
@@ -9201,13 +9373,22 @@
               <a:t>–  </a:t>
             </a:r>
             <a:r>
-              <a:rPr sz="1150" b="0" i="0">
+              <a:rPr sz="1150" b="0" i="0" dirty="0" err="1">
                 <a:solidFill>
                   <a:srgbClr val="2B2B2B"/>
                 </a:solidFill>
                 <a:latin typeface="Calibri"/>
               </a:rPr>
-              <a:t>Polyhedra — angular rock/scrap; common-plane contact; many contact cases to classify</a:t>
+              <a:t>Polyhedra</a:t>
+            </a:r>
+            <a:r>
+              <a:rPr sz="1150" b="0" i="0" dirty="0">
+                <a:solidFill>
+                  <a:srgbClr val="2B2B2B"/>
+                </a:solidFill>
+                <a:latin typeface="Calibri"/>
+              </a:rPr>
+              <a:t> — angular rock/scrap; common-plane contact; many contact cases to classify</a:t>
             </a:r>
           </a:p>
           <a:p>
@@ -9220,7 +9401,7 @@
               </a:spcAft>
             </a:pPr>
             <a:r>
-              <a:rPr sz="1150" b="1" i="0">
+              <a:rPr sz="1150" b="1" i="0" dirty="0">
                 <a:solidFill>
                   <a:srgbClr val="00A4E4"/>
                 </a:solidFill>
@@ -9229,13 +9410,67 @@
               <a:t>–  </a:t>
             </a:r>
             <a:r>
-              <a:rPr sz="1150" b="0" i="0">
+              <a:rPr sz="1150" b="0" i="0" dirty="0">
                 <a:solidFill>
                   <a:srgbClr val="2B2B2B"/>
                 </a:solidFill>
                 <a:latin typeface="Calibri"/>
               </a:rPr>
-              <a:t>Super-quadrics — smooth, regular shapes; ε₁, ε₂ vary roundness → blockiness continuously</a:t>
+              <a:t>Super-quadrics — smooth, regular shapes; </a:t>
+            </a:r>
+            <a:r>
+              <a:rPr sz="1150" b="0" i="0" dirty="0" err="1">
+                <a:solidFill>
+                  <a:srgbClr val="2B2B2B"/>
+                </a:solidFill>
+                <a:latin typeface="Calibri"/>
+              </a:rPr>
+              <a:t>ε</a:t>
+            </a:r>
+            <a:r>
+              <a:rPr sz="1150" b="0" i="0" dirty="0">
+                <a:solidFill>
+                  <a:srgbClr val="2B2B2B"/>
+                </a:solidFill>
+                <a:latin typeface="Calibri"/>
+              </a:rPr>
+              <a:t>₁, </a:t>
+            </a:r>
+            <a:r>
+              <a:rPr sz="1150" b="0" i="0" dirty="0" err="1">
+                <a:solidFill>
+                  <a:srgbClr val="2B2B2B"/>
+                </a:solidFill>
+                <a:latin typeface="Calibri"/>
+              </a:rPr>
+              <a:t>ε</a:t>
+            </a:r>
+            <a:r>
+              <a:rPr sz="1150" b="0" i="0" dirty="0">
+                <a:solidFill>
+                  <a:srgbClr val="2B2B2B"/>
+                </a:solidFill>
+                <a:latin typeface="Calibri"/>
+              </a:rPr>
+              <a:t>₂ vary roundness → </a:t>
+            </a:r>
+            <a:r>
+              <a:rPr sz="1150" b="0" i="0" dirty="0" err="1">
+                <a:solidFill>
+                  <a:srgbClr val="2B2B2B"/>
+                </a:solidFill>
+                <a:latin typeface="Calibri"/>
+              </a:rPr>
+              <a:t>blockiness</a:t>
+            </a:r>
+            <a:r>
+              <a:rPr sz="1150" b="0" i="0" dirty="0">
+                <a:solidFill>
+                  <a:srgbClr val="2B2B2B"/>
+                </a:solidFill>
+                <a:latin typeface="Calibri"/>
+              </a:rPr>
+              <a:t> continuously</a:t>
             </a:r>
           </a:p>
           <a:p>
@@ -9248,7 +9483,7 @@
               </a:spcAft>
             </a:pPr>
             <a:r>
-              <a:rPr sz="1150" b="1" i="0">
+              <a:rPr sz="1150" b="1" i="0" dirty="0">
                 <a:solidFill>
                   <a:srgbClr val="00A4E4"/>
                 </a:solidFill>
@@ -9257,13 +9492,31 @@
               <a:t>–  </a:t>
             </a:r>
             <a:r>
-              <a:rPr sz="1150" b="0" i="0">
+              <a:rPr sz="1150" b="0" i="0" dirty="0">
                 <a:solidFill>
                   <a:srgbClr val="2B2B2B"/>
                 </a:solidFill>
                 <a:latin typeface="Calibri"/>
               </a:rPr>
-              <a:t>Voxel / digitised — arbitrary 3D-scanned shapes; grid-resolution limited</a:t>
+              <a:t>Voxel / </a:t>
+            </a:r>
+            <a:r>
+              <a:rPr sz="1150" b="0" i="0" dirty="0" err="1">
+                <a:solidFill>
+                  <a:srgbClr val="2B2B2B"/>
+                </a:solidFill>
+                <a:latin typeface="Calibri"/>
+              </a:rPr>
+              <a:t>digitised</a:t>
+            </a:r>
+            <a:r>
+              <a:rPr sz="1150" b="0" i="0" dirty="0">
+                <a:solidFill>
+                  <a:srgbClr val="2B2B2B"/>
+                </a:solidFill>
+                <a:latin typeface="Calibri"/>
+              </a:rPr>
+              <a:t> — arbitrary 3D-scanned shapes; grid-resolution limited</a:t>
             </a:r>
           </a:p>
           <a:p>
@@ -9276,7 +9529,7 @@
               </a:spcAft>
             </a:pPr>
             <a:r>
-              <a:rPr sz="1150" b="1" i="0">
+              <a:rPr sz="1150" b="1" i="0" dirty="0">
                 <a:solidFill>
                   <a:srgbClr val="00A4E4"/>
                 </a:solidFill>
@@ -9285,7 +9538,7 @@
               <a:t>–  </a:t>
             </a:r>
             <a:r>
-              <a:rPr sz="1150" b="0" i="0">
+              <a:rPr sz="1150" b="0" i="0" dirty="0">
                 <a:solidFill>
                   <a:srgbClr val="2B2B2B"/>
                 </a:solidFill>
@@ -9304,7 +9557,7 @@
               </a:spcAft>
             </a:pPr>
             <a:r>
-              <a:rPr sz="1150" b="1" i="0">
+              <a:rPr sz="1150" b="1" i="0" dirty="0">
                 <a:solidFill>
                   <a:srgbClr val="00A4E4"/>
                 </a:solidFill>
@@ -9313,7 +9566,7 @@
               <a:t>•  </a:t>
             </a:r>
             <a:r>
-              <a:rPr sz="1150" b="1" i="0">
+              <a:rPr sz="1150" b="1" i="0" dirty="0">
                 <a:solidFill>
                   <a:srgbClr val="2B2B2B"/>
                 </a:solidFill>
@@ -9332,7 +9585,7 @@
         </p:nvSpPr>
         <p:spPr>
           <a:xfrm>
-            <a:off x="457200" y="5870448"/>
+            <a:off x="1011410" y="5961888"/>
             <a:ext cx="5440680" cy="548640"/>
           </a:xfrm>
           <a:prstGeom prst="rect">
@@ -9341,7 +9594,7 @@
           <a:noFill/>
         </p:spPr>
         <p:txBody>
-          <a:bodyPr wrap="square" lIns="0" rIns="0" tIns="0" bIns="0">
+          <a:bodyPr wrap="square" lIns="0" tIns="0" rIns="0" bIns="0">
             <a:spAutoFit/>
           </a:bodyPr>
           <a:lstStyle/>
@@ -9358,13 +9611,49 @@
               </a:spcAft>
             </a:pPr>
             <a:r>
-              <a:rPr sz="800" b="0" i="0">
+              <a:rPr sz="800" b="0" i="0" dirty="0">
                 <a:solidFill>
                   <a:srgbClr val="6B6B6B"/>
                 </a:solidFill>
                 <a:latin typeface="Calibri"/>
               </a:rPr>
-              <a:t>Eq. (16) — 3D super-quadric implicit function; ε₁ = ε₂ = 1 gives an ellipsoid (Lu et al., 2015)</a:t>
+              <a:t>Eq. (16) — 3D super-quadric implicit function; </a:t>
+            </a:r>
+            <a:r>
+              <a:rPr sz="800" b="0" i="0" dirty="0" err="1">
+                <a:solidFill>
+                  <a:srgbClr val="6B6B6B"/>
+                </a:solidFill>
+                <a:latin typeface="Calibri"/>
+              </a:rPr>
+              <a:t>ε</a:t>
+            </a:r>
+            <a:r>
+              <a:rPr sz="800" b="0" i="0" dirty="0">
+                <a:solidFill>
+                  <a:srgbClr val="6B6B6B"/>
+                </a:solidFill>
+                <a:latin typeface="Calibri"/>
+              </a:rPr>
+              <a:t>₁ = </a:t>
+            </a:r>
+            <a:r>
+              <a:rPr sz="800" b="0" i="0" dirty="0" err="1">
+                <a:solidFill>
+                  <a:srgbClr val="6B6B6B"/>
+                </a:solidFill>
+                <a:latin typeface="Calibri"/>
+              </a:rPr>
+              <a:t>ε</a:t>
+            </a:r>
+            <a:r>
+              <a:rPr sz="800" b="0" i="0" dirty="0">
+                <a:solidFill>
+                  <a:srgbClr val="6B6B6B"/>
+                </a:solidFill>
+                <a:latin typeface="Calibri"/>
+              </a:rPr>
+              <a:t>₂ = 1 gives an ellipsoid (Lu et al., 2015)</a:t>
             </a:r>
           </a:p>
         </p:txBody>
@@ -9377,7 +9666,7 @@
         </p:nvSpPr>
         <p:spPr>
           <a:xfrm>
-            <a:off x="5989320" y="4983480"/>
+            <a:off x="6431280" y="4954240"/>
             <a:ext cx="5760720" cy="237744"/>
           </a:xfrm>
           <a:prstGeom prst="rect">
@@ -9386,7 +9675,7 @@
           <a:noFill/>
         </p:spPr>
         <p:txBody>
-          <a:bodyPr wrap="square" lIns="0" rIns="0" tIns="0" bIns="0">
+          <a:bodyPr wrap="square" lIns="0" tIns="0" rIns="0" bIns="0">
             <a:spAutoFit/>
           </a:bodyPr>
           <a:lstStyle/>
@@ -9403,13 +9692,85 @@
               </a:spcAft>
             </a:pPr>
             <a:r>
-              <a:rPr sz="800" b="0" i="0">
+              <a:rPr sz="800" b="0" i="0" dirty="0">
                 <a:solidFill>
                   <a:srgbClr val="6B6B6B"/>
                 </a:solidFill>
                 <a:latin typeface="Calibri"/>
               </a:rPr>
-              <a:t>Fig. 6 — 3D super-quadric family: ε₁ (left→right), ε₂ (top→bottom) (Lu et al., 2015)</a:t>
+              <a:t>Fig. 6 — 3D super-quadric family: </a:t>
+            </a:r>
+            <a:r>
+              <a:rPr sz="800" b="0" i="0" dirty="0" err="1">
+                <a:solidFill>
+                  <a:srgbClr val="6B6B6B"/>
+                </a:solidFill>
+                <a:latin typeface="Calibri"/>
+              </a:rPr>
+              <a:t>ε</a:t>
+            </a:r>
+            <a:r>
+              <a:rPr sz="800" b="0" i="0" dirty="0">
+                <a:solidFill>
+                  <a:srgbClr val="6B6B6B"/>
+                </a:solidFill>
+                <a:latin typeface="Calibri"/>
+              </a:rPr>
+              <a:t>₁ (</a:t>
+            </a:r>
+            <a:r>
+              <a:rPr sz="800" b="0" i="0" dirty="0" err="1">
+                <a:solidFill>
+                  <a:srgbClr val="6B6B6B"/>
+                </a:solidFill>
+                <a:latin typeface="Calibri"/>
+              </a:rPr>
+              <a:t>left→right</a:t>
+            </a:r>
+            <a:r>
+              <a:rPr sz="800" b="0" i="0" dirty="0">
+                <a:solidFill>
+                  <a:srgbClr val="6B6B6B"/>
+                </a:solidFill>
+                <a:latin typeface="Calibri"/>
+              </a:rPr>
+              <a:t>), </a:t>
+            </a:r>
+            <a:r>
+              <a:rPr sz="800" b="0" i="0" dirty="0" err="1">
+                <a:solidFill>
+                  <a:srgbClr val="6B6B6B"/>
+                </a:solidFill>
+                <a:latin typeface="Calibri"/>
+              </a:rPr>
+              <a:t>ε</a:t>
+            </a:r>
+            <a:r>
+              <a:rPr sz="800" b="0" i="0" dirty="0">
+                <a:solidFill>
+                  <a:srgbClr val="6B6B6B"/>
+                </a:solidFill>
+                <a:latin typeface="Calibri"/>
+              </a:rPr>
+              <a:t>₂ (</a:t>
+            </a:r>
+            <a:r>
+              <a:rPr sz="800" b="0" i="0" dirty="0" err="1">
+                <a:solidFill>
+                  <a:srgbClr val="6B6B6B"/>
+                </a:solidFill>
+                <a:latin typeface="Calibri"/>
+              </a:rPr>
+              <a:t>top→bottom</a:t>
+            </a:r>
+            <a:r>
+              <a:rPr sz="800" b="0" i="0" dirty="0">
+                <a:solidFill>
+                  <a:srgbClr val="6B6B6B"/>
+                </a:solidFill>
+                <a:latin typeface="Calibri"/>
+              </a:rPr>
+              <a:t>) (Lu et al., 2015)</a:t>
             </a:r>
           </a:p>
         </p:txBody>
@@ -9431,7 +9792,7 @@
           <a:noFill/>
         </p:spPr>
         <p:txBody>
-          <a:bodyPr wrap="square" lIns="0" rIns="0" tIns="0" bIns="0">
+          <a:bodyPr wrap="square" lIns="0" tIns="0" rIns="0" bIns="0">
             <a:spAutoFit/>
           </a:bodyPr>
           <a:lstStyle/>
@@ -9473,7 +9834,7 @@
 </file>
 
 <file path=ppt/slides/slide4.xml><?xml version="1.0" encoding="utf-8"?>
-<p:sld xmlns:a="http://schemas.openxmlformats.org/drawingml/2006/main" xmlns:p="http://schemas.openxmlformats.org/presentationml/2006/main" xmlns:r="http://schemas.openxmlformats.org/officeDocument/2006/relationships">
+<p:sld xmlns:a="http://schemas.openxmlformats.org/drawingml/2006/main" xmlns:r="http://schemas.openxmlformats.org/officeDocument/2006/relationships" xmlns:p="http://schemas.openxmlformats.org/presentationml/2006/main">
   <p:cSld>
     <p:spTree>
       <p:nvGrpSpPr>
@@ -9481,7 +9842,14 @@
         <p:cNvGrpSpPr/>
         <p:nvPr/>
       </p:nvGrpSpPr>
-      <p:grpSpPr/>
+      <p:grpSpPr>
+        <a:xfrm>
+          <a:off x="0" y="0"/>
+          <a:ext cx="0" cy="0"/>
+          <a:chOff x="0" y="0"/>
+          <a:chExt cx="0" cy="0"/>
+        </a:xfrm>
+      </p:grpSpPr>
       <p:sp>
         <p:nvSpPr>
           <p:cNvPr id="2" name="TextBox 1"/>
@@ -9499,7 +9867,7 @@
           <a:noFill/>
         </p:spPr>
         <p:txBody>
-          <a:bodyPr wrap="square" lIns="0" rIns="0" tIns="0" bIns="0">
+          <a:bodyPr wrap="square" lIns="0" tIns="0" rIns="0" bIns="0">
             <a:spAutoFit/>
           </a:bodyPr>
           <a:lstStyle/>
@@ -9590,6 +9958,7 @@
           <a:lstStyle/>
           <a:p>
             <a:pPr algn="ctr"/>
+            <a:endParaRPr/>
           </a:p>
         </p:txBody>
       </p:sp>
@@ -9634,6 +10003,7 @@
           <a:lstStyle/>
           <a:p>
             <a:pPr algn="ctr"/>
+            <a:endParaRPr/>
           </a:p>
         </p:txBody>
       </p:sp>
@@ -9654,7 +10024,7 @@
           <a:noFill/>
         </p:spPr>
         <p:txBody>
-          <a:bodyPr wrap="square" lIns="0" rIns="0" tIns="0" bIns="0">
+          <a:bodyPr wrap="square" lIns="0" tIns="0" rIns="0" bIns="0">
             <a:spAutoFit/>
           </a:bodyPr>
           <a:lstStyle/>
@@ -9699,7 +10069,7 @@
           <a:noFill/>
         </p:spPr>
         <p:txBody>
-          <a:bodyPr wrap="square" lIns="0" rIns="0" tIns="0" bIns="0">
+          <a:bodyPr wrap="square" lIns="0" tIns="0" rIns="0" bIns="0">
             <a:spAutoFit/>
           </a:bodyPr>
           <a:lstStyle/>
@@ -9768,7 +10138,7 @@
           </a:fontRef>
         </p:style>
         <p:txBody>
-          <a:bodyPr rtlCol="0" anchor="ctr" wrap="square" lIns="82296" rIns="82296" tIns="54864" bIns="54864"/>
+          <a:bodyPr wrap="square" lIns="82296" tIns="54864" rIns="82296" bIns="54864" rtlCol="0" anchor="ctr"/>
           <a:lstStyle/>
           <a:p>
             <a:pPr algn="ctr"/>
@@ -9841,6 +10211,7 @@
           <a:lstStyle/>
           <a:p>
             <a:pPr algn="ctr"/>
+            <a:endParaRPr/>
           </a:p>
         </p:txBody>
       </p:sp>
@@ -9885,7 +10256,7 @@
           </a:fontRef>
         </p:style>
         <p:txBody>
-          <a:bodyPr rtlCol="0" anchor="ctr" wrap="square" lIns="82296" rIns="82296" tIns="54864" bIns="54864"/>
+          <a:bodyPr wrap="square" lIns="82296" tIns="54864" rIns="82296" bIns="54864" rtlCol="0" anchor="ctr"/>
           <a:lstStyle/>
           <a:p>
             <a:pPr algn="ctr"/>
@@ -9958,6 +10329,7 @@
           <a:lstStyle/>
           <a:p>
             <a:pPr algn="ctr"/>
+            <a:endParaRPr/>
           </a:p>
         </p:txBody>
       </p:sp>
@@ -10002,7 +10374,7 @@
           </a:fontRef>
         </p:style>
         <p:txBody>
-          <a:bodyPr rtlCol="0" anchor="ctr" wrap="square" lIns="82296" rIns="82296" tIns="54864" bIns="54864"/>
+          <a:bodyPr wrap="square" lIns="82296" tIns="54864" rIns="82296" bIns="54864" rtlCol="0" anchor="ctr"/>
           <a:lstStyle/>
           <a:p>
             <a:pPr algn="ctr"/>
@@ -10075,6 +10447,7 @@
           <a:lstStyle/>
           <a:p>
             <a:pPr algn="ctr"/>
+            <a:endParaRPr/>
           </a:p>
         </p:txBody>
       </p:sp>
@@ -10119,7 +10492,7 @@
           </a:fontRef>
         </p:style>
         <p:txBody>
-          <a:bodyPr rtlCol="0" anchor="ctr" wrap="square" lIns="82296" rIns="82296" tIns="54864" bIns="54864"/>
+          <a:bodyPr wrap="square" lIns="82296" tIns="54864" rIns="82296" bIns="54864" rtlCol="0" anchor="ctr"/>
           <a:lstStyle/>
           <a:p>
             <a:pPr algn="ctr"/>
@@ -10196,6 +10569,7 @@
           <a:lstStyle/>
           <a:p>
             <a:pPr algn="ctr"/>
+            <a:endParaRPr/>
           </a:p>
         </p:txBody>
       </p:sp>
@@ -10216,7 +10590,7 @@
           <a:noFill/>
         </p:spPr>
         <p:txBody>
-          <a:bodyPr wrap="square" lIns="0" rIns="0" tIns="0" bIns="0">
+          <a:bodyPr wrap="square" lIns="0" tIns="0" rIns="0" bIns="0">
             <a:spAutoFit/>
           </a:bodyPr>
           <a:lstStyle/>
@@ -10395,6 +10769,7 @@
           <a:lstStyle/>
           <a:p>
             <a:pPr algn="ctr"/>
+            <a:endParaRPr/>
           </a:p>
         </p:txBody>
       </p:sp>
@@ -10415,7 +10790,7 @@
           <a:noFill/>
         </p:spPr>
         <p:txBody>
-          <a:bodyPr wrap="square" lIns="0" rIns="0" tIns="0" bIns="0">
+          <a:bodyPr wrap="square" lIns="0" tIns="0" rIns="0" bIns="0">
             <a:spAutoFit/>
           </a:bodyPr>
           <a:lstStyle/>
@@ -10594,6 +10969,7 @@
           <a:lstStyle/>
           <a:p>
             <a:pPr algn="ctr"/>
+            <a:endParaRPr/>
           </a:p>
         </p:txBody>
       </p:sp>
@@ -10614,7 +10990,7 @@
           <a:noFill/>
         </p:spPr>
         <p:txBody>
-          <a:bodyPr wrap="square" lIns="0" rIns="0" tIns="0" bIns="0">
+          <a:bodyPr wrap="square" lIns="0" tIns="0" rIns="0" bIns="0">
             <a:spAutoFit/>
           </a:bodyPr>
           <a:lstStyle/>
@@ -10793,6 +11169,7 @@
           <a:lstStyle/>
           <a:p>
             <a:pPr algn="ctr"/>
+            <a:endParaRPr/>
           </a:p>
         </p:txBody>
       </p:sp>
@@ -10813,7 +11190,7 @@
           <a:noFill/>
         </p:spPr>
         <p:txBody>
-          <a:bodyPr wrap="square" lIns="0" rIns="0" tIns="0" bIns="0">
+          <a:bodyPr wrap="square" lIns="0" tIns="0" rIns="0" bIns="0">
             <a:spAutoFit/>
           </a:bodyPr>
           <a:lstStyle/>
@@ -10956,7 +11333,7 @@
 </file>
 
 <file path=ppt/slides/slide5.xml><?xml version="1.0" encoding="utf-8"?>
-<p:sld xmlns:a="http://schemas.openxmlformats.org/drawingml/2006/main" xmlns:p="http://schemas.openxmlformats.org/presentationml/2006/main" xmlns:r="http://schemas.openxmlformats.org/officeDocument/2006/relationships">
+<p:sld xmlns:a="http://schemas.openxmlformats.org/drawingml/2006/main" xmlns:r="http://schemas.openxmlformats.org/officeDocument/2006/relationships" xmlns:p="http://schemas.openxmlformats.org/presentationml/2006/main">
   <p:cSld>
     <p:spTree>
       <p:nvGrpSpPr>
@@ -10964,7 +11341,14 @@
         <p:cNvGrpSpPr/>
         <p:nvPr/>
       </p:nvGrpSpPr>
-      <p:grpSpPr/>
+      <p:grpSpPr>
+        <a:xfrm>
+          <a:off x="0" y="0"/>
+          <a:ext cx="0" cy="0"/>
+          <a:chOff x="0" y="0"/>
+          <a:chExt cx="0" cy="0"/>
+        </a:xfrm>
+      </p:grpSpPr>
       <p:sp>
         <p:nvSpPr>
           <p:cNvPr id="2" name="TextBox 1"/>
@@ -10982,7 +11366,7 @@
           <a:noFill/>
         </p:spPr>
         <p:txBody>
-          <a:bodyPr wrap="square" lIns="0" rIns="0" tIns="0" bIns="0">
+          <a:bodyPr wrap="square" lIns="0" tIns="0" rIns="0" bIns="0">
             <a:spAutoFit/>
           </a:bodyPr>
           <a:lstStyle/>
@@ -11073,6 +11457,7 @@
           <a:lstStyle/>
           <a:p>
             <a:pPr algn="ctr"/>
+            <a:endParaRPr/>
           </a:p>
         </p:txBody>
       </p:sp>
@@ -11117,6 +11502,7 @@
           <a:lstStyle/>
           <a:p>
             <a:pPr algn="ctr"/>
+            <a:endParaRPr/>
           </a:p>
         </p:txBody>
       </p:sp>
@@ -11137,7 +11523,7 @@
           <a:noFill/>
         </p:spPr>
         <p:txBody>
-          <a:bodyPr wrap="square" lIns="0" rIns="0" tIns="0" bIns="0">
+          <a:bodyPr wrap="square" lIns="0" tIns="0" rIns="0" bIns="0">
             <a:spAutoFit/>
           </a:bodyPr>
           <a:lstStyle/>
@@ -11182,7 +11568,7 @@
           <a:noFill/>
         </p:spPr>
         <p:txBody>
-          <a:bodyPr wrap="square" lIns="0" rIns="0" tIns="0" bIns="0">
+          <a:bodyPr wrap="square" lIns="0" tIns="0" rIns="0" bIns="0">
             <a:spAutoFit/>
           </a:bodyPr>
           <a:lstStyle/>
@@ -11229,15 +11615,39 @@
                 <a:tableStyleId>{5C22544A-7EE6-4342-B048-85BDC9FD1C3A}</a:tableStyleId>
               </a:tblPr>
               <a:tblGrid>
-                <a:gridCol w="3017520"/>
-                <a:gridCol w="3017520"/>
-                <a:gridCol w="2834640"/>
-                <a:gridCol w="2496312"/>
+                <a:gridCol w="3017520">
+                  <a:extLst>
+                    <a:ext uri="{9D8B030D-6E8A-4147-A177-3AD203B41FA5}">
+                      <a16:colId xmlns:a16="http://schemas.microsoft.com/office/drawing/2014/main" val="20000"/>
+                    </a:ext>
+                  </a:extLst>
+                </a:gridCol>
+                <a:gridCol w="3017520">
+                  <a:extLst>
+                    <a:ext uri="{9D8B030D-6E8A-4147-A177-3AD203B41FA5}">
+                      <a16:colId xmlns:a16="http://schemas.microsoft.com/office/drawing/2014/main" val="20001"/>
+                    </a:ext>
+                  </a:extLst>
+                </a:gridCol>
+                <a:gridCol w="2834640">
+                  <a:extLst>
+                    <a:ext uri="{9D8B030D-6E8A-4147-A177-3AD203B41FA5}">
+                      <a16:colId xmlns:a16="http://schemas.microsoft.com/office/drawing/2014/main" val="20002"/>
+                    </a:ext>
+                  </a:extLst>
+                </a:gridCol>
+                <a:gridCol w="2496312">
+                  <a:extLst>
+                    <a:ext uri="{9D8B030D-6E8A-4147-A177-3AD203B41FA5}">
+                      <a16:colId xmlns:a16="http://schemas.microsoft.com/office/drawing/2014/main" val="20003"/>
+                    </a:ext>
+                  </a:extLst>
+                </a:gridCol>
               </a:tblGrid>
               <a:tr h="292608">
                 <a:tc>
                   <a:txBody>
-                    <a:bodyPr wrap="square" lIns="64008" rIns="64008" tIns="27432" bIns="27432"/>
+                    <a:bodyPr/>
                     <a:lstStyle/>
                     <a:p>
                       <a:pPr algn="l">
@@ -11264,7 +11674,7 @@
                 </a:tc>
                 <a:tc>
                   <a:txBody>
-                    <a:bodyPr wrap="square" lIns="64008" rIns="64008" tIns="27432" bIns="27432"/>
+                    <a:bodyPr/>
                     <a:lstStyle/>
                     <a:p>
                       <a:pPr algn="l">
@@ -11291,7 +11701,7 @@
                 </a:tc>
                 <a:tc>
                   <a:txBody>
-                    <a:bodyPr wrap="square" lIns="64008" rIns="64008" tIns="27432" bIns="27432"/>
+                    <a:bodyPr/>
                     <a:lstStyle/>
                     <a:p>
                       <a:pPr algn="l">
@@ -11318,7 +11728,7 @@
                 </a:tc>
                 <a:tc>
                   <a:txBody>
-                    <a:bodyPr wrap="square" lIns="64008" rIns="64008" tIns="27432" bIns="27432"/>
+                    <a:bodyPr/>
                     <a:lstStyle/>
                     <a:p>
                       <a:pPr algn="l">
@@ -11343,11 +11753,16 @@
                     </a:solidFill>
                   </a:tcPr>
                 </a:tc>
+                <a:extLst>
+                  <a:ext uri="{0D108BD9-81ED-4DB2-BD59-A6C34878D82A}">
+                    <a16:rowId xmlns:a16="http://schemas.microsoft.com/office/drawing/2014/main" val="10000"/>
+                  </a:ext>
+                </a:extLst>
               </a:tr>
               <a:tr h="548640">
                 <a:tc>
                   <a:txBody>
-                    <a:bodyPr wrap="square" lIns="64008" rIns="64008" tIns="27432" bIns="27432"/>
+                    <a:bodyPr/>
                     <a:lstStyle/>
                     <a:p>
                       <a:pPr algn="l">
@@ -11374,7 +11789,7 @@
                 </a:tc>
                 <a:tc>
                   <a:txBody>
-                    <a:bodyPr wrap="square" lIns="64008" rIns="64008" tIns="27432" bIns="27432"/>
+                    <a:bodyPr/>
                     <a:lstStyle/>
                     <a:p>
                       <a:pPr algn="l">
@@ -11401,7 +11816,7 @@
                 </a:tc>
                 <a:tc>
                   <a:txBody>
-                    <a:bodyPr wrap="square" lIns="64008" rIns="64008" tIns="27432" bIns="27432"/>
+                    <a:bodyPr/>
                     <a:lstStyle/>
                     <a:p>
                       <a:pPr algn="l">
@@ -11428,7 +11843,7 @@
                 </a:tc>
                 <a:tc>
                   <a:txBody>
-                    <a:bodyPr wrap="square" lIns="64008" rIns="64008" tIns="27432" bIns="27432"/>
+                    <a:bodyPr/>
                     <a:lstStyle/>
                     <a:p>
                       <a:pPr algn="l">
@@ -11453,11 +11868,16 @@
                     </a:solidFill>
                   </a:tcPr>
                 </a:tc>
+                <a:extLst>
+                  <a:ext uri="{0D108BD9-81ED-4DB2-BD59-A6C34878D82A}">
+                    <a16:rowId xmlns:a16="http://schemas.microsoft.com/office/drawing/2014/main" val="10001"/>
+                  </a:ext>
+                </a:extLst>
               </a:tr>
               <a:tr h="548640">
                 <a:tc>
                   <a:txBody>
-                    <a:bodyPr wrap="square" lIns="64008" rIns="64008" tIns="27432" bIns="27432"/>
+                    <a:bodyPr/>
                     <a:lstStyle/>
                     <a:p>
                       <a:pPr algn="l">
@@ -11484,7 +11904,7 @@
                 </a:tc>
                 <a:tc>
                   <a:txBody>
-                    <a:bodyPr wrap="square" lIns="64008" rIns="64008" tIns="27432" bIns="27432"/>
+                    <a:bodyPr/>
                     <a:lstStyle/>
                     <a:p>
                       <a:pPr algn="l">
@@ -11511,7 +11931,7 @@
                 </a:tc>
                 <a:tc>
                   <a:txBody>
-                    <a:bodyPr wrap="square" lIns="64008" rIns="64008" tIns="27432" bIns="27432"/>
+                    <a:bodyPr/>
                     <a:lstStyle/>
                     <a:p>
                       <a:pPr algn="l">
@@ -11538,7 +11958,7 @@
                 </a:tc>
                 <a:tc>
                   <a:txBody>
-                    <a:bodyPr wrap="square" lIns="64008" rIns="64008" tIns="27432" bIns="27432"/>
+                    <a:bodyPr/>
                     <a:lstStyle/>
                     <a:p>
                       <a:pPr algn="l">
@@ -11563,11 +11983,16 @@
                     </a:solidFill>
                   </a:tcPr>
                 </a:tc>
+                <a:extLst>
+                  <a:ext uri="{0D108BD9-81ED-4DB2-BD59-A6C34878D82A}">
+                    <a16:rowId xmlns:a16="http://schemas.microsoft.com/office/drawing/2014/main" val="10002"/>
+                  </a:ext>
+                </a:extLst>
               </a:tr>
               <a:tr h="548640">
                 <a:tc>
                   <a:txBody>
-                    <a:bodyPr wrap="square" lIns="64008" rIns="64008" tIns="27432" bIns="27432"/>
+                    <a:bodyPr/>
                     <a:lstStyle/>
                     <a:p>
                       <a:pPr algn="l">
@@ -11594,7 +12019,7 @@
                 </a:tc>
                 <a:tc>
                   <a:txBody>
-                    <a:bodyPr wrap="square" lIns="64008" rIns="64008" tIns="27432" bIns="27432"/>
+                    <a:bodyPr/>
                     <a:lstStyle/>
                     <a:p>
                       <a:pPr algn="l">
@@ -11621,7 +12046,7 @@
                 </a:tc>
                 <a:tc>
                   <a:txBody>
-                    <a:bodyPr wrap="square" lIns="64008" rIns="64008" tIns="27432" bIns="27432"/>
+                    <a:bodyPr/>
                     <a:lstStyle/>
                     <a:p>
                       <a:pPr algn="l">
@@ -11648,7 +12073,7 @@
                 </a:tc>
                 <a:tc>
                   <a:txBody>
-                    <a:bodyPr wrap="square" lIns="64008" rIns="64008" tIns="27432" bIns="27432"/>
+                    <a:bodyPr/>
                     <a:lstStyle/>
                     <a:p>
                       <a:pPr algn="l">
@@ -11673,11 +12098,16 @@
                     </a:solidFill>
                   </a:tcPr>
                 </a:tc>
+                <a:extLst>
+                  <a:ext uri="{0D108BD9-81ED-4DB2-BD59-A6C34878D82A}">
+                    <a16:rowId xmlns:a16="http://schemas.microsoft.com/office/drawing/2014/main" val="10003"/>
+                  </a:ext>
+                </a:extLst>
               </a:tr>
               <a:tr h="548640">
                 <a:tc>
                   <a:txBody>
-                    <a:bodyPr wrap="square" lIns="64008" rIns="64008" tIns="27432" bIns="27432"/>
+                    <a:bodyPr/>
                     <a:lstStyle/>
                     <a:p>
                       <a:pPr algn="l">
@@ -11704,7 +12134,7 @@
                 </a:tc>
                 <a:tc>
                   <a:txBody>
-                    <a:bodyPr wrap="square" lIns="64008" rIns="64008" tIns="27432" bIns="27432"/>
+                    <a:bodyPr/>
                     <a:lstStyle/>
                     <a:p>
                       <a:pPr algn="l">
@@ -11731,7 +12161,7 @@
                 </a:tc>
                 <a:tc>
                   <a:txBody>
-                    <a:bodyPr wrap="square" lIns="64008" rIns="64008" tIns="27432" bIns="27432"/>
+                    <a:bodyPr/>
                     <a:lstStyle/>
                     <a:p>
                       <a:pPr algn="l">
@@ -11758,7 +12188,7 @@
                 </a:tc>
                 <a:tc>
                   <a:txBody>
-                    <a:bodyPr wrap="square" lIns="64008" rIns="64008" tIns="27432" bIns="27432"/>
+                    <a:bodyPr/>
                     <a:lstStyle/>
                     <a:p>
                       <a:pPr algn="l">
@@ -11783,11 +12213,16 @@
                     </a:solidFill>
                   </a:tcPr>
                 </a:tc>
+                <a:extLst>
+                  <a:ext uri="{0D108BD9-81ED-4DB2-BD59-A6C34878D82A}">
+                    <a16:rowId xmlns:a16="http://schemas.microsoft.com/office/drawing/2014/main" val="10004"/>
+                  </a:ext>
+                </a:extLst>
               </a:tr>
               <a:tr h="548640">
                 <a:tc>
                   <a:txBody>
-                    <a:bodyPr wrap="square" lIns="64008" rIns="64008" tIns="27432" bIns="27432"/>
+                    <a:bodyPr/>
                     <a:lstStyle/>
                     <a:p>
                       <a:pPr algn="l">
@@ -11814,7 +12249,7 @@
                 </a:tc>
                 <a:tc>
                   <a:txBody>
-                    <a:bodyPr wrap="square" lIns="64008" rIns="64008" tIns="27432" bIns="27432"/>
+                    <a:bodyPr/>
                     <a:lstStyle/>
                     <a:p>
                       <a:pPr algn="l">
@@ -11841,7 +12276,7 @@
                 </a:tc>
                 <a:tc>
                   <a:txBody>
-                    <a:bodyPr wrap="square" lIns="64008" rIns="64008" tIns="27432" bIns="27432"/>
+                    <a:bodyPr/>
                     <a:lstStyle/>
                     <a:p>
                       <a:pPr algn="l">
@@ -11868,7 +12303,7 @@
                 </a:tc>
                 <a:tc>
                   <a:txBody>
-                    <a:bodyPr wrap="square" lIns="64008" rIns="64008" tIns="27432" bIns="27432"/>
+                    <a:bodyPr/>
                     <a:lstStyle/>
                     <a:p>
                       <a:pPr algn="l">
@@ -11893,11 +12328,16 @@
                     </a:solidFill>
                   </a:tcPr>
                 </a:tc>
+                <a:extLst>
+                  <a:ext uri="{0D108BD9-81ED-4DB2-BD59-A6C34878D82A}">
+                    <a16:rowId xmlns:a16="http://schemas.microsoft.com/office/drawing/2014/main" val="10005"/>
+                  </a:ext>
+                </a:extLst>
               </a:tr>
               <a:tr h="548640">
                 <a:tc>
                   <a:txBody>
-                    <a:bodyPr wrap="square" lIns="64008" rIns="64008" tIns="27432" bIns="27432"/>
+                    <a:bodyPr/>
                     <a:lstStyle/>
                     <a:p>
                       <a:pPr algn="l">
@@ -11924,7 +12364,7 @@
                 </a:tc>
                 <a:tc>
                   <a:txBody>
-                    <a:bodyPr wrap="square" lIns="64008" rIns="64008" tIns="27432" bIns="27432"/>
+                    <a:bodyPr/>
                     <a:lstStyle/>
                     <a:p>
                       <a:pPr algn="l">
@@ -11951,7 +12391,7 @@
                 </a:tc>
                 <a:tc>
                   <a:txBody>
-                    <a:bodyPr wrap="square" lIns="64008" rIns="64008" tIns="27432" bIns="27432"/>
+                    <a:bodyPr/>
                     <a:lstStyle/>
                     <a:p>
                       <a:pPr algn="l">
@@ -11978,7 +12418,7 @@
                 </a:tc>
                 <a:tc>
                   <a:txBody>
-                    <a:bodyPr wrap="square" lIns="64008" rIns="64008" tIns="27432" bIns="27432"/>
+                    <a:bodyPr/>
                     <a:lstStyle/>
                     <a:p>
                       <a:pPr algn="l">
@@ -12003,11 +12443,16 @@
                     </a:solidFill>
                   </a:tcPr>
                 </a:tc>
+                <a:extLst>
+                  <a:ext uri="{0D108BD9-81ED-4DB2-BD59-A6C34878D82A}">
+                    <a16:rowId xmlns:a16="http://schemas.microsoft.com/office/drawing/2014/main" val="10006"/>
+                  </a:ext>
+                </a:extLst>
               </a:tr>
               <a:tr h="548640">
                 <a:tc>
                   <a:txBody>
-                    <a:bodyPr wrap="square" lIns="64008" rIns="64008" tIns="27432" bIns="27432"/>
+                    <a:bodyPr/>
                     <a:lstStyle/>
                     <a:p>
                       <a:pPr algn="l">
@@ -12034,7 +12479,7 @@
                 </a:tc>
                 <a:tc>
                   <a:txBody>
-                    <a:bodyPr wrap="square" lIns="64008" rIns="64008" tIns="27432" bIns="27432"/>
+                    <a:bodyPr/>
                     <a:lstStyle/>
                     <a:p>
                       <a:pPr algn="l">
@@ -12061,7 +12506,7 @@
                 </a:tc>
                 <a:tc>
                   <a:txBody>
-                    <a:bodyPr wrap="square" lIns="64008" rIns="64008" tIns="27432" bIns="27432"/>
+                    <a:bodyPr/>
                     <a:lstStyle/>
                     <a:p>
                       <a:pPr algn="l">
@@ -12088,7 +12533,7 @@
                 </a:tc>
                 <a:tc>
                   <a:txBody>
-                    <a:bodyPr wrap="square" lIns="64008" rIns="64008" tIns="27432" bIns="27432"/>
+                    <a:bodyPr/>
                     <a:lstStyle/>
                     <a:p>
                       <a:pPr algn="l">
@@ -12113,11 +12558,16 @@
                     </a:solidFill>
                   </a:tcPr>
                 </a:tc>
+                <a:extLst>
+                  <a:ext uri="{0D108BD9-81ED-4DB2-BD59-A6C34878D82A}">
+                    <a16:rowId xmlns:a16="http://schemas.microsoft.com/office/drawing/2014/main" val="10007"/>
+                  </a:ext>
+                </a:extLst>
               </a:tr>
               <a:tr h="548640">
                 <a:tc>
                   <a:txBody>
-                    <a:bodyPr wrap="square" lIns="64008" rIns="64008" tIns="27432" bIns="27432"/>
+                    <a:bodyPr/>
                     <a:lstStyle/>
                     <a:p>
                       <a:pPr algn="l">
@@ -12144,7 +12594,7 @@
                 </a:tc>
                 <a:tc>
                   <a:txBody>
-                    <a:bodyPr wrap="square" lIns="64008" rIns="64008" tIns="27432" bIns="27432"/>
+                    <a:bodyPr/>
                     <a:lstStyle/>
                     <a:p>
                       <a:pPr algn="l">
@@ -12171,7 +12621,7 @@
                 </a:tc>
                 <a:tc>
                   <a:txBody>
-                    <a:bodyPr wrap="square" lIns="64008" rIns="64008" tIns="27432" bIns="27432"/>
+                    <a:bodyPr/>
                     <a:lstStyle/>
                     <a:p>
                       <a:pPr algn="l">
@@ -12198,7 +12648,7 @@
                 </a:tc>
                 <a:tc>
                   <a:txBody>
-                    <a:bodyPr wrap="square" lIns="64008" rIns="64008" tIns="27432" bIns="27432"/>
+                    <a:bodyPr/>
                     <a:lstStyle/>
                     <a:p>
                       <a:pPr algn="l">
@@ -12223,6 +12673,11 @@
                     </a:solidFill>
                   </a:tcPr>
                 </a:tc>
+                <a:extLst>
+                  <a:ext uri="{0D108BD9-81ED-4DB2-BD59-A6C34878D82A}">
+                    <a16:rowId xmlns:a16="http://schemas.microsoft.com/office/drawing/2014/main" val="10008"/>
+                  </a:ext>
+                </a:extLst>
               </a:tr>
             </a:tbl>
           </a:graphicData>
@@ -12245,7 +12700,7 @@
           <a:noFill/>
         </p:spPr>
         <p:txBody>
-          <a:bodyPr wrap="square" lIns="0" rIns="0" tIns="0" bIns="0">
+          <a:bodyPr wrap="square" lIns="0" tIns="0" rIns="0" bIns="0">
             <a:spAutoFit/>
           </a:bodyPr>
           <a:lstStyle/>
@@ -12282,7 +12737,7 @@
 </file>
 
 <file path=ppt/slides/slide6.xml><?xml version="1.0" encoding="utf-8"?>
-<p:sld xmlns:a="http://schemas.openxmlformats.org/drawingml/2006/main" xmlns:p="http://schemas.openxmlformats.org/presentationml/2006/main" xmlns:r="http://schemas.openxmlformats.org/officeDocument/2006/relationships">
+<p:sld xmlns:a="http://schemas.openxmlformats.org/drawingml/2006/main" xmlns:r="http://schemas.openxmlformats.org/officeDocument/2006/relationships" xmlns:p="http://schemas.openxmlformats.org/presentationml/2006/main">
   <p:cSld>
     <p:spTree>
       <p:nvGrpSpPr>
@@ -12290,7 +12745,14 @@
         <p:cNvGrpSpPr/>
         <p:nvPr/>
       </p:nvGrpSpPr>
-      <p:grpSpPr/>
+      <p:grpSpPr>
+        <a:xfrm>
+          <a:off x="0" y="0"/>
+          <a:ext cx="0" cy="0"/>
+          <a:chOff x="0" y="0"/>
+          <a:chExt cx="0" cy="0"/>
+        </a:xfrm>
+      </p:grpSpPr>
       <p:sp>
         <p:nvSpPr>
           <p:cNvPr id="2" name="TextBox 1"/>
@@ -12308,7 +12770,7 @@
           <a:noFill/>
         </p:spPr>
         <p:txBody>
-          <a:bodyPr wrap="square" lIns="0" rIns="0" tIns="0" bIns="0">
+          <a:bodyPr wrap="square" lIns="0" tIns="0" rIns="0" bIns="0">
             <a:spAutoFit/>
           </a:bodyPr>
           <a:lstStyle/>
@@ -12399,6 +12861,7 @@
           <a:lstStyle/>
           <a:p>
             <a:pPr algn="ctr"/>
+            <a:endParaRPr/>
           </a:p>
         </p:txBody>
       </p:sp>
@@ -12443,6 +12906,7 @@
           <a:lstStyle/>
           <a:p>
             <a:pPr algn="ctr"/>
+            <a:endParaRPr/>
           </a:p>
         </p:txBody>
       </p:sp>
@@ -12463,7 +12927,7 @@
           <a:noFill/>
         </p:spPr>
         <p:txBody>
-          <a:bodyPr wrap="square" lIns="0" rIns="0" tIns="0" bIns="0">
+          <a:bodyPr wrap="square" lIns="0" tIns="0" rIns="0" bIns="0">
             <a:spAutoFit/>
           </a:bodyPr>
           <a:lstStyle/>
@@ -12508,7 +12972,7 @@
           <a:noFill/>
         </p:spPr>
         <p:txBody>
-          <a:bodyPr wrap="square" lIns="0" rIns="0" tIns="0" bIns="0">
+          <a:bodyPr wrap="square" lIns="0" tIns="0" rIns="0" bIns="0">
             <a:spAutoFit/>
           </a:bodyPr>
           <a:lstStyle/>
@@ -12581,6 +13045,7 @@
           <a:lstStyle/>
           <a:p>
             <a:pPr algn="ctr"/>
+            <a:endParaRPr/>
           </a:p>
         </p:txBody>
       </p:sp>
@@ -12601,7 +13066,7 @@
           <a:noFill/>
         </p:spPr>
         <p:txBody>
-          <a:bodyPr wrap="square" lIns="0" rIns="0" tIns="0" bIns="0">
+          <a:bodyPr wrap="square" lIns="0" tIns="0" rIns="0" bIns="0">
             <a:spAutoFit/>
           </a:bodyPr>
           <a:lstStyle/>
@@ -12693,6 +13158,7 @@
           <a:lstStyle/>
           <a:p>
             <a:pPr algn="ctr"/>
+            <a:endParaRPr/>
           </a:p>
         </p:txBody>
       </p:sp>
@@ -12713,7 +13179,7 @@
           <a:noFill/>
         </p:spPr>
         <p:txBody>
-          <a:bodyPr wrap="square" lIns="0" rIns="0" tIns="0" bIns="0">
+          <a:bodyPr wrap="square" lIns="0" tIns="0" rIns="0" bIns="0">
             <a:spAutoFit/>
           </a:bodyPr>
           <a:lstStyle/>
@@ -12805,6 +13271,7 @@
           <a:lstStyle/>
           <a:p>
             <a:pPr algn="ctr"/>
+            <a:endParaRPr/>
           </a:p>
         </p:txBody>
       </p:sp>
@@ -12825,7 +13292,7 @@
           <a:noFill/>
         </p:spPr>
         <p:txBody>
-          <a:bodyPr wrap="square" lIns="0" rIns="0" tIns="0" bIns="0">
+          <a:bodyPr wrap="square" lIns="0" tIns="0" rIns="0" bIns="0">
             <a:spAutoFit/>
           </a:bodyPr>
           <a:lstStyle/>
@@ -12914,6 +13381,7 @@
           <a:lstStyle/>
           <a:p>
             <a:pPr algn="ctr"/>
+            <a:endParaRPr/>
           </a:p>
         </p:txBody>
       </p:sp>
@@ -12934,7 +13402,7 @@
           <a:noFill/>
         </p:spPr>
         <p:txBody>
-          <a:bodyPr wrap="square" lIns="0" rIns="0" tIns="0" bIns="0">
+          <a:bodyPr wrap="square" lIns="0" tIns="0" rIns="0" bIns="0">
             <a:spAutoFit/>
           </a:bodyPr>
           <a:lstStyle/>
@@ -13023,6 +13491,7 @@
           <a:lstStyle/>
           <a:p>
             <a:pPr algn="ctr"/>
+            <a:endParaRPr/>
           </a:p>
         </p:txBody>
       </p:sp>
@@ -13043,7 +13512,7 @@
           <a:noFill/>
         </p:spPr>
         <p:txBody>
-          <a:bodyPr wrap="square" lIns="0" rIns="0" tIns="0" bIns="0">
+          <a:bodyPr wrap="square" lIns="0" tIns="0" rIns="0" bIns="0">
             <a:spAutoFit/>
           </a:bodyPr>
           <a:lstStyle/>
@@ -13126,7 +13595,7 @@
           </a:fontRef>
         </p:style>
         <p:txBody>
-          <a:bodyPr rtlCol="0" anchor="ctr" wrap="square" lIns="182880" rIns="182880"/>
+          <a:bodyPr wrap="square" lIns="182880" rIns="182880" rtlCol="0" anchor="ctr"/>
           <a:lstStyle/>
           <a:p>
             <a:pPr algn="ctr">
@@ -13164,7 +13633,7 @@
 </file>
 
 <file path=ppt/slides/slide7.xml><?xml version="1.0" encoding="utf-8"?>
-<p:sld xmlns:a="http://schemas.openxmlformats.org/drawingml/2006/main" xmlns:p="http://schemas.openxmlformats.org/presentationml/2006/main" xmlns:r="http://schemas.openxmlformats.org/officeDocument/2006/relationships">
+<p:sld xmlns:a="http://schemas.openxmlformats.org/drawingml/2006/main" xmlns:r="http://schemas.openxmlformats.org/officeDocument/2006/relationships" xmlns:p="http://schemas.openxmlformats.org/presentationml/2006/main">
   <p:cSld>
     <p:spTree>
       <p:nvGrpSpPr>
@@ -13172,7 +13641,14 @@
         <p:cNvGrpSpPr/>
         <p:nvPr/>
       </p:nvGrpSpPr>
-      <p:grpSpPr/>
+      <p:grpSpPr>
+        <a:xfrm>
+          <a:off x="0" y="0"/>
+          <a:ext cx="0" cy="0"/>
+          <a:chOff x="0" y="0"/>
+          <a:chExt cx="0" cy="0"/>
+        </a:xfrm>
+      </p:grpSpPr>
       <p:sp>
         <p:nvSpPr>
           <p:cNvPr id="2" name="TextBox 1"/>
@@ -13190,7 +13666,7 @@
           <a:noFill/>
         </p:spPr>
         <p:txBody>
-          <a:bodyPr wrap="square" lIns="0" rIns="0" tIns="0" bIns="0">
+          <a:bodyPr wrap="square" lIns="0" tIns="0" rIns="0" bIns="0">
             <a:spAutoFit/>
           </a:bodyPr>
           <a:lstStyle/>
@@ -13281,6 +13757,7 @@
           <a:lstStyle/>
           <a:p>
             <a:pPr algn="ctr"/>
+            <a:endParaRPr/>
           </a:p>
         </p:txBody>
       </p:sp>
@@ -13325,6 +13802,7 @@
           <a:lstStyle/>
           <a:p>
             <a:pPr algn="ctr"/>
+            <a:endParaRPr/>
           </a:p>
         </p:txBody>
       </p:sp>
@@ -13345,7 +13823,7 @@
           <a:noFill/>
         </p:spPr>
         <p:txBody>
-          <a:bodyPr wrap="square" lIns="0" rIns="0" tIns="0" bIns="0">
+          <a:bodyPr wrap="square" lIns="0" tIns="0" rIns="0" bIns="0">
             <a:spAutoFit/>
           </a:bodyPr>
           <a:lstStyle/>
@@ -13390,7 +13868,7 @@
           <a:noFill/>
         </p:spPr>
         <p:txBody>
-          <a:bodyPr wrap="square" lIns="0" rIns="0" tIns="0" bIns="0">
+          <a:bodyPr wrap="square" lIns="0" tIns="0" rIns="0" bIns="0">
             <a:spAutoFit/>
           </a:bodyPr>
           <a:lstStyle/>
@@ -13457,7 +13935,7 @@
           </a:fontRef>
         </p:style>
         <p:txBody>
-          <a:bodyPr rtlCol="0" anchor="ctr" wrap="square" lIns="164592"/>
+          <a:bodyPr wrap="square" lIns="164592" rtlCol="0" anchor="ctr"/>
           <a:lstStyle/>
           <a:p>
             <a:pPr algn="ctr"/>
@@ -13518,6 +13996,7 @@
           <a:lstStyle/>
           <a:p>
             <a:pPr algn="ctr"/>
+            <a:endParaRPr/>
           </a:p>
         </p:txBody>
       </p:sp>
@@ -13538,7 +14017,7 @@
           <a:noFill/>
         </p:spPr>
         <p:txBody>
-          <a:bodyPr wrap="square" lIns="0" rIns="0" tIns="0" bIns="0">
+          <a:bodyPr wrap="square" lIns="0" tIns="0" rIns="0" bIns="0">
             <a:spAutoFit/>
           </a:bodyPr>
           <a:lstStyle/>
@@ -13667,7 +14146,7 @@
           </a:fontRef>
         </p:style>
         <p:txBody>
-          <a:bodyPr rtlCol="0" anchor="ctr" wrap="square" lIns="164592"/>
+          <a:bodyPr wrap="square" lIns="164592" rtlCol="0" anchor="ctr"/>
           <a:lstStyle/>
           <a:p>
             <a:pPr algn="ctr"/>
@@ -13728,6 +14207,7 @@
           <a:lstStyle/>
           <a:p>
             <a:pPr algn="ctr"/>
+            <a:endParaRPr/>
           </a:p>
         </p:txBody>
       </p:sp>
@@ -13748,7 +14228,7 @@
           <a:noFill/>
         </p:spPr>
         <p:txBody>
-          <a:bodyPr wrap="square" lIns="0" rIns="0" tIns="0" bIns="0">
+          <a:bodyPr wrap="square" lIns="0" tIns="0" rIns="0" bIns="0">
             <a:spAutoFit/>
           </a:bodyPr>
           <a:lstStyle/>
@@ -13877,7 +14357,7 @@
           </a:fontRef>
         </p:style>
         <p:txBody>
-          <a:bodyPr rtlCol="0" anchor="ctr" wrap="square" lIns="164592"/>
+          <a:bodyPr wrap="square" lIns="164592" rtlCol="0" anchor="ctr"/>
           <a:lstStyle/>
           <a:p>
             <a:pPr algn="ctr"/>
@@ -13938,6 +14418,7 @@
           <a:lstStyle/>
           <a:p>
             <a:pPr algn="ctr"/>
+            <a:endParaRPr/>
           </a:p>
         </p:txBody>
       </p:sp>
@@ -13958,7 +14439,7 @@
           <a:noFill/>
         </p:spPr>
         <p:txBody>
-          <a:bodyPr wrap="square" lIns="0" rIns="0" tIns="0" bIns="0">
+          <a:bodyPr wrap="square" lIns="0" tIns="0" rIns="0" bIns="0">
             <a:spAutoFit/>
           </a:bodyPr>
           <a:lstStyle/>
@@ -14087,7 +14568,7 @@
           </a:fontRef>
         </p:style>
         <p:txBody>
-          <a:bodyPr rtlCol="0" anchor="ctr" wrap="square" lIns="164592"/>
+          <a:bodyPr wrap="square" lIns="164592" rtlCol="0" anchor="ctr"/>
           <a:lstStyle/>
           <a:p>
             <a:pPr algn="ctr"/>
@@ -14148,6 +14629,7 @@
           <a:lstStyle/>
           <a:p>
             <a:pPr algn="ctr"/>
+            <a:endParaRPr/>
           </a:p>
         </p:txBody>
       </p:sp>
@@ -14168,7 +14650,7 @@
           <a:noFill/>
         </p:spPr>
         <p:txBody>
-          <a:bodyPr wrap="square" lIns="0" rIns="0" tIns="0" bIns="0">
+          <a:bodyPr wrap="square" lIns="0" tIns="0" rIns="0" bIns="0">
             <a:spAutoFit/>
           </a:bodyPr>
           <a:lstStyle/>
@@ -14297,7 +14779,7 @@
           </a:fontRef>
         </p:style>
         <p:txBody>
-          <a:bodyPr rtlCol="0" anchor="ctr" wrap="square" lIns="182880"/>
+          <a:bodyPr wrap="square" lIns="182880" rtlCol="0" anchor="ctr"/>
           <a:lstStyle/>
           <a:p>
             <a:pPr algn="ctr"/>
@@ -14331,7 +14813,7 @@
 </file>
 
 <file path=ppt/slides/slide8.xml><?xml version="1.0" encoding="utf-8"?>
-<p:sld xmlns:a="http://schemas.openxmlformats.org/drawingml/2006/main" xmlns:p="http://schemas.openxmlformats.org/presentationml/2006/main" xmlns:r="http://schemas.openxmlformats.org/officeDocument/2006/relationships">
+<p:sld xmlns:a="http://schemas.openxmlformats.org/drawingml/2006/main" xmlns:r="http://schemas.openxmlformats.org/officeDocument/2006/relationships" xmlns:p="http://schemas.openxmlformats.org/presentationml/2006/main">
   <p:cSld>
     <p:spTree>
       <p:nvGrpSpPr>
@@ -14339,7 +14821,14 @@
         <p:cNvGrpSpPr/>
         <p:nvPr/>
       </p:nvGrpSpPr>
-      <p:grpSpPr/>
+      <p:grpSpPr>
+        <a:xfrm>
+          <a:off x="0" y="0"/>
+          <a:ext cx="0" cy="0"/>
+          <a:chOff x="0" y="0"/>
+          <a:chExt cx="0" cy="0"/>
+        </a:xfrm>
+      </p:grpSpPr>
       <p:sp>
         <p:nvSpPr>
           <p:cNvPr id="2" name="TextBox 1"/>
@@ -14348,7 +14837,7 @@
         </p:nvSpPr>
         <p:spPr>
           <a:xfrm>
-            <a:off x="411480" y="237744"/>
+            <a:off x="908698" y="246888"/>
             <a:ext cx="11338560" cy="777240"/>
           </a:xfrm>
           <a:prstGeom prst="rect">
@@ -14357,7 +14846,7 @@
           <a:noFill/>
         </p:spPr>
         <p:txBody>
-          <a:bodyPr wrap="square" lIns="0" rIns="0" tIns="0" bIns="0">
+          <a:bodyPr wrap="square" lIns="0" tIns="0" rIns="0" bIns="0">
             <a:spAutoFit/>
           </a:bodyPr>
           <a:lstStyle/>
@@ -14374,7 +14863,7 @@
               </a:spcAft>
             </a:pPr>
             <a:r>
-              <a:rPr sz="1050" b="1" i="0">
+              <a:rPr sz="1050" b="1" i="0" dirty="0">
                 <a:solidFill>
                   <a:srgbClr val="00A4E4"/>
                 </a:solidFill>
@@ -14396,7 +14885,7 @@
               </a:spcAft>
             </a:pPr>
             <a:r>
-              <a:rPr sz="2500" b="1" i="0">
+              <a:rPr sz="2500" b="1" i="0" dirty="0">
                 <a:solidFill>
                   <a:srgbClr val="143B5C"/>
                 </a:solidFill>
@@ -14415,7 +14904,7 @@
         </p:nvSpPr>
         <p:spPr>
           <a:xfrm>
-            <a:off x="429768" y="969264"/>
+            <a:off x="923428" y="779526"/>
             <a:ext cx="1234440" cy="41148"/>
           </a:xfrm>
           <a:prstGeom prst="rect">
@@ -14448,6 +14937,7 @@
           <a:lstStyle/>
           <a:p>
             <a:pPr algn="ctr"/>
+            <a:endParaRPr/>
           </a:p>
         </p:txBody>
       </p:sp>
@@ -14492,19 +14982,20 @@
           <a:lstStyle/>
           <a:p>
             <a:pPr algn="ctr"/>
-          </a:p>
-        </p:txBody>
-      </p:sp>
-      <p:sp>
-        <p:nvSpPr>
-          <p:cNvPr id="5" name="TextBox 4"/>
+            <a:endParaRPr/>
+          </a:p>
+        </p:txBody>
+      </p:sp>
+      <p:sp>
+        <p:nvSpPr>
+          <p:cNvPr id="6" name="TextBox 5"/>
           <p:cNvSpPr txBox="1"/>
           <p:nvPr/>
         </p:nvSpPr>
         <p:spPr>
           <a:xfrm>
-            <a:off x="411480" y="6556248"/>
-            <a:ext cx="8686800" cy="274320"/>
+            <a:off x="10972800" y="6556248"/>
+            <a:ext cx="804672" cy="274320"/>
           </a:xfrm>
           <a:prstGeom prst="rect">
             <a:avLst/>
@@ -14512,52 +15003,7 @@
           <a:noFill/>
         </p:spPr>
         <p:txBody>
-          <a:bodyPr wrap="square" lIns="0" rIns="0" tIns="0" bIns="0">
-            <a:spAutoFit/>
-          </a:bodyPr>
-          <a:lstStyle/>
-          <a:p>
-            <a:pPr algn="l">
-              <a:lnSpc>
-                <a:spcPct val="100000"/>
-              </a:lnSpc>
-              <a:spcBef>
-                <a:spcPts val="0"/>
-              </a:spcBef>
-              <a:spcAft>
-                <a:spcPts val="400"/>
-              </a:spcAft>
-            </a:pPr>
-            <a:r>
-              <a:rPr sz="800" b="0" i="0">
-                <a:solidFill>
-                  <a:srgbClr val="6B6B6B"/>
-                </a:solidFill>
-                <a:latin typeface="Calibri"/>
-              </a:rPr>
-              <a:t>Particle-Based Modelling of Scrap Handling for Green Steel Production  •  TU Delft × Tata Steel Netherlands</a:t>
-            </a:r>
-          </a:p>
-        </p:txBody>
-      </p:sp>
-      <p:sp>
-        <p:nvSpPr>
-          <p:cNvPr id="6" name="TextBox 5"/>
-          <p:cNvSpPr txBox="1"/>
-          <p:nvPr/>
-        </p:nvSpPr>
-        <p:spPr>
-          <a:xfrm>
-            <a:off x="10972800" y="6556248"/>
-            <a:ext cx="804672" cy="274320"/>
-          </a:xfrm>
-          <a:prstGeom prst="rect">
-            <a:avLst/>
-          </a:prstGeom>
-          <a:noFill/>
-        </p:spPr>
-        <p:txBody>
-          <a:bodyPr wrap="square" lIns="0" rIns="0" tIns="0" bIns="0">
+          <a:bodyPr wrap="square" lIns="0" tIns="0" rIns="0" bIns="0">
             <a:spAutoFit/>
           </a:bodyPr>
           <a:lstStyle/>
@@ -14593,8 +15039,8 @@
         </p:nvSpPr>
         <p:spPr>
           <a:xfrm>
-            <a:off x="411480" y="1170432"/>
-            <a:ext cx="2615184" cy="1481328"/>
+            <a:off x="795128" y="1170432"/>
+            <a:ext cx="2390560" cy="1481328"/>
           </a:xfrm>
           <a:prstGeom prst="roundRect">
             <a:avLst>
@@ -14630,6 +15076,7 @@
           <a:lstStyle/>
           <a:p>
             <a:pPr algn="ctr"/>
+            <a:endParaRPr/>
           </a:p>
         </p:txBody>
       </p:sp>
@@ -14641,8 +15088,8 @@
         </p:nvSpPr>
         <p:spPr>
           <a:xfrm>
-            <a:off x="530352" y="1280160"/>
-            <a:ext cx="2377439" cy="1261872"/>
+            <a:off x="923428" y="1280160"/>
+            <a:ext cx="2143387" cy="635495"/>
           </a:xfrm>
           <a:prstGeom prst="rect">
             <a:avLst/>
@@ -14650,7 +15097,7 @@
           <a:noFill/>
         </p:spPr>
         <p:txBody>
-          <a:bodyPr wrap="square" lIns="0" rIns="0" tIns="0" bIns="0">
+          <a:bodyPr wrap="square" lIns="0" tIns="0" rIns="0" bIns="0">
             <a:spAutoFit/>
           </a:bodyPr>
           <a:lstStyle/>
@@ -14661,7 +15108,7 @@
               </a:spcAft>
             </a:pPr>
             <a:r>
-              <a:rPr sz="900" b="1" i="0">
+              <a:rPr sz="900" b="1" i="0" dirty="0">
                 <a:solidFill>
                   <a:srgbClr val="E8A33D"/>
                 </a:solidFill>
@@ -14670,7 +15117,7 @@
               <a:t>STEP 1   </a:t>
             </a:r>
             <a:r>
-              <a:rPr sz="1150" b="1" i="0">
+              <a:rPr sz="1150" b="1" i="0" dirty="0">
                 <a:solidFill>
                   <a:srgbClr val="143B5C"/>
                 </a:solidFill>
@@ -14686,7 +15133,7 @@
               </a:lnSpc>
             </a:pPr>
             <a:r>
-              <a:rPr sz="900" b="0" i="0">
+              <a:rPr sz="900" b="0" i="0" dirty="0">
                 <a:solidFill>
                   <a:srgbClr val="2B2B2B"/>
                 </a:solidFill>
@@ -14705,7 +15152,7 @@
         </p:nvSpPr>
         <p:spPr>
           <a:xfrm>
-            <a:off x="3090672" y="1810511"/>
+            <a:off x="3308141" y="1810511"/>
             <a:ext cx="310896" cy="201168"/>
           </a:xfrm>
           <a:prstGeom prst="rightArrow">
@@ -14738,6 +15185,7 @@
           <a:lstStyle/>
           <a:p>
             <a:pPr algn="ctr"/>
+            <a:endParaRPr/>
           </a:p>
         </p:txBody>
       </p:sp>
@@ -14749,8 +15197,8 @@
         </p:nvSpPr>
         <p:spPr>
           <a:xfrm>
-            <a:off x="3465576" y="1170432"/>
-            <a:ext cx="2615184" cy="1481328"/>
+            <a:off x="3690198" y="1170432"/>
+            <a:ext cx="2390561" cy="1481328"/>
           </a:xfrm>
           <a:prstGeom prst="roundRect">
             <a:avLst>
@@ -14786,6 +15234,7 @@
           <a:lstStyle/>
           <a:p>
             <a:pPr algn="ctr"/>
+            <a:endParaRPr/>
           </a:p>
         </p:txBody>
       </p:sp>
@@ -14797,8 +15246,8 @@
         </p:nvSpPr>
         <p:spPr>
           <a:xfrm>
-            <a:off x="3584448" y="1280160"/>
-            <a:ext cx="2377439" cy="1261872"/>
+            <a:off x="3747052" y="1280160"/>
+            <a:ext cx="2214835" cy="635495"/>
           </a:xfrm>
           <a:prstGeom prst="rect">
             <a:avLst/>
@@ -14806,7 +15255,7 @@
           <a:noFill/>
         </p:spPr>
         <p:txBody>
-          <a:bodyPr wrap="square" lIns="0" rIns="0" tIns="0" bIns="0">
+          <a:bodyPr wrap="square" lIns="0" tIns="0" rIns="0" bIns="0">
             <a:spAutoFit/>
           </a:bodyPr>
           <a:lstStyle/>
@@ -14894,6 +15343,7 @@
           <a:lstStyle/>
           <a:p>
             <a:pPr algn="ctr"/>
+            <a:endParaRPr/>
           </a:p>
         </p:txBody>
       </p:sp>
@@ -14942,6 +15392,7 @@
           <a:lstStyle/>
           <a:p>
             <a:pPr algn="ctr"/>
+            <a:endParaRPr/>
           </a:p>
         </p:txBody>
       </p:sp>
@@ -14962,7 +15413,7 @@
           <a:noFill/>
         </p:spPr>
         <p:txBody>
-          <a:bodyPr wrap="square" lIns="0" rIns="0" tIns="0" bIns="0">
+          <a:bodyPr wrap="square" lIns="0" tIns="0" rIns="0" bIns="0">
             <a:spAutoFit/>
           </a:bodyPr>
           <a:lstStyle/>
@@ -15050,6 +15501,7 @@
           <a:lstStyle/>
           <a:p>
             <a:pPr algn="ctr"/>
+            <a:endParaRPr/>
           </a:p>
         </p:txBody>
       </p:sp>
@@ -15062,7 +15514,7 @@
         <p:spPr>
           <a:xfrm>
             <a:off x="9573767" y="1170432"/>
-            <a:ext cx="2615184" cy="1481328"/>
+            <a:ext cx="2401181" cy="1481328"/>
           </a:xfrm>
           <a:prstGeom prst="roundRect">
             <a:avLst>
@@ -15098,6 +15550,7 @@
           <a:lstStyle/>
           <a:p>
             <a:pPr algn="ctr"/>
+            <a:endParaRPr/>
           </a:p>
         </p:txBody>
       </p:sp>
@@ -15109,8 +15562,8 @@
         </p:nvSpPr>
         <p:spPr>
           <a:xfrm>
-            <a:off x="9692640" y="1280160"/>
-            <a:ext cx="2377439" cy="1261872"/>
+            <a:off x="9692641" y="1280160"/>
+            <a:ext cx="2084832" cy="499752"/>
           </a:xfrm>
           <a:prstGeom prst="rect">
             <a:avLst/>
@@ -15118,7 +15571,7 @@
           <a:noFill/>
         </p:spPr>
         <p:txBody>
-          <a:bodyPr wrap="square" lIns="0" rIns="0" tIns="0" bIns="0">
+          <a:bodyPr wrap="square" lIns="0" tIns="0" rIns="0" bIns="0">
             <a:spAutoFit/>
           </a:bodyPr>
           <a:lstStyle/>
@@ -15173,7 +15626,7 @@
         </p:nvSpPr>
         <p:spPr>
           <a:xfrm>
-            <a:off x="411480" y="2944368"/>
+            <a:off x="764404" y="2944368"/>
             <a:ext cx="5596128" cy="3246120"/>
           </a:xfrm>
           <a:prstGeom prst="roundRect">
@@ -15210,6 +15663,7 @@
           <a:lstStyle/>
           <a:p>
             <a:pPr algn="ctr"/>
+            <a:endParaRPr/>
           </a:p>
         </p:txBody>
       </p:sp>
@@ -15221,7 +15675,7 @@
         </p:nvSpPr>
         <p:spPr>
           <a:xfrm>
-            <a:off x="576072" y="3090672"/>
+            <a:off x="928996" y="3090672"/>
             <a:ext cx="5285232" cy="2971800"/>
           </a:xfrm>
           <a:prstGeom prst="rect">
@@ -15230,7 +15684,7 @@
           <a:noFill/>
         </p:spPr>
         <p:txBody>
-          <a:bodyPr wrap="square" lIns="0" rIns="0" tIns="0" bIns="0">
+          <a:bodyPr wrap="square" lIns="0" tIns="0" rIns="0" bIns="0">
             <a:spAutoFit/>
           </a:bodyPr>
           <a:lstStyle/>
@@ -15247,7 +15701,7 @@
               </a:spcAft>
             </a:pPr>
             <a:r>
-              <a:rPr sz="1300" b="1" i="0">
+              <a:rPr sz="1300" b="1" i="0" dirty="0">
                 <a:solidFill>
                   <a:srgbClr val="143B5C"/>
                 </a:solidFill>
@@ -15266,7 +15720,7 @@
               </a:spcAft>
             </a:pPr>
             <a:r>
-              <a:rPr sz="1000" b="1" i="0">
+              <a:rPr sz="1000" b="1" i="0" dirty="0">
                 <a:solidFill>
                   <a:srgbClr val="00A4E4"/>
                 </a:solidFill>
@@ -15275,13 +15729,49 @@
               <a:t>•  </a:t>
             </a:r>
             <a:r>
-              <a:rPr sz="1000" b="0" i="0">
+              <a:rPr sz="1000" b="0" i="0" dirty="0">
                 <a:solidFill>
                   <a:srgbClr val="2B2B2B"/>
                 </a:solidFill>
                 <a:latin typeface="Calibri"/>
               </a:rPr>
-              <a:t>Steel scrap piles span millimetres (shreds) to metres (HMS bundles) — simulating every fragment is computationally impossible</a:t>
+              <a:t>Steel scrap piles span </a:t>
+            </a:r>
+            <a:r>
+              <a:rPr sz="1000" b="0" i="0" dirty="0" err="1">
+                <a:solidFill>
+                  <a:srgbClr val="2B2B2B"/>
+                </a:solidFill>
+                <a:latin typeface="Calibri"/>
+              </a:rPr>
+              <a:t>millimetres</a:t>
+            </a:r>
+            <a:r>
+              <a:rPr sz="1000" b="0" i="0" dirty="0">
+                <a:solidFill>
+                  <a:srgbClr val="2B2B2B"/>
+                </a:solidFill>
+                <a:latin typeface="Calibri"/>
+              </a:rPr>
+              <a:t> (shreds) to </a:t>
+            </a:r>
+            <a:r>
+              <a:rPr sz="1000" b="0" i="0" dirty="0" err="1">
+                <a:solidFill>
+                  <a:srgbClr val="2B2B2B"/>
+                </a:solidFill>
+                <a:latin typeface="Calibri"/>
+              </a:rPr>
+              <a:t>metres</a:t>
+            </a:r>
+            <a:r>
+              <a:rPr sz="1000" b="0" i="0" dirty="0">
+                <a:solidFill>
+                  <a:srgbClr val="2B2B2B"/>
+                </a:solidFill>
+                <a:latin typeface="Calibri"/>
+              </a:rPr>
+              <a:t> (HMS bundles) — simulating every fragment is computationally impossible</a:t>
             </a:r>
           </a:p>
           <a:p>
@@ -15294,7 +15784,7 @@
               </a:spcAft>
             </a:pPr>
             <a:r>
-              <a:rPr sz="1000" b="1" i="0">
+              <a:rPr sz="1000" b="1" i="0" dirty="0">
                 <a:solidFill>
                   <a:srgbClr val="00A4E4"/>
                 </a:solidFill>
@@ -15303,7 +15793,7 @@
               <a:t>•  </a:t>
             </a:r>
             <a:r>
-              <a:rPr sz="1000" b="0" i="0">
+              <a:rPr sz="1000" b="0" i="0" dirty="0">
                 <a:solidFill>
                   <a:srgbClr val="2B2B2B"/>
                 </a:solidFill>
@@ -15322,7 +15812,7 @@
               </a:spcAft>
             </a:pPr>
             <a:r>
-              <a:rPr sz="1000" b="1" i="0">
+              <a:rPr sz="1000" b="1" i="0" dirty="0">
                 <a:solidFill>
                   <a:srgbClr val="00A4E4"/>
                 </a:solidFill>
@@ -15331,7 +15821,7 @@
               <a:t>•  </a:t>
             </a:r>
             <a:r>
-              <a:rPr sz="1000" b="0" i="0">
+              <a:rPr sz="1000" b="0" i="0" dirty="0">
                 <a:solidFill>
                   <a:srgbClr val="2B2B2B"/>
                 </a:solidFill>
@@ -15350,7 +15840,7 @@
               </a:spcAft>
             </a:pPr>
             <a:r>
-              <a:rPr sz="1000" b="1" i="0">
+              <a:rPr sz="1000" b="1" i="0" dirty="0">
                 <a:solidFill>
                   <a:srgbClr val="00A4E4"/>
                 </a:solidFill>
@@ -15359,7 +15849,7 @@
               <a:t>•  </a:t>
             </a:r>
             <a:r>
-              <a:rPr sz="1000" b="0" i="0">
+              <a:rPr sz="1000" b="0" i="0" dirty="0">
                 <a:solidFill>
                   <a:srgbClr val="2B2B2B"/>
                 </a:solidFill>
@@ -15378,7 +15868,7 @@
         </p:nvSpPr>
         <p:spPr>
           <a:xfrm>
-            <a:off x="6172200" y="2944368"/>
+            <a:off x="6525124" y="2944368"/>
             <a:ext cx="5605272" cy="3246120"/>
           </a:xfrm>
           <a:prstGeom prst="roundRect">
@@ -15415,6 +15905,7 @@
           <a:lstStyle/>
           <a:p>
             <a:pPr algn="ctr"/>
+            <a:endParaRPr/>
           </a:p>
         </p:txBody>
       </p:sp>
@@ -15426,7 +15917,7 @@
         </p:nvSpPr>
         <p:spPr>
           <a:xfrm>
-            <a:off x="6336792" y="3090672"/>
+            <a:off x="6689716" y="3090672"/>
             <a:ext cx="5285232" cy="2971800"/>
           </a:xfrm>
           <a:prstGeom prst="rect">
@@ -15435,7 +15926,7 @@
           <a:noFill/>
         </p:spPr>
         <p:txBody>
-          <a:bodyPr wrap="square" lIns="0" rIns="0" tIns="0" bIns="0">
+          <a:bodyPr wrap="square" lIns="0" tIns="0" rIns="0" bIns="0">
             <a:spAutoFit/>
           </a:bodyPr>
           <a:lstStyle/>
@@ -15452,7 +15943,7 @@
               </a:spcAft>
             </a:pPr>
             <a:r>
-              <a:rPr sz="1300" b="1" i="0">
+              <a:rPr sz="1300" b="1" i="0" dirty="0">
                 <a:solidFill>
                   <a:srgbClr val="143B5C"/>
                 </a:solidFill>
@@ -15471,7 +15962,7 @@
               </a:spcAft>
             </a:pPr>
             <a:r>
-              <a:rPr sz="1000" b="1" i="0">
+              <a:rPr sz="1000" b="1" i="0" dirty="0">
                 <a:solidFill>
                   <a:srgbClr val="00A4E4"/>
                 </a:solidFill>
@@ -15480,7 +15971,7 @@
               <a:t>•  </a:t>
             </a:r>
             <a:r>
-              <a:rPr sz="1000" b="0" i="0">
+              <a:rPr sz="1000" b="0" i="0" dirty="0">
                 <a:solidFill>
                   <a:srgbClr val="2B2B2B"/>
                 </a:solidFill>
@@ -15499,7 +15990,7 @@
               </a:spcAft>
             </a:pPr>
             <a:r>
-              <a:rPr sz="1000" b="1" i="0">
+              <a:rPr sz="1000" b="1" i="0" dirty="0">
                 <a:solidFill>
                   <a:srgbClr val="00A4E4"/>
                 </a:solidFill>
@@ -15508,13 +15999,22 @@
               <a:t>•  </a:t>
             </a:r>
             <a:r>
-              <a:rPr sz="1000" b="0" i="0">
+              <a:rPr sz="1000" b="0" i="0" dirty="0" err="1">
                 <a:solidFill>
                   <a:srgbClr val="2B2B2B"/>
                 </a:solidFill>
                 <a:latin typeface="Calibri"/>
               </a:rPr>
-              <a:t>Schefler &amp; Coetzee (2023): the maximum scale factor is a geometric property of the bulk measure of interest — and it increases with cohesion</a:t>
+              <a:t>Schefler</a:t>
+            </a:r>
+            <a:r>
+              <a:rPr sz="1000" b="0" i="0" dirty="0">
+                <a:solidFill>
+                  <a:srgbClr val="2B2B2B"/>
+                </a:solidFill>
+                <a:latin typeface="Calibri"/>
+              </a:rPr>
+              <a:t> &amp; Coetzee (2023): the maximum scale factor is a geometric property of the bulk measure of interest — and it increases with cohesion</a:t>
             </a:r>
           </a:p>
           <a:p>
@@ -15527,7 +16027,7 @@
               </a:spcAft>
             </a:pPr>
             <a:r>
-              <a:rPr sz="1000" b="1" i="0">
+              <a:rPr sz="1000" b="1" i="0" dirty="0">
                 <a:solidFill>
                   <a:srgbClr val="00A4E4"/>
                 </a:solidFill>
@@ -15536,7 +16036,7 @@
               <a:t>•  </a:t>
             </a:r>
             <a:r>
-              <a:rPr sz="1000" b="0" i="0">
+              <a:rPr sz="1000" b="0" i="0" dirty="0">
                 <a:solidFill>
                   <a:srgbClr val="2B2B2B"/>
                 </a:solidFill>
@@ -15555,7 +16055,7 @@
               </a:spcAft>
             </a:pPr>
             <a:r>
-              <a:rPr sz="1000" b="1" i="0">
+              <a:rPr sz="1000" b="1" i="0" dirty="0">
                 <a:solidFill>
                   <a:srgbClr val="00A4E4"/>
                 </a:solidFill>
@@ -15564,13 +16064,31 @@
               <a:t>•  </a:t>
             </a:r>
             <a:r>
-              <a:rPr sz="1000" b="0" i="0">
+              <a:rPr sz="1000" b="0" i="0" dirty="0">
                 <a:solidFill>
                   <a:srgbClr val="2B2B2B"/>
                 </a:solidFill>
                 <a:latin typeface="Calibri"/>
               </a:rPr>
-              <a:t>Kryszak et al. (2020) / Kozicki &amp; Tejchman (2005): contact force spectra and grid-free methods give the validation toolbox for impact &amp; damage</a:t>
+              <a:t>Kryszak et al. (2020) / Kozicki &amp; </a:t>
+            </a:r>
+            <a:r>
+              <a:rPr sz="1000" b="0" i="0" dirty="0" err="1">
+                <a:solidFill>
+                  <a:srgbClr val="2B2B2B"/>
+                </a:solidFill>
+                <a:latin typeface="Calibri"/>
+              </a:rPr>
+              <a:t>Tejchman</a:t>
+            </a:r>
+            <a:r>
+              <a:rPr sz="1000" b="0" i="0" dirty="0">
+                <a:solidFill>
+                  <a:srgbClr val="2B2B2B"/>
+                </a:solidFill>
+                <a:latin typeface="Calibri"/>
+              </a:rPr>
+              <a:t> (2005): contact force spectra and grid-free methods give the validation toolbox for impact &amp; damage</a:t>
             </a:r>
           </a:p>
         </p:txBody>
@@ -15584,7 +16102,7 @@
 </file>
 
 <file path=ppt/slides/slide9.xml><?xml version="1.0" encoding="utf-8"?>
-<p:sld xmlns:a="http://schemas.openxmlformats.org/drawingml/2006/main" xmlns:p="http://schemas.openxmlformats.org/presentationml/2006/main" xmlns:r="http://schemas.openxmlformats.org/officeDocument/2006/relationships">
+<p:sld xmlns:a="http://schemas.openxmlformats.org/drawingml/2006/main" xmlns:r="http://schemas.openxmlformats.org/officeDocument/2006/relationships" xmlns:p="http://schemas.openxmlformats.org/presentationml/2006/main">
   <p:cSld>
     <p:spTree>
       <p:nvGrpSpPr>
@@ -15592,7 +16110,14 @@
         <p:cNvGrpSpPr/>
         <p:nvPr/>
       </p:nvGrpSpPr>
-      <p:grpSpPr/>
+      <p:grpSpPr>
+        <a:xfrm>
+          <a:off x="0" y="0"/>
+          <a:ext cx="0" cy="0"/>
+          <a:chOff x="0" y="0"/>
+          <a:chExt cx="0" cy="0"/>
+        </a:xfrm>
+      </p:grpSpPr>
       <p:sp>
         <p:nvSpPr>
           <p:cNvPr id="2" name="TextBox 1"/>
@@ -15601,7 +16126,7 @@
         </p:nvSpPr>
         <p:spPr>
           <a:xfrm>
-            <a:off x="411480" y="237744"/>
+            <a:off x="894666" y="212598"/>
             <a:ext cx="11338560" cy="777240"/>
           </a:xfrm>
           <a:prstGeom prst="rect">
@@ -15610,7 +16135,7 @@
           <a:noFill/>
         </p:spPr>
         <p:txBody>
-          <a:bodyPr wrap="square" lIns="0" rIns="0" tIns="0" bIns="0">
+          <a:bodyPr wrap="square" lIns="0" tIns="0" rIns="0" bIns="0">
             <a:spAutoFit/>
           </a:bodyPr>
           <a:lstStyle/>
@@ -15627,7 +16152,7 @@
               </a:spcAft>
             </a:pPr>
             <a:r>
-              <a:rPr sz="1050" b="1" i="0">
+              <a:rPr sz="1050" b="1" i="0" dirty="0">
                 <a:solidFill>
                   <a:srgbClr val="00A4E4"/>
                 </a:solidFill>
@@ -15649,7 +16174,7 @@
               </a:spcAft>
             </a:pPr>
             <a:r>
-              <a:rPr sz="2500" b="1" i="0">
+              <a:rPr sz="2500" b="1" i="0" dirty="0">
                 <a:solidFill>
                   <a:srgbClr val="143B5C"/>
                 </a:solidFill>
@@ -15668,7 +16193,7 @@
         </p:nvSpPr>
         <p:spPr>
           <a:xfrm>
-            <a:off x="429768" y="969264"/>
+            <a:off x="894666" y="861822"/>
             <a:ext cx="1234440" cy="41148"/>
           </a:xfrm>
           <a:prstGeom prst="rect">
@@ -15701,6 +16226,7 @@
           <a:lstStyle/>
           <a:p>
             <a:pPr algn="ctr"/>
+            <a:endParaRPr/>
           </a:p>
         </p:txBody>
       </p:sp>
@@ -15745,19 +16271,20 @@
           <a:lstStyle/>
           <a:p>
             <a:pPr algn="ctr"/>
-          </a:p>
-        </p:txBody>
-      </p:sp>
-      <p:sp>
-        <p:nvSpPr>
-          <p:cNvPr id="5" name="TextBox 4"/>
+            <a:endParaRPr/>
+          </a:p>
+        </p:txBody>
+      </p:sp>
+      <p:sp>
+        <p:nvSpPr>
+          <p:cNvPr id="6" name="TextBox 5"/>
           <p:cNvSpPr txBox="1"/>
           <p:nvPr/>
         </p:nvSpPr>
         <p:spPr>
           <a:xfrm>
-            <a:off x="411480" y="6556248"/>
-            <a:ext cx="8686800" cy="274320"/>
+            <a:off x="10972800" y="6556248"/>
+            <a:ext cx="804672" cy="274320"/>
           </a:xfrm>
           <a:prstGeom prst="rect">
             <a:avLst/>
@@ -15765,52 +16292,7 @@
           <a:noFill/>
         </p:spPr>
         <p:txBody>
-          <a:bodyPr wrap="square" lIns="0" rIns="0" tIns="0" bIns="0">
-            <a:spAutoFit/>
-          </a:bodyPr>
-          <a:lstStyle/>
-          <a:p>
-            <a:pPr algn="l">
-              <a:lnSpc>
-                <a:spcPct val="100000"/>
-              </a:lnSpc>
-              <a:spcBef>
-                <a:spcPts val="0"/>
-              </a:spcBef>
-              <a:spcAft>
-                <a:spcPts val="400"/>
-              </a:spcAft>
-            </a:pPr>
-            <a:r>
-              <a:rPr sz="800" b="0" i="0">
-                <a:solidFill>
-                  <a:srgbClr val="6B6B6B"/>
-                </a:solidFill>
-                <a:latin typeface="Calibri"/>
-              </a:rPr>
-              <a:t>Particle-Based Modelling of Scrap Handling for Green Steel Production  •  TU Delft × Tata Steel Netherlands</a:t>
-            </a:r>
-          </a:p>
-        </p:txBody>
-      </p:sp>
-      <p:sp>
-        <p:nvSpPr>
-          <p:cNvPr id="6" name="TextBox 5"/>
-          <p:cNvSpPr txBox="1"/>
-          <p:nvPr/>
-        </p:nvSpPr>
-        <p:spPr>
-          <a:xfrm>
-            <a:off x="10972800" y="6556248"/>
-            <a:ext cx="804672" cy="274320"/>
-          </a:xfrm>
-          <a:prstGeom prst="rect">
-            <a:avLst/>
-          </a:prstGeom>
-          <a:noFill/>
-        </p:spPr>
-        <p:txBody>
-          <a:bodyPr wrap="square" lIns="0" rIns="0" tIns="0" bIns="0">
+          <a:bodyPr wrap="square" lIns="0" tIns="0" rIns="0" bIns="0">
             <a:spAutoFit/>
           </a:bodyPr>
           <a:lstStyle/>
@@ -15846,7 +16328,7 @@
         </p:nvSpPr>
         <p:spPr>
           <a:xfrm>
-            <a:off x="411480" y="1115568"/>
+            <a:off x="748360" y="1165860"/>
             <a:ext cx="11365992" cy="841248"/>
           </a:xfrm>
           <a:prstGeom prst="roundRect">
@@ -15877,7 +16359,7 @@
           </a:fontRef>
         </p:style>
         <p:txBody>
-          <a:bodyPr rtlCol="0" anchor="ctr" wrap="square" lIns="201168" rIns="201168"/>
+          <a:bodyPr wrap="square" lIns="201168" rIns="201168" rtlCol="0" anchor="ctr"/>
           <a:lstStyle/>
           <a:p>
             <a:pPr algn="ctr">
@@ -15886,7 +16368,7 @@
               </a:lnSpc>
             </a:pPr>
             <a:r>
-              <a:rPr sz="1250" b="1" i="0">
+              <a:rPr sz="1250" b="1" i="0" dirty="0">
                 <a:solidFill>
                   <a:srgbClr val="E8A33D"/>
                 </a:solidFill>
@@ -15895,13 +16377,31 @@
               <a:t>Core novelty:  </a:t>
             </a:r>
             <a:r>
-              <a:rPr sz="1250" b="0" i="0">
+              <a:rPr sz="1250" b="0" i="0" dirty="0">
                 <a:solidFill>
                   <a:srgbClr val="FFFFFF"/>
                 </a:solidFill>
                 <a:latin typeface="Calibri"/>
               </a:rPr>
-              <a:t>a multi-scale, multi-property characterisation model that transforms raw Tata Steel data into a dynamic digital twin of EAF scrap infeed — multi-material recipes (bale, shredded, heavy melting scrap) moving through real industrial handling equipment.</a:t>
+              <a:t>a multi-scale, multi-property </a:t>
+            </a:r>
+            <a:r>
+              <a:rPr sz="1250" b="0" i="0" dirty="0" err="1">
+                <a:solidFill>
+                  <a:srgbClr val="FFFFFF"/>
+                </a:solidFill>
+                <a:latin typeface="Calibri"/>
+              </a:rPr>
+              <a:t>characterisation</a:t>
+            </a:r>
+            <a:r>
+              <a:rPr sz="1250" b="0" i="0" dirty="0">
+                <a:solidFill>
+                  <a:srgbClr val="FFFFFF"/>
+                </a:solidFill>
+                <a:latin typeface="Calibri"/>
+              </a:rPr>
+              <a:t> model that transforms raw Tata Steel data into a dynamic digital twin of EAF scrap infeed — multi-material recipes (bale, shredded, heavy melting scrap) moving through real industrial handling equipment.</a:t>
             </a:r>
           </a:p>
         </p:txBody>
@@ -15914,7 +16414,7 @@
         </p:nvSpPr>
         <p:spPr>
           <a:xfrm>
-            <a:off x="411480" y="2212848"/>
+            <a:off x="748362" y="2212848"/>
             <a:ext cx="3675887" cy="3310128"/>
           </a:xfrm>
           <a:prstGeom prst="roundRect">
@@ -15951,6 +16451,7 @@
           <a:lstStyle/>
           <a:p>
             <a:pPr algn="ctr"/>
+            <a:endParaRPr/>
           </a:p>
         </p:txBody>
       </p:sp>
@@ -15962,7 +16463,7 @@
         </p:nvSpPr>
         <p:spPr>
           <a:xfrm>
-            <a:off x="411480" y="2212848"/>
+            <a:off x="748362" y="2212848"/>
             <a:ext cx="3675887" cy="475488"/>
           </a:xfrm>
           <a:prstGeom prst="rect">
@@ -15991,7 +16492,7 @@
           </a:fontRef>
         </p:style>
         <p:txBody>
-          <a:bodyPr rtlCol="0" anchor="ctr" lIns="128016"/>
+          <a:bodyPr lIns="128016" rtlCol="0" anchor="ctr"/>
           <a:lstStyle/>
           <a:p>
             <a:pPr algn="ctr"/>
@@ -16015,7 +16516,7 @@
         </p:nvSpPr>
         <p:spPr>
           <a:xfrm>
-            <a:off x="557784" y="2834640"/>
+            <a:off x="894666" y="2834640"/>
             <a:ext cx="3383279" cy="2578608"/>
           </a:xfrm>
           <a:prstGeom prst="rect">
@@ -16024,7 +16525,7 @@
           <a:noFill/>
         </p:spPr>
         <p:txBody>
-          <a:bodyPr wrap="square" lIns="0" rIns="0" tIns="0" bIns="0">
+          <a:bodyPr wrap="square" lIns="0" tIns="0" rIns="0" bIns="0">
             <a:spAutoFit/>
           </a:bodyPr>
           <a:lstStyle/>
@@ -16038,7 +16539,7 @@
               </a:spcAft>
             </a:pPr>
             <a:r>
-              <a:rPr sz="1000" b="1" i="0">
+              <a:rPr sz="1000" b="1" i="0" dirty="0">
                 <a:solidFill>
                   <a:srgbClr val="00A4E4"/>
                 </a:solidFill>
@@ -16047,7 +16548,7 @@
               <a:t>•  </a:t>
             </a:r>
             <a:r>
-              <a:rPr sz="1000" b="0" i="0">
+              <a:rPr sz="1000" b="0" i="0" dirty="0">
                 <a:solidFill>
                   <a:srgbClr val="2B2B2B"/>
                 </a:solidFill>
@@ -16066,7 +16567,7 @@
               </a:spcAft>
             </a:pPr>
             <a:r>
-              <a:rPr sz="1000" b="1" i="0">
+              <a:rPr sz="1000" b="1" i="0" dirty="0">
                 <a:solidFill>
                   <a:srgbClr val="00A4E4"/>
                 </a:solidFill>
@@ -16075,7 +16576,7 @@
               <a:t>•  </a:t>
             </a:r>
             <a:r>
-              <a:rPr sz="1000" b="0" i="0">
+              <a:rPr sz="1000" b="0" i="0" dirty="0">
                 <a:solidFill>
                   <a:srgbClr val="2B2B2B"/>
                 </a:solidFill>
@@ -16094,7 +16595,7 @@
               </a:spcAft>
             </a:pPr>
             <a:r>
-              <a:rPr sz="1000" b="1" i="0">
+              <a:rPr sz="1000" b="1" i="0" dirty="0">
                 <a:solidFill>
                   <a:srgbClr val="00A4E4"/>
                 </a:solidFill>
@@ -16103,7 +16604,7 @@
               <a:t>•  </a:t>
             </a:r>
             <a:r>
-              <a:rPr sz="1000" b="0" i="0">
+              <a:rPr sz="1000" b="0" i="0" dirty="0">
                 <a:solidFill>
                   <a:srgbClr val="2B2B2B"/>
                 </a:solidFill>
@@ -16122,7 +16623,7 @@
         </p:nvSpPr>
         <p:spPr>
           <a:xfrm>
-            <a:off x="4256531" y="2212848"/>
+            <a:off x="4593413" y="2212848"/>
             <a:ext cx="3675887" cy="3310128"/>
           </a:xfrm>
           <a:prstGeom prst="roundRect">
@@ -16159,6 +16660,7 @@
           <a:lstStyle/>
           <a:p>
             <a:pPr algn="ctr"/>
+            <a:endParaRPr/>
           </a:p>
         </p:txBody>
       </p:sp>
@@ -16170,7 +16672,7 @@
         </p:nvSpPr>
         <p:spPr>
           <a:xfrm>
-            <a:off x="4256531" y="2212848"/>
+            <a:off x="4593413" y="2212848"/>
             <a:ext cx="3675887" cy="475488"/>
           </a:xfrm>
           <a:prstGeom prst="rect">
@@ -16199,7 +16701,7 @@
           </a:fontRef>
         </p:style>
         <p:txBody>
-          <a:bodyPr rtlCol="0" anchor="ctr" lIns="128016"/>
+          <a:bodyPr lIns="128016" rtlCol="0" anchor="ctr"/>
           <a:lstStyle/>
           <a:p>
             <a:pPr algn="ctr"/>
@@ -16223,7 +16725,7 @@
         </p:nvSpPr>
         <p:spPr>
           <a:xfrm>
-            <a:off x="4402836" y="2834640"/>
+            <a:off x="4739718" y="2834640"/>
             <a:ext cx="3383279" cy="2578608"/>
           </a:xfrm>
           <a:prstGeom prst="rect">
@@ -16232,7 +16734,7 @@
           <a:noFill/>
         </p:spPr>
         <p:txBody>
-          <a:bodyPr wrap="square" lIns="0" rIns="0" tIns="0" bIns="0">
+          <a:bodyPr wrap="square" lIns="0" tIns="0" rIns="0" bIns="0">
             <a:spAutoFit/>
           </a:bodyPr>
           <a:lstStyle/>
@@ -16330,7 +16832,7 @@
         </p:nvSpPr>
         <p:spPr>
           <a:xfrm>
-            <a:off x="8101583" y="2212848"/>
+            <a:off x="8438465" y="2212848"/>
             <a:ext cx="3675887" cy="3310128"/>
           </a:xfrm>
           <a:prstGeom prst="roundRect">
@@ -16367,6 +16869,7 @@
           <a:lstStyle/>
           <a:p>
             <a:pPr algn="ctr"/>
+            <a:endParaRPr/>
           </a:p>
         </p:txBody>
       </p:sp>
@@ -16378,7 +16881,7 @@
         </p:nvSpPr>
         <p:spPr>
           <a:xfrm>
-            <a:off x="8101583" y="2212848"/>
+            <a:off x="8438465" y="2212848"/>
             <a:ext cx="3675887" cy="475488"/>
           </a:xfrm>
           <a:prstGeom prst="rect">
@@ -16407,7 +16910,7 @@
           </a:fontRef>
         </p:style>
         <p:txBody>
-          <a:bodyPr rtlCol="0" anchor="ctr" lIns="128016"/>
+          <a:bodyPr lIns="128016" rtlCol="0" anchor="ctr"/>
           <a:lstStyle/>
           <a:p>
             <a:pPr algn="ctr"/>
@@ -16431,7 +16934,7 @@
         </p:nvSpPr>
         <p:spPr>
           <a:xfrm>
-            <a:off x="8247887" y="2834640"/>
+            <a:off x="8584769" y="2834640"/>
             <a:ext cx="3383279" cy="2578608"/>
           </a:xfrm>
           <a:prstGeom prst="rect">
@@ -16440,7 +16943,7 @@
           <a:noFill/>
         </p:spPr>
         <p:txBody>
-          <a:bodyPr wrap="square" lIns="0" rIns="0" tIns="0" bIns="0">
+          <a:bodyPr wrap="square" lIns="0" tIns="0" rIns="0" bIns="0">
             <a:spAutoFit/>
           </a:bodyPr>
           <a:lstStyle/>
@@ -16807,44 +17310,44 @@
         <a:sysClr val="window" lastClr="FFFFFF"/>
       </a:lt1>
       <a:dk2>
-        <a:srgbClr val="1F497D"/>
+        <a:srgbClr val="0E2841"/>
       </a:dk2>
       <a:lt2>
-        <a:srgbClr val="EEECE1"/>
+        <a:srgbClr val="E8E8E8"/>
       </a:lt2>
       <a:accent1>
-        <a:srgbClr val="4F81BD"/>
+        <a:srgbClr val="156082"/>
       </a:accent1>
       <a:accent2>
-        <a:srgbClr val="C0504D"/>
+        <a:srgbClr val="E97132"/>
       </a:accent2>
       <a:accent3>
-        <a:srgbClr val="9BBB59"/>
+        <a:srgbClr val="196B24"/>
       </a:accent3>
       <a:accent4>
-        <a:srgbClr val="8064A2"/>
+        <a:srgbClr val="0F9ED5"/>
       </a:accent4>
       <a:accent5>
-        <a:srgbClr val="4BACC6"/>
+        <a:srgbClr val="A02B93"/>
       </a:accent5>
       <a:accent6>
-        <a:srgbClr val="F79646"/>
+        <a:srgbClr val="4EA72E"/>
       </a:accent6>
       <a:hlink>
-        <a:srgbClr val="0000FF"/>
+        <a:srgbClr val="467886"/>
       </a:hlink>
       <a:folHlink>
-        <a:srgbClr val="800080"/>
+        <a:srgbClr val="96607D"/>
       </a:folHlink>
     </a:clrScheme>
     <a:fontScheme name="Office">
       <a:majorFont>
-        <a:latin typeface="Calibri"/>
+        <a:latin typeface="Aptos Display" panose="02110004020202020204"/>
         <a:ea typeface=""/>
         <a:cs typeface=""/>
-        <a:font script="Jpan" typeface="ＭＳ Ｐゴシック"/>
+        <a:font script="Jpan" typeface="游ゴシック Light"/>
         <a:font script="Hang" typeface="맑은 고딕"/>
-        <a:font script="Hans" typeface="宋体"/>
+        <a:font script="Hans" typeface="等线 Light"/>
         <a:font script="Hant" typeface="新細明體"/>
         <a:font script="Arab" typeface="Times New Roman"/>
         <a:font script="Hebr" typeface="Times New Roman"/>
@@ -16872,14 +17375,31 @@
         <a:font script="Viet" typeface="Times New Roman"/>
         <a:font script="Uigh" typeface="Microsoft Uighur"/>
         <a:font script="Geor" typeface="Sylfaen"/>
+        <a:font script="Armn" typeface="Arial"/>
+        <a:font script="Bugi" typeface="Leelawadee UI"/>
+        <a:font script="Bopo" typeface="Microsoft JhengHei"/>
+        <a:font script="Java" typeface="Javanese Text"/>
+        <a:font script="Lisu" typeface="Segoe UI"/>
+        <a:font script="Mymr" typeface="Myanmar Text"/>
+        <a:font script="Nkoo" typeface="Ebrima"/>
+        <a:font script="Olck" typeface="Nirmala UI"/>
+        <a:font script="Osma" typeface="Ebrima"/>
+        <a:font script="Phag" typeface="Phagspa"/>
+        <a:font script="Syrn" typeface="Estrangelo Edessa"/>
+        <a:font script="Syrj" typeface="Estrangelo Edessa"/>
+        <a:font script="Syre" typeface="Estrangelo Edessa"/>
+        <a:font script="Sora" typeface="Nirmala UI"/>
+        <a:font script="Tale" typeface="Microsoft Tai Le"/>
+        <a:font script="Talu" typeface="Microsoft New Tai Lue"/>
+        <a:font script="Tfng" typeface="Ebrima"/>
       </a:majorFont>
       <a:minorFont>
-        <a:latin typeface="Calibri"/>
+        <a:latin typeface="Aptos" panose="02110004020202020204"/>
         <a:ea typeface=""/>
         <a:cs typeface=""/>
-        <a:font script="Jpan" typeface="ＭＳ Ｐゴシック"/>
+        <a:font script="Jpan" typeface="游ゴシック"/>
         <a:font script="Hang" typeface="맑은 고딕"/>
-        <a:font script="Hans" typeface="宋体"/>
+        <a:font script="Hans" typeface="等线"/>
         <a:font script="Hant" typeface="新細明體"/>
         <a:font script="Arab" typeface="Arial"/>
         <a:font script="Hebr" typeface="Arial"/>
@@ -16907,6 +17427,23 @@
         <a:font script="Viet" typeface="Arial"/>
         <a:font script="Uigh" typeface="Microsoft Uighur"/>
         <a:font script="Geor" typeface="Sylfaen"/>
+        <a:font script="Armn" typeface="Arial"/>
+        <a:font script="Bugi" typeface="Leelawadee UI"/>
+        <a:font script="Bopo" typeface="Microsoft JhengHei"/>
+        <a:font script="Java" typeface="Javanese Text"/>
+        <a:font script="Lisu" typeface="Segoe UI"/>
+        <a:font script="Mymr" typeface="Myanmar Text"/>
+        <a:font script="Nkoo" typeface="Ebrima"/>
+        <a:font script="Olck" typeface="Nirmala UI"/>
+        <a:font script="Osma" typeface="Ebrima"/>
+        <a:font script="Phag" typeface="Phagspa"/>
+        <a:font script="Syrn" typeface="Estrangelo Edessa"/>
+        <a:font script="Syrj" typeface="Estrangelo Edessa"/>
+        <a:font script="Syre" typeface="Estrangelo Edessa"/>
+        <a:font script="Sora" typeface="Nirmala UI"/>
+        <a:font script="Tale" typeface="Microsoft Tai Le"/>
+        <a:font script="Talu" typeface="Microsoft New Tai Lue"/>
+        <a:font script="Tfng" typeface="Ebrima"/>
       </a:minorFont>
     </a:fontScheme>
     <a:fmtScheme name="Office">
@@ -16918,180 +17455,136 @@
           <a:gsLst>
             <a:gs pos="0">
               <a:schemeClr val="phClr">
-                <a:tint val="50000"/>
-                <a:satMod val="300000"/>
+                <a:lumMod val="110000"/>
+                <a:satMod val="105000"/>
+                <a:tint val="67000"/>
               </a:schemeClr>
             </a:gs>
-            <a:gs pos="35000">
+            <a:gs pos="50000">
               <a:schemeClr val="phClr">
-                <a:tint val="37000"/>
-                <a:satMod val="300000"/>
+                <a:lumMod val="105000"/>
+                <a:satMod val="103000"/>
+                <a:tint val="73000"/>
               </a:schemeClr>
             </a:gs>
             <a:gs pos="100000">
               <a:schemeClr val="phClr">
-                <a:tint val="15000"/>
-                <a:satMod val="350000"/>
+                <a:lumMod val="105000"/>
+                <a:satMod val="109000"/>
+                <a:tint val="81000"/>
               </a:schemeClr>
             </a:gs>
           </a:gsLst>
-          <a:lin ang="16200000" scaled="1"/>
+          <a:lin ang="5400000" scaled="0"/>
         </a:gradFill>
         <a:gradFill rotWithShape="1">
           <a:gsLst>
             <a:gs pos="0">
               <a:schemeClr val="phClr">
-                <a:tint val="100000"/>
+                <a:satMod val="103000"/>
+                <a:lumMod val="102000"/>
+                <a:tint val="94000"/>
+              </a:schemeClr>
+            </a:gs>
+            <a:gs pos="50000">
+              <a:schemeClr val="phClr">
+                <a:satMod val="110000"/>
+                <a:lumMod val="100000"/>
                 <a:shade val="100000"/>
-                <a:satMod val="130000"/>
               </a:schemeClr>
             </a:gs>
             <a:gs pos="100000">
               <a:schemeClr val="phClr">
-                <a:tint val="50000"/>
-                <a:shade val="100000"/>
-                <a:satMod val="350000"/>
+                <a:lumMod val="99000"/>
+                <a:satMod val="120000"/>
+                <a:shade val="78000"/>
               </a:schemeClr>
             </a:gs>
           </a:gsLst>
-          <a:lin ang="16200000" scaled="0"/>
+          <a:lin ang="5400000" scaled="0"/>
         </a:gradFill>
       </a:fillStyleLst>
       <a:lnStyleLst>
-        <a:ln w="9525" cap="flat" cmpd="sng" algn="ctr">
+        <a:ln w="12700" cap="flat" cmpd="sng" algn="ctr">
           <a:solidFill>
-            <a:schemeClr val="phClr">
-              <a:shade val="95000"/>
-              <a:satMod val="105000"/>
-            </a:schemeClr>
+            <a:schemeClr val="phClr"/>
           </a:solidFill>
           <a:prstDash val="solid"/>
+          <a:miter lim="800000"/>
+        </a:ln>
+        <a:ln w="19050" cap="flat" cmpd="sng" algn="ctr">
+          <a:solidFill>
+            <a:schemeClr val="phClr"/>
+          </a:solidFill>
+          <a:prstDash val="solid"/>
+          <a:miter lim="800000"/>
         </a:ln>
         <a:ln w="25400" cap="flat" cmpd="sng" algn="ctr">
           <a:solidFill>
             <a:schemeClr val="phClr"/>
           </a:solidFill>
           <a:prstDash val="solid"/>
-        </a:ln>
-        <a:ln w="38100" cap="flat" cmpd="sng" algn="ctr">
-          <a:solidFill>
-            <a:schemeClr val="phClr"/>
-          </a:solidFill>
-          <a:prstDash val="solid"/>
+          <a:miter lim="800000"/>
         </a:ln>
       </a:lnStyleLst>
       <a:effectStyleLst>
         <a:effectStyle>
+          <a:effectLst/>
+        </a:effectStyle>
+        <a:effectStyle>
+          <a:effectLst/>
+        </a:effectStyle>
+        <a:effectStyle>
           <a:effectLst>
-            <a:outerShdw blurRad="40000" dist="20000" dir="5400000" rotWithShape="0">
+            <a:outerShdw blurRad="57150" dist="19050" dir="5400000" algn="ctr" rotWithShape="0">
               <a:srgbClr val="000000">
-                <a:alpha val="38000"/>
+                <a:alpha val="63000"/>
               </a:srgbClr>
             </a:outerShdw>
           </a:effectLst>
-        </a:effectStyle>
-        <a:effectStyle>
-          <a:effectLst>
-            <a:outerShdw blurRad="40000" dist="23000" dir="5400000" rotWithShape="0">
-              <a:srgbClr val="000000">
-                <a:alpha val="35000"/>
-              </a:srgbClr>
-            </a:outerShdw>
-          </a:effectLst>
-        </a:effectStyle>
-        <a:effectStyle>
-          <a:effectLst>
-            <a:outerShdw blurRad="40000" dist="23000" dir="5400000" rotWithShape="0">
-              <a:srgbClr val="000000">
-                <a:alpha val="35000"/>
-              </a:srgbClr>
-            </a:outerShdw>
-          </a:effectLst>
-          <a:scene3d>
-            <a:camera prst="orthographicFront">
-              <a:rot lat="0" lon="0" rev="0"/>
-            </a:camera>
-            <a:lightRig rig="threePt" dir="t">
-              <a:rot lat="0" lon="0" rev="1200000"/>
-            </a:lightRig>
-          </a:scene3d>
-          <a:sp3d>
-            <a:bevelT w="63500" h="25400"/>
-          </a:sp3d>
         </a:effectStyle>
       </a:effectStyleLst>
       <a:bgFillStyleLst>
         <a:solidFill>
           <a:schemeClr val="phClr"/>
         </a:solidFill>
+        <a:solidFill>
+          <a:schemeClr val="phClr">
+            <a:tint val="95000"/>
+            <a:satMod val="170000"/>
+          </a:schemeClr>
+        </a:solidFill>
         <a:gradFill rotWithShape="1">
           <a:gsLst>
             <a:gs pos="0">
               <a:schemeClr val="phClr">
-                <a:tint val="40000"/>
-                <a:satMod val="350000"/>
+                <a:tint val="93000"/>
+                <a:satMod val="150000"/>
+                <a:shade val="98000"/>
+                <a:lumMod val="102000"/>
               </a:schemeClr>
             </a:gs>
-            <a:gs pos="40000">
+            <a:gs pos="50000">
               <a:schemeClr val="phClr">
-                <a:tint val="45000"/>
-                <a:shade val="99000"/>
-                <a:satMod val="350000"/>
+                <a:tint val="98000"/>
+                <a:satMod val="130000"/>
+                <a:shade val="90000"/>
+                <a:lumMod val="103000"/>
               </a:schemeClr>
             </a:gs>
             <a:gs pos="100000">
               <a:schemeClr val="phClr">
-                <a:shade val="20000"/>
-                <a:satMod val="255000"/>
+                <a:shade val="63000"/>
+                <a:satMod val="120000"/>
               </a:schemeClr>
             </a:gs>
           </a:gsLst>
-          <a:path path="circle">
-            <a:fillToRect l="50000" t="-80000" r="50000" b="180000"/>
-          </a:path>
-        </a:gradFill>
-        <a:gradFill rotWithShape="1">
-          <a:gsLst>
-            <a:gs pos="0">
-              <a:schemeClr val="phClr">
-                <a:tint val="80000"/>
-                <a:satMod val="300000"/>
-              </a:schemeClr>
-            </a:gs>
-            <a:gs pos="100000">
-              <a:schemeClr val="phClr">
-                <a:shade val="30000"/>
-                <a:satMod val="200000"/>
-              </a:schemeClr>
-            </a:gs>
-          </a:gsLst>
-          <a:path path="circle">
-            <a:fillToRect l="50000" t="50000" r="50000" b="50000"/>
-          </a:path>
+          <a:lin ang="5400000" scaled="0"/>
         </a:gradFill>
       </a:bgFillStyleLst>
     </a:fmtScheme>
   </a:themeElements>
   <a:objectDefaults>
-    <a:spDef>
-      <a:spPr/>
-      <a:bodyPr/>
-      <a:lstStyle/>
-      <a:style>
-        <a:lnRef idx="1">
-          <a:schemeClr val="accent1"/>
-        </a:lnRef>
-        <a:fillRef idx="3">
-          <a:schemeClr val="accent1"/>
-        </a:fillRef>
-        <a:effectRef idx="2">
-          <a:schemeClr val="accent1"/>
-        </a:effectRef>
-        <a:fontRef idx="minor">
-          <a:schemeClr val="lt1"/>
-        </a:fontRef>
-      </a:style>
-    </a:spDef>
     <a:lnDef>
       <a:spPr/>
       <a:bodyPr/>
@@ -17113,5 +17606,10 @@
     </a:lnDef>
   </a:objectDefaults>
   <a:extraClrSchemeLst/>
+  <a:extLst>
+    <a:ext uri="{05A4C25C-085E-4340-85A3-A5531E510DB2}">
+      <thm15:themeFamily xmlns:thm15="http://schemas.microsoft.com/office/thememl/2012/main" name="Office Theme" id="{2E142A2C-CD16-42D6-873A-C26D2A0506FA}" vid="{1BDDFF52-6CD6-40A5-AB3C-68EB2F1E4D0A}"/>
+    </a:ext>
+  </a:extLst>
 </a:theme>
 </file>